--- a/output/wordlabs-multi-prefix-3day.pptx
+++ b/output/wordlabs-multi-prefix-3day.pptx
@@ -6040,7 +6040,7 @@
                 <a:ea typeface="Calibri" pitchFamily="34" charset="-122"/>
                 <a:cs typeface="Calibri" pitchFamily="34" charset="-120"/>
               </a:rPr>
-              <a:t>Our class made a </a:t>
+              <a:t>Our school is a </a:t>
             </a:r>
             <a:pPr algn="l" indent="0" marL="0">
               <a:buNone/>
@@ -6057,7 +6057,7 @@
                 <a:ea typeface="Calibri" pitchFamily="34" charset="-122"/>
                 <a:cs typeface="Calibri" pitchFamily="34" charset="-120"/>
               </a:rPr>
-              <a:t>multicoloured</a:t>
+              <a:t>multicultural</a:t>
             </a:r>
             <a:pPr algn="l" indent="0" marL="0">
               <a:buNone/>
@@ -6071,7 +6071,7 @@
                 <a:ea typeface="Calibri" pitchFamily="34" charset="-122"/>
                 <a:cs typeface="Calibri" pitchFamily="34" charset="-120"/>
               </a:rPr>
-              <a:t> mural, and we had to </a:t>
+              <a:t> place where students speak </a:t>
             </a:r>
             <a:pPr algn="l" indent="0" marL="0">
               <a:buNone/>
@@ -6088,7 +6088,7 @@
                 <a:ea typeface="Calibri" pitchFamily="34" charset="-122"/>
                 <a:cs typeface="Calibri" pitchFamily="34" charset="-120"/>
               </a:rPr>
-              <a:t>multiply</a:t>
+              <a:t>multiple</a:t>
             </a:r>
             <a:pPr algn="l" indent="0" marL="0">
               <a:buNone/>
@@ -6102,7 +6102,7 @@
                 <a:ea typeface="Calibri" pitchFamily="34" charset="-122"/>
                 <a:cs typeface="Calibri" pitchFamily="34" charset="-120"/>
               </a:rPr>
-              <a:t> the paint colours to cover the wall.</a:t>
+              <a:t> languages.</a:t>
             </a:r>
             <a:endParaRPr lang="en-US" sz="1800" dirty="0"/>
           </a:p>
@@ -6257,7 +6257,7 @@
                 <a:ea typeface="Trebuchet MS" pitchFamily="34" charset="-122"/>
                 <a:cs typeface="Trebuchet MS" pitchFamily="34" charset="-120"/>
               </a:rPr>
-              <a:t>multicoloured</a:t>
+              <a:t>multicultural</a:t>
             </a:r>
             <a:endParaRPr lang="en-US" sz="1400" dirty="0"/>
           </a:p>
@@ -6385,7 +6385,7 @@
                 <a:ea typeface="Trebuchet MS" pitchFamily="34" charset="-122"/>
                 <a:cs typeface="Trebuchet MS" pitchFamily="34" charset="-120"/>
               </a:rPr>
-              <a:t>multiply</a:t>
+              <a:t>multiple</a:t>
             </a:r>
             <a:endParaRPr lang="en-US" sz="1400" dirty="0"/>
           </a:p>
@@ -6855,7 +6855,7 @@
                 <a:ea typeface="Trebuchet MS" pitchFamily="34" charset="-122"/>
                 <a:cs typeface="Trebuchet MS" pitchFamily="34" charset="-120"/>
               </a:rPr>
-              <a:t>multicoloured</a:t>
+              <a:t>multicultural</a:t>
             </a:r>
             <a:endParaRPr lang="en-US" sz="2800" dirty="0"/>
           </a:p>
@@ -7682,7 +7682,7 @@
                 <a:ea typeface="Trebuchet MS" pitchFamily="34" charset="-122"/>
                 <a:cs typeface="Trebuchet MS" pitchFamily="34" charset="-120"/>
               </a:rPr>
-              <a:t>multicoloured</a:t>
+              <a:t>multicultural</a:t>
             </a:r>
             <a:endParaRPr lang="en-US" sz="2800" dirty="0"/>
           </a:p>
@@ -7933,7 +7933,7 @@
                 <a:ea typeface="Trebuchet MS" pitchFamily="34" charset="-122"/>
                 <a:cs typeface="Trebuchet MS" pitchFamily="34" charset="-120"/>
               </a:rPr>
-              <a:t>colour</a:t>
+              <a:t>cultur</a:t>
             </a:r>
             <a:endParaRPr lang="en-US" sz="1300" dirty="0"/>
           </a:p>
@@ -7972,7 +7972,7 @@
                 <a:ea typeface="Calibri" pitchFamily="34" charset="-122"/>
                 <a:cs typeface="Calibri" pitchFamily="34" charset="-120"/>
               </a:rPr>
-              <a:t>colour</a:t>
+              <a:t>way of life, culture</a:t>
             </a:r>
             <a:endParaRPr lang="en-US" sz="850" dirty="0"/>
           </a:p>
@@ -8045,7 +8045,7 @@
                 <a:ea typeface="Trebuchet MS" pitchFamily="34" charset="-122"/>
                 <a:cs typeface="Trebuchet MS" pitchFamily="34" charset="-120"/>
               </a:rPr>
-              <a:t>ed</a:t>
+              <a:t>al</a:t>
             </a:r>
             <a:endParaRPr lang="en-US" sz="1300" dirty="0"/>
           </a:p>
@@ -8084,7 +8084,7 @@
                 <a:ea typeface="Calibri" pitchFamily="34" charset="-122"/>
                 <a:cs typeface="Calibri" pitchFamily="34" charset="-120"/>
               </a:rPr>
-              <a:t>having the quality of</a:t>
+              <a:t>relating to</a:t>
             </a:r>
             <a:endParaRPr lang="en-US" sz="850" dirty="0"/>
           </a:p>
@@ -8779,7 +8779,7 @@
                 <a:ea typeface="Trebuchet MS" pitchFamily="34" charset="-122"/>
                 <a:cs typeface="Trebuchet MS" pitchFamily="34" charset="-120"/>
               </a:rPr>
-              <a:t>multicoloured</a:t>
+              <a:t>multicultural</a:t>
             </a:r>
             <a:endParaRPr lang="en-US" sz="2800" dirty="0"/>
           </a:p>
@@ -9030,7 +9030,7 @@
                 <a:ea typeface="Trebuchet MS" pitchFamily="34" charset="-122"/>
                 <a:cs typeface="Trebuchet MS" pitchFamily="34" charset="-120"/>
               </a:rPr>
-              <a:t>colour</a:t>
+              <a:t>cultur</a:t>
             </a:r>
             <a:endParaRPr lang="en-US" sz="1300" dirty="0"/>
           </a:p>
@@ -9069,7 +9069,7 @@
                 <a:ea typeface="Calibri" pitchFamily="34" charset="-122"/>
                 <a:cs typeface="Calibri" pitchFamily="34" charset="-120"/>
               </a:rPr>
-              <a:t>colour</a:t>
+              <a:t>way of life, culture</a:t>
             </a:r>
             <a:endParaRPr lang="en-US" sz="850" dirty="0"/>
           </a:p>
@@ -9142,7 +9142,7 @@
                 <a:ea typeface="Trebuchet MS" pitchFamily="34" charset="-122"/>
                 <a:cs typeface="Trebuchet MS" pitchFamily="34" charset="-120"/>
               </a:rPr>
-              <a:t>ed</a:t>
+              <a:t>al</a:t>
             </a:r>
             <a:endParaRPr lang="en-US" sz="1300" dirty="0"/>
           </a:p>
@@ -9181,7 +9181,7 @@
                 <a:ea typeface="Calibri" pitchFamily="34" charset="-122"/>
                 <a:cs typeface="Calibri" pitchFamily="34" charset="-120"/>
               </a:rPr>
-              <a:t>having the quality of</a:t>
+              <a:t>relating to</a:t>
             </a:r>
             <a:endParaRPr lang="en-US" sz="850" dirty="0"/>
           </a:p>
@@ -9288,8 +9288,8 @@
         </p:nvSpPr>
         <p:spPr>
           <a:xfrm>
-            <a:off x="1975104" y="3364992"/>
-            <a:ext cx="1554480" cy="475488"/>
+            <a:off x="1978152" y="3364992"/>
+            <a:ext cx="1225296" cy="475488"/>
           </a:xfrm>
           <a:prstGeom prst="rect">
             <a:avLst>
@@ -9315,8 +9315,8 @@
         </p:nvSpPr>
         <p:spPr>
           <a:xfrm>
-            <a:off x="1975104" y="3364992"/>
-            <a:ext cx="1554480" cy="475488"/>
+            <a:off x="1978152" y="3364992"/>
+            <a:ext cx="1225296" cy="475488"/>
           </a:xfrm>
           <a:prstGeom prst="rect">
             <a:avLst/>
@@ -9354,8 +9354,8 @@
         </p:nvSpPr>
         <p:spPr>
           <a:xfrm>
-            <a:off x="3529584" y="3364992"/>
-            <a:ext cx="73152" cy="475488"/>
+            <a:off x="3203448" y="3364992"/>
+            <a:ext cx="76200" cy="475488"/>
           </a:xfrm>
           <a:prstGeom prst="rect">
             <a:avLst/>
@@ -9393,8 +9393,8 @@
         </p:nvSpPr>
         <p:spPr>
           <a:xfrm>
-            <a:off x="3602736" y="3364992"/>
-            <a:ext cx="1554480" cy="475488"/>
+            <a:off x="3279648" y="3364992"/>
+            <a:ext cx="1225296" cy="475488"/>
           </a:xfrm>
           <a:prstGeom prst="rect">
             <a:avLst>
@@ -9420,8 +9420,8 @@
         </p:nvSpPr>
         <p:spPr>
           <a:xfrm>
-            <a:off x="3602736" y="3364992"/>
-            <a:ext cx="1554480" cy="475488"/>
+            <a:off x="3279648" y="3364992"/>
+            <a:ext cx="1225296" cy="475488"/>
           </a:xfrm>
           <a:prstGeom prst="rect">
             <a:avLst/>
@@ -9459,8 +9459,8 @@
         </p:nvSpPr>
         <p:spPr>
           <a:xfrm>
-            <a:off x="5157216" y="3364992"/>
-            <a:ext cx="73152" cy="475488"/>
+            <a:off x="4504944" y="3364992"/>
+            <a:ext cx="76200" cy="475488"/>
           </a:xfrm>
           <a:prstGeom prst="rect">
             <a:avLst/>
@@ -9498,8 +9498,8 @@
         </p:nvSpPr>
         <p:spPr>
           <a:xfrm>
-            <a:off x="5230368" y="3364992"/>
-            <a:ext cx="1554480" cy="475488"/>
+            <a:off x="4581144" y="3364992"/>
+            <a:ext cx="1225296" cy="475488"/>
           </a:xfrm>
           <a:prstGeom prst="rect">
             <a:avLst>
@@ -9525,8 +9525,8 @@
         </p:nvSpPr>
         <p:spPr>
           <a:xfrm>
-            <a:off x="5230368" y="3364992"/>
-            <a:ext cx="1554480" cy="475488"/>
+            <a:off x="4581144" y="3364992"/>
+            <a:ext cx="1225296" cy="475488"/>
           </a:xfrm>
           <a:prstGeom prst="rect">
             <a:avLst/>
@@ -9550,7 +9550,7 @@
                 <a:ea typeface="Trebuchet MS" pitchFamily="34" charset="-122"/>
                 <a:cs typeface="Trebuchet MS" pitchFamily="34" charset="-120"/>
               </a:rPr>
-              <a:t>col</a:t>
+              <a:t>cul</a:t>
             </a:r>
             <a:endParaRPr lang="en-US" sz="1400" dirty="0"/>
           </a:p>
@@ -9564,8 +9564,8 @@
         </p:nvSpPr>
         <p:spPr>
           <a:xfrm>
-            <a:off x="6784848" y="3364992"/>
-            <a:ext cx="73152" cy="475488"/>
+            <a:off x="5806440" y="3364992"/>
+            <a:ext cx="76200" cy="475488"/>
           </a:xfrm>
           <a:prstGeom prst="rect">
             <a:avLst/>
@@ -9603,8 +9603,8 @@
         </p:nvSpPr>
         <p:spPr>
           <a:xfrm>
-            <a:off x="6858000" y="3364992"/>
-            <a:ext cx="1554480" cy="475488"/>
+            <a:off x="5882640" y="3364992"/>
+            <a:ext cx="1225296" cy="475488"/>
           </a:xfrm>
           <a:prstGeom prst="rect">
             <a:avLst>
@@ -9630,8 +9630,8 @@
         </p:nvSpPr>
         <p:spPr>
           <a:xfrm>
-            <a:off x="6858000" y="3364992"/>
-            <a:ext cx="1554480" cy="475488"/>
+            <a:off x="5882640" y="3364992"/>
+            <a:ext cx="1225296" cy="475488"/>
           </a:xfrm>
           <a:prstGeom prst="rect">
             <a:avLst/>
@@ -9655,7 +9655,7 @@
                 <a:ea typeface="Trebuchet MS" pitchFamily="34" charset="-122"/>
                 <a:cs typeface="Trebuchet MS" pitchFamily="34" charset="-120"/>
               </a:rPr>
-              <a:t>oured</a:t>
+              <a:t>tur</a:t>
             </a:r>
             <a:endParaRPr lang="en-US" sz="1400" dirty="0"/>
           </a:p>
@@ -9663,7 +9663,112 @@
       </p:sp>
       <p:sp>
         <p:nvSpPr>
-          <p:cNvPr id="39" name="Shape 37"/>
+          <p:cNvPr id="39" name="Text 37"/>
+          <p:cNvSpPr/>
+          <p:nvPr/>
+        </p:nvSpPr>
+        <p:spPr>
+          <a:xfrm>
+            <a:off x="7107936" y="3364992"/>
+            <a:ext cx="76200" cy="475488"/>
+          </a:xfrm>
+          <a:prstGeom prst="rect">
+            <a:avLst/>
+          </a:prstGeom>
+          <a:noFill/>
+          <a:ln/>
+        </p:spPr>
+        <p:txBody>
+          <a:bodyPr wrap="square" lIns="0" tIns="0" rIns="0" bIns="0" rtlCol="0" anchor="ctr"/>
+          <a:lstStyle/>
+          <a:p>
+            <a:pPr algn="ctr" indent="0" marL="0">
+              <a:buNone/>
+            </a:pPr>
+            <a:r>
+              <a:rPr lang="en-US" sz="1600" b="1" dirty="0">
+                <a:solidFill>
+                  <a:srgbClr val="0D9488"/>
+                </a:solidFill>
+                <a:latin typeface="Trebuchet MS" pitchFamily="34" charset="0"/>
+                <a:ea typeface="Trebuchet MS" pitchFamily="34" charset="-122"/>
+                <a:cs typeface="Trebuchet MS" pitchFamily="34" charset="-120"/>
+              </a:rPr>
+              <a:t>·</a:t>
+            </a:r>
+            <a:endParaRPr lang="en-US" sz="1600" dirty="0"/>
+          </a:p>
+        </p:txBody>
+      </p:sp>
+      <p:sp>
+        <p:nvSpPr>
+          <p:cNvPr id="40" name="Shape 38"/>
+          <p:cNvSpPr/>
+          <p:nvPr/>
+        </p:nvSpPr>
+        <p:spPr>
+          <a:xfrm>
+            <a:off x="7184136" y="3364992"/>
+            <a:ext cx="1225296" cy="475488"/>
+          </a:xfrm>
+          <a:prstGeom prst="rect">
+            <a:avLst>
+              <a:gd name="adj" fmla="val 9615"/>
+            </a:avLst>
+          </a:prstGeom>
+          <a:solidFill>
+            <a:srgbClr val="FFFFFF"/>
+          </a:solidFill>
+          <a:ln w="12700">
+            <a:solidFill>
+              <a:srgbClr val="0D9488"/>
+            </a:solidFill>
+            <a:prstDash val="solid"/>
+          </a:ln>
+        </p:spPr>
+      </p:sp>
+      <p:sp>
+        <p:nvSpPr>
+          <p:cNvPr id="41" name="Text 39"/>
+          <p:cNvSpPr/>
+          <p:nvPr/>
+        </p:nvSpPr>
+        <p:spPr>
+          <a:xfrm>
+            <a:off x="7184136" y="3364992"/>
+            <a:ext cx="1225296" cy="475488"/>
+          </a:xfrm>
+          <a:prstGeom prst="rect">
+            <a:avLst/>
+          </a:prstGeom>
+          <a:noFill/>
+          <a:ln/>
+        </p:spPr>
+        <p:txBody>
+          <a:bodyPr wrap="square" lIns="0" tIns="0" rIns="0" bIns="0" rtlCol="0" anchor="ctr"/>
+          <a:lstStyle/>
+          <a:p>
+            <a:pPr algn="ctr" indent="0" marL="0">
+              <a:buNone/>
+            </a:pPr>
+            <a:r>
+              <a:rPr lang="en-US" sz="1400" b="1" dirty="0">
+                <a:solidFill>
+                  <a:srgbClr val="0D9488"/>
+                </a:solidFill>
+                <a:latin typeface="Trebuchet MS" pitchFamily="34" charset="0"/>
+                <a:ea typeface="Trebuchet MS" pitchFamily="34" charset="-122"/>
+                <a:cs typeface="Trebuchet MS" pitchFamily="34" charset="-120"/>
+              </a:rPr>
+              <a:t>al</a:t>
+            </a:r>
+            <a:endParaRPr lang="en-US" sz="1400" dirty="0"/>
+          </a:p>
+        </p:txBody>
+      </p:sp>
+      <p:sp>
+        <p:nvSpPr>
+          <p:cNvPr id="42" name="Shape 40"/>
           <p:cNvSpPr/>
           <p:nvPr/>
         </p:nvSpPr>
@@ -9690,7 +9795,7 @@
       </p:sp>
       <p:sp>
         <p:nvSpPr>
-          <p:cNvPr id="40" name="Text 38"/>
+          <p:cNvPr id="43" name="Text 41"/>
           <p:cNvSpPr/>
           <p:nvPr/>
         </p:nvSpPr>
@@ -9729,7 +9834,7 @@
       </p:sp>
       <p:sp>
         <p:nvSpPr>
-          <p:cNvPr id="41" name="Shape 39"/>
+          <p:cNvPr id="44" name="Shape 42"/>
           <p:cNvSpPr/>
           <p:nvPr/>
         </p:nvSpPr>
@@ -9756,7 +9861,7 @@
       </p:sp>
       <p:sp>
         <p:nvSpPr>
-          <p:cNvPr id="42" name="Text 40"/>
+          <p:cNvPr id="45" name="Text 43"/>
           <p:cNvSpPr/>
           <p:nvPr/>
         </p:nvSpPr>
@@ -10218,7 +10323,7 @@
                 <a:ea typeface="Trebuchet MS" pitchFamily="34" charset="-122"/>
                 <a:cs typeface="Trebuchet MS" pitchFamily="34" charset="-120"/>
               </a:rPr>
-              <a:t>multicoloured</a:t>
+              <a:t>multicultural</a:t>
             </a:r>
             <a:endParaRPr lang="en-US" sz="2800" dirty="0"/>
           </a:p>
@@ -10469,7 +10574,7 @@
                 <a:ea typeface="Trebuchet MS" pitchFamily="34" charset="-122"/>
                 <a:cs typeface="Trebuchet MS" pitchFamily="34" charset="-120"/>
               </a:rPr>
-              <a:t>colour</a:t>
+              <a:t>cultur</a:t>
             </a:r>
             <a:endParaRPr lang="en-US" sz="1300" dirty="0"/>
           </a:p>
@@ -10508,7 +10613,7 @@
                 <a:ea typeface="Calibri" pitchFamily="34" charset="-122"/>
                 <a:cs typeface="Calibri" pitchFamily="34" charset="-120"/>
               </a:rPr>
-              <a:t>colour</a:t>
+              <a:t>way of life, culture</a:t>
             </a:r>
             <a:endParaRPr lang="en-US" sz="850" dirty="0"/>
           </a:p>
@@ -10581,7 +10686,7 @@
                 <a:ea typeface="Trebuchet MS" pitchFamily="34" charset="-122"/>
                 <a:cs typeface="Trebuchet MS" pitchFamily="34" charset="-120"/>
               </a:rPr>
-              <a:t>ed</a:t>
+              <a:t>al</a:t>
             </a:r>
             <a:endParaRPr lang="en-US" sz="1300" dirty="0"/>
           </a:p>
@@ -10620,7 +10725,7 @@
                 <a:ea typeface="Calibri" pitchFamily="34" charset="-122"/>
                 <a:cs typeface="Calibri" pitchFamily="34" charset="-120"/>
               </a:rPr>
-              <a:t>having the quality of</a:t>
+              <a:t>relating to</a:t>
             </a:r>
             <a:endParaRPr lang="en-US" sz="850" dirty="0"/>
           </a:p>
@@ -10727,8 +10832,8 @@
         </p:nvSpPr>
         <p:spPr>
           <a:xfrm>
-            <a:off x="1975104" y="3364992"/>
-            <a:ext cx="1554480" cy="475488"/>
+            <a:off x="1978152" y="3364992"/>
+            <a:ext cx="1225296" cy="475488"/>
           </a:xfrm>
           <a:prstGeom prst="rect">
             <a:avLst>
@@ -10754,8 +10859,8 @@
         </p:nvSpPr>
         <p:spPr>
           <a:xfrm>
-            <a:off x="1975104" y="3364992"/>
-            <a:ext cx="1554480" cy="475488"/>
+            <a:off x="1978152" y="3364992"/>
+            <a:ext cx="1225296" cy="475488"/>
           </a:xfrm>
           <a:prstGeom prst="rect">
             <a:avLst/>
@@ -10793,8 +10898,8 @@
         </p:nvSpPr>
         <p:spPr>
           <a:xfrm>
-            <a:off x="3529584" y="3364992"/>
-            <a:ext cx="73152" cy="475488"/>
+            <a:off x="3203448" y="3364992"/>
+            <a:ext cx="76200" cy="475488"/>
           </a:xfrm>
           <a:prstGeom prst="rect">
             <a:avLst/>
@@ -10832,8 +10937,8 @@
         </p:nvSpPr>
         <p:spPr>
           <a:xfrm>
-            <a:off x="3602736" y="3364992"/>
-            <a:ext cx="1554480" cy="475488"/>
+            <a:off x="3279648" y="3364992"/>
+            <a:ext cx="1225296" cy="475488"/>
           </a:xfrm>
           <a:prstGeom prst="rect">
             <a:avLst>
@@ -10859,8 +10964,8 @@
         </p:nvSpPr>
         <p:spPr>
           <a:xfrm>
-            <a:off x="3602736" y="3364992"/>
-            <a:ext cx="1554480" cy="475488"/>
+            <a:off x="3279648" y="3364992"/>
+            <a:ext cx="1225296" cy="475488"/>
           </a:xfrm>
           <a:prstGeom prst="rect">
             <a:avLst/>
@@ -10898,8 +11003,8 @@
         </p:nvSpPr>
         <p:spPr>
           <a:xfrm>
-            <a:off x="5157216" y="3364992"/>
-            <a:ext cx="73152" cy="475488"/>
+            <a:off x="4504944" y="3364992"/>
+            <a:ext cx="76200" cy="475488"/>
           </a:xfrm>
           <a:prstGeom prst="rect">
             <a:avLst/>
@@ -10937,8 +11042,8 @@
         </p:nvSpPr>
         <p:spPr>
           <a:xfrm>
-            <a:off x="5230368" y="3364992"/>
-            <a:ext cx="1554480" cy="475488"/>
+            <a:off x="4581144" y="3364992"/>
+            <a:ext cx="1225296" cy="475488"/>
           </a:xfrm>
           <a:prstGeom prst="rect">
             <a:avLst>
@@ -10964,8 +11069,8 @@
         </p:nvSpPr>
         <p:spPr>
           <a:xfrm>
-            <a:off x="5230368" y="3364992"/>
-            <a:ext cx="1554480" cy="475488"/>
+            <a:off x="4581144" y="3364992"/>
+            <a:ext cx="1225296" cy="475488"/>
           </a:xfrm>
           <a:prstGeom prst="rect">
             <a:avLst/>
@@ -10989,7 +11094,7 @@
                 <a:ea typeface="Trebuchet MS" pitchFamily="34" charset="-122"/>
                 <a:cs typeface="Trebuchet MS" pitchFamily="34" charset="-120"/>
               </a:rPr>
-              <a:t>col</a:t>
+              <a:t>cul</a:t>
             </a:r>
             <a:endParaRPr lang="en-US" sz="1400" dirty="0"/>
           </a:p>
@@ -11003,8 +11108,8 @@
         </p:nvSpPr>
         <p:spPr>
           <a:xfrm>
-            <a:off x="6784848" y="3364992"/>
-            <a:ext cx="73152" cy="475488"/>
+            <a:off x="5806440" y="3364992"/>
+            <a:ext cx="76200" cy="475488"/>
           </a:xfrm>
           <a:prstGeom prst="rect">
             <a:avLst/>
@@ -11042,8 +11147,8 @@
         </p:nvSpPr>
         <p:spPr>
           <a:xfrm>
-            <a:off x="6858000" y="3364992"/>
-            <a:ext cx="1554480" cy="475488"/>
+            <a:off x="5882640" y="3364992"/>
+            <a:ext cx="1225296" cy="475488"/>
           </a:xfrm>
           <a:prstGeom prst="rect">
             <a:avLst>
@@ -11069,8 +11174,8 @@
         </p:nvSpPr>
         <p:spPr>
           <a:xfrm>
-            <a:off x="6858000" y="3364992"/>
-            <a:ext cx="1554480" cy="475488"/>
+            <a:off x="5882640" y="3364992"/>
+            <a:ext cx="1225296" cy="475488"/>
           </a:xfrm>
           <a:prstGeom prst="rect">
             <a:avLst/>
@@ -11094,7 +11199,7 @@
                 <a:ea typeface="Trebuchet MS" pitchFamily="34" charset="-122"/>
                 <a:cs typeface="Trebuchet MS" pitchFamily="34" charset="-120"/>
               </a:rPr>
-              <a:t>oured</a:t>
+              <a:t>tur</a:t>
             </a:r>
             <a:endParaRPr lang="en-US" sz="1400" dirty="0"/>
           </a:p>
@@ -11102,7 +11207,112 @@
       </p:sp>
       <p:sp>
         <p:nvSpPr>
-          <p:cNvPr id="39" name="Shape 37"/>
+          <p:cNvPr id="39" name="Text 37"/>
+          <p:cNvSpPr/>
+          <p:nvPr/>
+        </p:nvSpPr>
+        <p:spPr>
+          <a:xfrm>
+            <a:off x="7107936" y="3364992"/>
+            <a:ext cx="76200" cy="475488"/>
+          </a:xfrm>
+          <a:prstGeom prst="rect">
+            <a:avLst/>
+          </a:prstGeom>
+          <a:noFill/>
+          <a:ln/>
+        </p:spPr>
+        <p:txBody>
+          <a:bodyPr wrap="square" lIns="0" tIns="0" rIns="0" bIns="0" rtlCol="0" anchor="ctr"/>
+          <a:lstStyle/>
+          <a:p>
+            <a:pPr algn="ctr" indent="0" marL="0">
+              <a:buNone/>
+            </a:pPr>
+            <a:r>
+              <a:rPr lang="en-US" sz="1600" b="1" dirty="0">
+                <a:solidFill>
+                  <a:srgbClr val="0D9488"/>
+                </a:solidFill>
+                <a:latin typeface="Trebuchet MS" pitchFamily="34" charset="0"/>
+                <a:ea typeface="Trebuchet MS" pitchFamily="34" charset="-122"/>
+                <a:cs typeface="Trebuchet MS" pitchFamily="34" charset="-120"/>
+              </a:rPr>
+              <a:t>·</a:t>
+            </a:r>
+            <a:endParaRPr lang="en-US" sz="1600" dirty="0"/>
+          </a:p>
+        </p:txBody>
+      </p:sp>
+      <p:sp>
+        <p:nvSpPr>
+          <p:cNvPr id="40" name="Shape 38"/>
+          <p:cNvSpPr/>
+          <p:nvPr/>
+        </p:nvSpPr>
+        <p:spPr>
+          <a:xfrm>
+            <a:off x="7184136" y="3364992"/>
+            <a:ext cx="1225296" cy="475488"/>
+          </a:xfrm>
+          <a:prstGeom prst="rect">
+            <a:avLst>
+              <a:gd name="adj" fmla="val 9615"/>
+            </a:avLst>
+          </a:prstGeom>
+          <a:solidFill>
+            <a:srgbClr val="FFFFFF"/>
+          </a:solidFill>
+          <a:ln w="12700">
+            <a:solidFill>
+              <a:srgbClr val="0D9488"/>
+            </a:solidFill>
+            <a:prstDash val="solid"/>
+          </a:ln>
+        </p:spPr>
+      </p:sp>
+      <p:sp>
+        <p:nvSpPr>
+          <p:cNvPr id="41" name="Text 39"/>
+          <p:cNvSpPr/>
+          <p:nvPr/>
+        </p:nvSpPr>
+        <p:spPr>
+          <a:xfrm>
+            <a:off x="7184136" y="3364992"/>
+            <a:ext cx="1225296" cy="475488"/>
+          </a:xfrm>
+          <a:prstGeom prst="rect">
+            <a:avLst/>
+          </a:prstGeom>
+          <a:noFill/>
+          <a:ln/>
+        </p:spPr>
+        <p:txBody>
+          <a:bodyPr wrap="square" lIns="0" tIns="0" rIns="0" bIns="0" rtlCol="0" anchor="ctr"/>
+          <a:lstStyle/>
+          <a:p>
+            <a:pPr algn="ctr" indent="0" marL="0">
+              <a:buNone/>
+            </a:pPr>
+            <a:r>
+              <a:rPr lang="en-US" sz="1400" b="1" dirty="0">
+                <a:solidFill>
+                  <a:srgbClr val="0D9488"/>
+                </a:solidFill>
+                <a:latin typeface="Trebuchet MS" pitchFamily="34" charset="0"/>
+                <a:ea typeface="Trebuchet MS" pitchFamily="34" charset="-122"/>
+                <a:cs typeface="Trebuchet MS" pitchFamily="34" charset="-120"/>
+              </a:rPr>
+              <a:t>al</a:t>
+            </a:r>
+            <a:endParaRPr lang="en-US" sz="1400" dirty="0"/>
+          </a:p>
+        </p:txBody>
+      </p:sp>
+      <p:sp>
+        <p:nvSpPr>
+          <p:cNvPr id="42" name="Shape 40"/>
           <p:cNvSpPr/>
           <p:nvPr/>
         </p:nvSpPr>
@@ -11129,7 +11339,7 @@
       </p:sp>
       <p:sp>
         <p:nvSpPr>
-          <p:cNvPr id="40" name="Text 38"/>
+          <p:cNvPr id="43" name="Text 41"/>
           <p:cNvSpPr/>
           <p:nvPr/>
         </p:nvSpPr>
@@ -11168,18 +11378,18 @@
       </p:sp>
       <p:sp>
         <p:nvSpPr>
-          <p:cNvPr id="41" name="Shape 39"/>
+          <p:cNvPr id="44" name="Shape 42"/>
           <p:cNvSpPr/>
           <p:nvPr/>
         </p:nvSpPr>
         <p:spPr>
           <a:xfrm>
             <a:off x="1874520" y="4096512"/>
-            <a:ext cx="6903720" cy="658368"/>
+            <a:ext cx="6903720" cy="804672"/>
           </a:xfrm>
           <a:prstGeom prst="rect">
             <a:avLst>
-              <a:gd name="adj" fmla="val 8333"/>
+              <a:gd name="adj" fmla="val 6818"/>
             </a:avLst>
           </a:prstGeom>
           <a:solidFill>
@@ -11195,18 +11405,18 @@
       </p:sp>
       <p:sp>
         <p:nvSpPr>
-          <p:cNvPr id="42" name="Shape 40"/>
+          <p:cNvPr id="45" name="Shape 43"/>
           <p:cNvSpPr/>
           <p:nvPr/>
         </p:nvSpPr>
         <p:spPr>
           <a:xfrm>
             <a:off x="1952244" y="4169664"/>
-            <a:ext cx="543652" cy="475488"/>
+            <a:ext cx="543652" cy="384048"/>
           </a:xfrm>
           <a:prstGeom prst="rect">
             <a:avLst>
-              <a:gd name="adj" fmla="val 7692"/>
+              <a:gd name="adj" fmla="val 9524"/>
             </a:avLst>
           </a:prstGeom>
           <a:solidFill>
@@ -11222,14 +11432,14 @@
       </p:sp>
       <p:sp>
         <p:nvSpPr>
-          <p:cNvPr id="43" name="Text 41"/>
+          <p:cNvPr id="46" name="Text 44"/>
           <p:cNvSpPr/>
           <p:nvPr/>
         </p:nvSpPr>
         <p:spPr>
           <a:xfrm>
             <a:off x="1952244" y="4169664"/>
-            <a:ext cx="543652" cy="475488"/>
+            <a:ext cx="543652" cy="384048"/>
           </a:xfrm>
           <a:prstGeom prst="rect">
             <a:avLst/>
@@ -11261,18 +11471,18 @@
       </p:sp>
       <p:sp>
         <p:nvSpPr>
-          <p:cNvPr id="44" name="Shape 42"/>
+          <p:cNvPr id="47" name="Shape 45"/>
           <p:cNvSpPr/>
           <p:nvPr/>
         </p:nvSpPr>
         <p:spPr>
           <a:xfrm>
             <a:off x="2546188" y="4169664"/>
-            <a:ext cx="543652" cy="475488"/>
+            <a:ext cx="543652" cy="384048"/>
           </a:xfrm>
           <a:prstGeom prst="rect">
             <a:avLst>
-              <a:gd name="adj" fmla="val 7692"/>
+              <a:gd name="adj" fmla="val 9524"/>
             </a:avLst>
           </a:prstGeom>
           <a:solidFill>
@@ -11288,14 +11498,14 @@
       </p:sp>
       <p:sp>
         <p:nvSpPr>
-          <p:cNvPr id="45" name="Text 43"/>
+          <p:cNvPr id="48" name="Text 46"/>
           <p:cNvSpPr/>
           <p:nvPr/>
         </p:nvSpPr>
         <p:spPr>
           <a:xfrm>
             <a:off x="2546188" y="4169664"/>
-            <a:ext cx="543652" cy="475488"/>
+            <a:ext cx="543652" cy="384048"/>
           </a:xfrm>
           <a:prstGeom prst="rect">
             <a:avLst/>
@@ -11327,18 +11537,18 @@
       </p:sp>
       <p:sp>
         <p:nvSpPr>
-          <p:cNvPr id="46" name="Shape 44"/>
+          <p:cNvPr id="49" name="Shape 47"/>
           <p:cNvSpPr/>
           <p:nvPr/>
         </p:nvSpPr>
         <p:spPr>
           <a:xfrm>
             <a:off x="3140133" y="4169664"/>
-            <a:ext cx="543652" cy="475488"/>
+            <a:ext cx="543652" cy="384048"/>
           </a:xfrm>
           <a:prstGeom prst="rect">
             <a:avLst>
-              <a:gd name="adj" fmla="val 7692"/>
+              <a:gd name="adj" fmla="val 9524"/>
             </a:avLst>
           </a:prstGeom>
           <a:solidFill>
@@ -11354,14 +11564,14 @@
       </p:sp>
       <p:sp>
         <p:nvSpPr>
-          <p:cNvPr id="47" name="Text 45"/>
+          <p:cNvPr id="50" name="Text 48"/>
           <p:cNvSpPr/>
           <p:nvPr/>
         </p:nvSpPr>
         <p:spPr>
           <a:xfrm>
             <a:off x="3140133" y="4169664"/>
-            <a:ext cx="543652" cy="475488"/>
+            <a:ext cx="543652" cy="384048"/>
           </a:xfrm>
           <a:prstGeom prst="rect">
             <a:avLst/>
@@ -11393,18 +11603,18 @@
       </p:sp>
       <p:sp>
         <p:nvSpPr>
-          <p:cNvPr id="48" name="Shape 46"/>
+          <p:cNvPr id="51" name="Shape 49"/>
           <p:cNvSpPr/>
           <p:nvPr/>
         </p:nvSpPr>
         <p:spPr>
           <a:xfrm>
             <a:off x="3734077" y="4169664"/>
-            <a:ext cx="543652" cy="475488"/>
+            <a:ext cx="543652" cy="384048"/>
           </a:xfrm>
           <a:prstGeom prst="rect">
             <a:avLst>
-              <a:gd name="adj" fmla="val 7692"/>
+              <a:gd name="adj" fmla="val 9524"/>
             </a:avLst>
           </a:prstGeom>
           <a:solidFill>
@@ -11420,14 +11630,14 @@
       </p:sp>
       <p:sp>
         <p:nvSpPr>
-          <p:cNvPr id="49" name="Text 47"/>
+          <p:cNvPr id="52" name="Text 50"/>
           <p:cNvSpPr/>
           <p:nvPr/>
         </p:nvSpPr>
         <p:spPr>
           <a:xfrm>
             <a:off x="3734077" y="4169664"/>
-            <a:ext cx="543652" cy="475488"/>
+            <a:ext cx="543652" cy="384048"/>
           </a:xfrm>
           <a:prstGeom prst="rect">
             <a:avLst/>
@@ -11459,18 +11669,18 @@
       </p:sp>
       <p:sp>
         <p:nvSpPr>
-          <p:cNvPr id="50" name="Shape 48"/>
+          <p:cNvPr id="53" name="Shape 51"/>
           <p:cNvSpPr/>
           <p:nvPr/>
         </p:nvSpPr>
         <p:spPr>
           <a:xfrm>
             <a:off x="4328021" y="4169664"/>
-            <a:ext cx="543652" cy="475488"/>
+            <a:ext cx="543652" cy="384048"/>
           </a:xfrm>
           <a:prstGeom prst="rect">
             <a:avLst>
-              <a:gd name="adj" fmla="val 7692"/>
+              <a:gd name="adj" fmla="val 9524"/>
             </a:avLst>
           </a:prstGeom>
           <a:solidFill>
@@ -11486,14 +11696,14 @@
       </p:sp>
       <p:sp>
         <p:nvSpPr>
-          <p:cNvPr id="51" name="Text 49"/>
+          <p:cNvPr id="54" name="Text 52"/>
           <p:cNvSpPr/>
           <p:nvPr/>
         </p:nvSpPr>
         <p:spPr>
           <a:xfrm>
             <a:off x="4328021" y="4169664"/>
-            <a:ext cx="543652" cy="475488"/>
+            <a:ext cx="543652" cy="384048"/>
           </a:xfrm>
           <a:prstGeom prst="rect">
             <a:avLst/>
@@ -11525,18 +11735,18 @@
       </p:sp>
       <p:sp>
         <p:nvSpPr>
-          <p:cNvPr id="52" name="Shape 50"/>
+          <p:cNvPr id="55" name="Shape 53"/>
           <p:cNvSpPr/>
           <p:nvPr/>
         </p:nvSpPr>
         <p:spPr>
           <a:xfrm>
             <a:off x="4921966" y="4169664"/>
-            <a:ext cx="543652" cy="475488"/>
+            <a:ext cx="543652" cy="384048"/>
           </a:xfrm>
           <a:prstGeom prst="rect">
             <a:avLst>
-              <a:gd name="adj" fmla="val 7692"/>
+              <a:gd name="adj" fmla="val 9524"/>
             </a:avLst>
           </a:prstGeom>
           <a:solidFill>
@@ -11552,14 +11762,14 @@
       </p:sp>
       <p:sp>
         <p:nvSpPr>
-          <p:cNvPr id="53" name="Text 51"/>
+          <p:cNvPr id="56" name="Text 54"/>
           <p:cNvSpPr/>
           <p:nvPr/>
         </p:nvSpPr>
         <p:spPr>
           <a:xfrm>
             <a:off x="4921966" y="4169664"/>
-            <a:ext cx="543652" cy="475488"/>
+            <a:ext cx="543652" cy="384048"/>
           </a:xfrm>
           <a:prstGeom prst="rect">
             <a:avLst/>
@@ -11591,18 +11801,57 @@
       </p:sp>
       <p:sp>
         <p:nvSpPr>
-          <p:cNvPr id="54" name="Shape 52"/>
+          <p:cNvPr id="57" name="Text 55"/>
+          <p:cNvSpPr/>
+          <p:nvPr/>
+        </p:nvSpPr>
+        <p:spPr>
+          <a:xfrm>
+            <a:off x="4921966" y="4572000"/>
+            <a:ext cx="543652" cy="219456"/>
+          </a:xfrm>
+          <a:prstGeom prst="rect">
+            <a:avLst/>
+          </a:prstGeom>
+          <a:noFill/>
+          <a:ln/>
+        </p:spPr>
+        <p:txBody>
+          <a:bodyPr wrap="square" lIns="0" tIns="0" rIns="0" bIns="0" rtlCol="0" anchor="t"/>
+          <a:lstStyle/>
+          <a:p>
+            <a:pPr algn="ctr" indent="0" marL="0">
+              <a:buNone/>
+            </a:pPr>
+            <a:r>
+              <a:rPr lang="en-US" sz="750" i="1" dirty="0">
+                <a:solidFill>
+                  <a:srgbClr val="94A3B8"/>
+                </a:solidFill>
+                <a:latin typeface="Calibri" pitchFamily="34" charset="0"/>
+                <a:ea typeface="Calibri" pitchFamily="34" charset="-122"/>
+                <a:cs typeface="Calibri" pitchFamily="34" charset="-120"/>
+              </a:rPr>
+              <a:t>/k/</a:t>
+            </a:r>
+            <a:endParaRPr lang="en-US" sz="750" dirty="0"/>
+          </a:p>
+        </p:txBody>
+      </p:sp>
+      <p:sp>
+        <p:nvSpPr>
+          <p:cNvPr id="58" name="Shape 56"/>
           <p:cNvSpPr/>
           <p:nvPr/>
         </p:nvSpPr>
         <p:spPr>
           <a:xfrm>
             <a:off x="5515910" y="4169664"/>
-            <a:ext cx="543652" cy="475488"/>
+            <a:ext cx="543652" cy="384048"/>
           </a:xfrm>
           <a:prstGeom prst="rect">
             <a:avLst>
-              <a:gd name="adj" fmla="val 7692"/>
+              <a:gd name="adj" fmla="val 9524"/>
             </a:avLst>
           </a:prstGeom>
           <a:solidFill>
@@ -11618,14 +11867,14 @@
       </p:sp>
       <p:sp>
         <p:nvSpPr>
-          <p:cNvPr id="55" name="Text 53"/>
+          <p:cNvPr id="59" name="Text 57"/>
           <p:cNvSpPr/>
           <p:nvPr/>
         </p:nvSpPr>
         <p:spPr>
           <a:xfrm>
             <a:off x="5515910" y="4169664"/>
-            <a:ext cx="543652" cy="475488"/>
+            <a:ext cx="543652" cy="384048"/>
           </a:xfrm>
           <a:prstGeom prst="rect">
             <a:avLst/>
@@ -11649,7 +11898,7 @@
                 <a:ea typeface="Trebuchet MS" pitchFamily="34" charset="-122"/>
                 <a:cs typeface="Trebuchet MS" pitchFamily="34" charset="-120"/>
               </a:rPr>
-              <a:t>o</a:t>
+              <a:t>u</a:t>
             </a:r>
             <a:endParaRPr lang="en-US" sz="900" dirty="0"/>
           </a:p>
@@ -11657,18 +11906,18 @@
       </p:sp>
       <p:sp>
         <p:nvSpPr>
-          <p:cNvPr id="56" name="Shape 54"/>
+          <p:cNvPr id="60" name="Shape 58"/>
           <p:cNvSpPr/>
           <p:nvPr/>
         </p:nvSpPr>
         <p:spPr>
           <a:xfrm>
             <a:off x="6109855" y="4169664"/>
-            <a:ext cx="543652" cy="475488"/>
+            <a:ext cx="543652" cy="384048"/>
           </a:xfrm>
           <a:prstGeom prst="rect">
             <a:avLst>
-              <a:gd name="adj" fmla="val 7692"/>
+              <a:gd name="adj" fmla="val 9524"/>
             </a:avLst>
           </a:prstGeom>
           <a:solidFill>
@@ -11684,14 +11933,14 @@
       </p:sp>
       <p:sp>
         <p:nvSpPr>
-          <p:cNvPr id="57" name="Text 55"/>
+          <p:cNvPr id="61" name="Text 59"/>
           <p:cNvSpPr/>
           <p:nvPr/>
         </p:nvSpPr>
         <p:spPr>
           <a:xfrm>
             <a:off x="6109855" y="4169664"/>
-            <a:ext cx="543652" cy="475488"/>
+            <a:ext cx="543652" cy="384048"/>
           </a:xfrm>
           <a:prstGeom prst="rect">
             <a:avLst/>
@@ -11723,18 +11972,18 @@
       </p:sp>
       <p:sp>
         <p:nvSpPr>
-          <p:cNvPr id="58" name="Shape 56"/>
+          <p:cNvPr id="62" name="Shape 60"/>
           <p:cNvSpPr/>
           <p:nvPr/>
         </p:nvSpPr>
         <p:spPr>
           <a:xfrm>
             <a:off x="6703799" y="4169664"/>
-            <a:ext cx="543652" cy="475488"/>
+            <a:ext cx="543652" cy="384048"/>
           </a:xfrm>
           <a:prstGeom prst="rect">
             <a:avLst>
-              <a:gd name="adj" fmla="val 7692"/>
+              <a:gd name="adj" fmla="val 9524"/>
             </a:avLst>
           </a:prstGeom>
           <a:solidFill>
@@ -11750,14 +11999,14 @@
       </p:sp>
       <p:sp>
         <p:nvSpPr>
-          <p:cNvPr id="59" name="Text 57"/>
+          <p:cNvPr id="63" name="Text 61"/>
           <p:cNvSpPr/>
           <p:nvPr/>
         </p:nvSpPr>
         <p:spPr>
           <a:xfrm>
             <a:off x="6703799" y="4169664"/>
-            <a:ext cx="543652" cy="475488"/>
+            <a:ext cx="543652" cy="384048"/>
           </a:xfrm>
           <a:prstGeom prst="rect">
             <a:avLst/>
@@ -11781,7 +12030,7 @@
                 <a:ea typeface="Trebuchet MS" pitchFamily="34" charset="-122"/>
                 <a:cs typeface="Trebuchet MS" pitchFamily="34" charset="-120"/>
               </a:rPr>
-              <a:t>ou</a:t>
+              <a:t>t</a:t>
             </a:r>
             <a:endParaRPr lang="en-US" sz="900" dirty="0"/>
           </a:p>
@@ -11789,18 +12038,18 @@
       </p:sp>
       <p:sp>
         <p:nvSpPr>
-          <p:cNvPr id="60" name="Shape 58"/>
+          <p:cNvPr id="64" name="Shape 62"/>
           <p:cNvSpPr/>
           <p:nvPr/>
         </p:nvSpPr>
         <p:spPr>
           <a:xfrm>
             <a:off x="7297743" y="4169664"/>
-            <a:ext cx="543652" cy="475488"/>
+            <a:ext cx="543652" cy="384048"/>
           </a:xfrm>
           <a:prstGeom prst="rect">
             <a:avLst>
-              <a:gd name="adj" fmla="val 7692"/>
+              <a:gd name="adj" fmla="val 9524"/>
             </a:avLst>
           </a:prstGeom>
           <a:solidFill>
@@ -11816,14 +12065,14 @@
       </p:sp>
       <p:sp>
         <p:nvSpPr>
-          <p:cNvPr id="61" name="Text 59"/>
+          <p:cNvPr id="65" name="Text 63"/>
           <p:cNvSpPr/>
           <p:nvPr/>
         </p:nvSpPr>
         <p:spPr>
           <a:xfrm>
             <a:off x="7297743" y="4169664"/>
-            <a:ext cx="543652" cy="475488"/>
+            <a:ext cx="543652" cy="384048"/>
           </a:xfrm>
           <a:prstGeom prst="rect">
             <a:avLst/>
@@ -11847,7 +12096,7 @@
                 <a:ea typeface="Trebuchet MS" pitchFamily="34" charset="-122"/>
                 <a:cs typeface="Trebuchet MS" pitchFamily="34" charset="-120"/>
               </a:rPr>
-              <a:t>r</a:t>
+              <a:t>ur</a:t>
             </a:r>
             <a:endParaRPr lang="en-US" sz="900" dirty="0"/>
           </a:p>
@@ -11855,18 +12104,18 @@
       </p:sp>
       <p:sp>
         <p:nvSpPr>
-          <p:cNvPr id="62" name="Shape 60"/>
+          <p:cNvPr id="66" name="Shape 64"/>
           <p:cNvSpPr/>
           <p:nvPr/>
         </p:nvSpPr>
         <p:spPr>
           <a:xfrm>
             <a:off x="7891688" y="4169664"/>
-            <a:ext cx="543652" cy="475488"/>
+            <a:ext cx="543652" cy="384048"/>
           </a:xfrm>
           <a:prstGeom prst="rect">
             <a:avLst>
-              <a:gd name="adj" fmla="val 7692"/>
+              <a:gd name="adj" fmla="val 9524"/>
             </a:avLst>
           </a:prstGeom>
           <a:solidFill>
@@ -11882,14 +12131,14 @@
       </p:sp>
       <p:sp>
         <p:nvSpPr>
-          <p:cNvPr id="63" name="Text 61"/>
+          <p:cNvPr id="67" name="Text 65"/>
           <p:cNvSpPr/>
           <p:nvPr/>
         </p:nvSpPr>
         <p:spPr>
           <a:xfrm>
             <a:off x="7891688" y="4169664"/>
-            <a:ext cx="543652" cy="475488"/>
+            <a:ext cx="543652" cy="384048"/>
           </a:xfrm>
           <a:prstGeom prst="rect">
             <a:avLst/>
@@ -11913,7 +12162,7 @@
                 <a:ea typeface="Trebuchet MS" pitchFamily="34" charset="-122"/>
                 <a:cs typeface="Trebuchet MS" pitchFamily="34" charset="-120"/>
               </a:rPr>
-              <a:t>ed</a:t>
+              <a:t>al</a:t>
             </a:r>
             <a:endParaRPr lang="en-US" sz="900" dirty="0"/>
           </a:p>
@@ -12344,7 +12593,7 @@
                 <a:ea typeface="Trebuchet MS" pitchFamily="34" charset="-122"/>
                 <a:cs typeface="Trebuchet MS" pitchFamily="34" charset="-120"/>
               </a:rPr>
-              <a:t>multiply</a:t>
+              <a:t>multiple</a:t>
             </a:r>
             <a:endParaRPr lang="en-US" sz="2800" dirty="0"/>
           </a:p>
@@ -13171,7 +13420,7 @@
                 <a:ea typeface="Trebuchet MS" pitchFamily="34" charset="-122"/>
                 <a:cs typeface="Trebuchet MS" pitchFamily="34" charset="-120"/>
               </a:rPr>
-              <a:t>multiply</a:t>
+              <a:t>multiple</a:t>
             </a:r>
             <a:endParaRPr lang="en-US" sz="2800" dirty="0"/>
           </a:p>
@@ -13422,7 +13671,7 @@
                 <a:ea typeface="Trebuchet MS" pitchFamily="34" charset="-122"/>
                 <a:cs typeface="Trebuchet MS" pitchFamily="34" charset="-120"/>
               </a:rPr>
-              <a:t>ply</a:t>
+              <a:t>ple</a:t>
             </a:r>
             <a:endParaRPr lang="en-US" sz="1300" dirty="0"/>
           </a:p>
@@ -13461,7 +13710,7 @@
                 <a:ea typeface="Calibri" pitchFamily="34" charset="-122"/>
                 <a:cs typeface="Calibri" pitchFamily="34" charset="-120"/>
               </a:rPr>
-              <a:t>fold or times</a:t>
+              <a:t>fold, times</a:t>
             </a:r>
             <a:endParaRPr lang="en-US" sz="850" dirty="0"/>
           </a:p>
@@ -14156,7 +14405,7 @@
                 <a:ea typeface="Trebuchet MS" pitchFamily="34" charset="-122"/>
                 <a:cs typeface="Trebuchet MS" pitchFamily="34" charset="-120"/>
               </a:rPr>
-              <a:t>multiply</a:t>
+              <a:t>multiple</a:t>
             </a:r>
             <a:endParaRPr lang="en-US" sz="2800" dirty="0"/>
           </a:p>
@@ -14407,7 +14656,7 @@
                 <a:ea typeface="Trebuchet MS" pitchFamily="34" charset="-122"/>
                 <a:cs typeface="Trebuchet MS" pitchFamily="34" charset="-120"/>
               </a:rPr>
-              <a:t>ply</a:t>
+              <a:t>ple</a:t>
             </a:r>
             <a:endParaRPr lang="en-US" sz="1300" dirty="0"/>
           </a:p>
@@ -14446,7 +14695,7 @@
                 <a:ea typeface="Calibri" pitchFamily="34" charset="-122"/>
                 <a:cs typeface="Calibri" pitchFamily="34" charset="-120"/>
               </a:rPr>
-              <a:t>fold or times</a:t>
+              <a:t>fold, times</a:t>
             </a:r>
             <a:endParaRPr lang="en-US" sz="850" dirty="0"/>
           </a:p>
@@ -14815,7 +15064,7 @@
                 <a:ea typeface="Trebuchet MS" pitchFamily="34" charset="-122"/>
                 <a:cs typeface="Trebuchet MS" pitchFamily="34" charset="-120"/>
               </a:rPr>
-              <a:t>ply</a:t>
+              <a:t>ple</a:t>
             </a:r>
             <a:endParaRPr lang="en-US" sz="1400" dirty="0"/>
           </a:p>
@@ -15643,7 +15892,7 @@
                 <a:ea typeface="Trebuchet MS" pitchFamily="34" charset="-122"/>
                 <a:cs typeface="Trebuchet MS" pitchFamily="34" charset="-120"/>
               </a:rPr>
-              <a:t>multiply</a:t>
+              <a:t>multiple</a:t>
             </a:r>
             <a:endParaRPr lang="en-US" sz="2800" dirty="0"/>
           </a:p>
@@ -15894,7 +16143,7 @@
                 <a:ea typeface="Trebuchet MS" pitchFamily="34" charset="-122"/>
                 <a:cs typeface="Trebuchet MS" pitchFamily="34" charset="-120"/>
               </a:rPr>
-              <a:t>ply</a:t>
+              <a:t>ple</a:t>
             </a:r>
             <a:endParaRPr lang="en-US" sz="1300" dirty="0"/>
           </a:p>
@@ -15933,7 +16182,7 @@
                 <a:ea typeface="Calibri" pitchFamily="34" charset="-122"/>
                 <a:cs typeface="Calibri" pitchFamily="34" charset="-120"/>
               </a:rPr>
-              <a:t>fold or times</a:t>
+              <a:t>fold, times</a:t>
             </a:r>
             <a:endParaRPr lang="en-US" sz="850" dirty="0"/>
           </a:p>
@@ -16302,7 +16551,7 @@
                 <a:ea typeface="Trebuchet MS" pitchFamily="34" charset="-122"/>
                 <a:cs typeface="Trebuchet MS" pitchFamily="34" charset="-120"/>
               </a:rPr>
-              <a:t>ply</a:t>
+              <a:t>ple</a:t>
             </a:r>
             <a:endParaRPr lang="en-US" sz="1400" dirty="0"/>
           </a:p>
@@ -16383,11 +16632,11 @@
         <p:spPr>
           <a:xfrm>
             <a:off x="1874520" y="4096512"/>
-            <a:ext cx="6903720" cy="804672"/>
+            <a:ext cx="6903720" cy="658368"/>
           </a:xfrm>
           <a:prstGeom prst="rect">
             <a:avLst>
-              <a:gd name="adj" fmla="val 6818"/>
+              <a:gd name="adj" fmla="val 8333"/>
             </a:avLst>
           </a:prstGeom>
           <a:solidFill>
@@ -16409,12 +16658,12 @@
         </p:nvSpPr>
         <p:spPr>
           <a:xfrm>
-            <a:off x="2023872" y="4169664"/>
-            <a:ext cx="685800" cy="384048"/>
+            <a:off x="2124837" y="4169664"/>
+            <a:ext cx="685800" cy="475488"/>
           </a:xfrm>
           <a:prstGeom prst="rect">
             <a:avLst>
-              <a:gd name="adj" fmla="val 9524"/>
+              <a:gd name="adj" fmla="val 7692"/>
             </a:avLst>
           </a:prstGeom>
           <a:solidFill>
@@ -16436,8 +16685,8 @@
         </p:nvSpPr>
         <p:spPr>
           <a:xfrm>
-            <a:off x="2023872" y="4169664"/>
-            <a:ext cx="685800" cy="384048"/>
+            <a:off x="2124837" y="4169664"/>
+            <a:ext cx="685800" cy="475488"/>
           </a:xfrm>
           <a:prstGeom prst="rect">
             <a:avLst/>
@@ -16475,12 +16724,12 @@
         </p:nvSpPr>
         <p:spPr>
           <a:xfrm>
-            <a:off x="2831592" y="4169664"/>
-            <a:ext cx="685800" cy="384048"/>
+            <a:off x="3033522" y="4169664"/>
+            <a:ext cx="685800" cy="475488"/>
           </a:xfrm>
           <a:prstGeom prst="rect">
             <a:avLst>
-              <a:gd name="adj" fmla="val 9524"/>
+              <a:gd name="adj" fmla="val 7692"/>
             </a:avLst>
           </a:prstGeom>
           <a:solidFill>
@@ -16502,8 +16751,8 @@
         </p:nvSpPr>
         <p:spPr>
           <a:xfrm>
-            <a:off x="2831592" y="4169664"/>
-            <a:ext cx="685800" cy="384048"/>
+            <a:off x="3033522" y="4169664"/>
+            <a:ext cx="685800" cy="475488"/>
           </a:xfrm>
           <a:prstGeom prst="rect">
             <a:avLst/>
@@ -16541,12 +16790,12 @@
         </p:nvSpPr>
         <p:spPr>
           <a:xfrm>
-            <a:off x="3639312" y="4169664"/>
-            <a:ext cx="685800" cy="384048"/>
+            <a:off x="3942207" y="4169664"/>
+            <a:ext cx="685800" cy="475488"/>
           </a:xfrm>
           <a:prstGeom prst="rect">
             <a:avLst>
-              <a:gd name="adj" fmla="val 9524"/>
+              <a:gd name="adj" fmla="val 7692"/>
             </a:avLst>
           </a:prstGeom>
           <a:solidFill>
@@ -16568,8 +16817,8 @@
         </p:nvSpPr>
         <p:spPr>
           <a:xfrm>
-            <a:off x="3639312" y="4169664"/>
-            <a:ext cx="685800" cy="384048"/>
+            <a:off x="3942207" y="4169664"/>
+            <a:ext cx="685800" cy="475488"/>
           </a:xfrm>
           <a:prstGeom prst="rect">
             <a:avLst/>
@@ -16607,12 +16856,12 @@
         </p:nvSpPr>
         <p:spPr>
           <a:xfrm>
-            <a:off x="4447032" y="4169664"/>
-            <a:ext cx="685800" cy="384048"/>
+            <a:off x="4850892" y="4169664"/>
+            <a:ext cx="685800" cy="475488"/>
           </a:xfrm>
           <a:prstGeom prst="rect">
             <a:avLst>
-              <a:gd name="adj" fmla="val 9524"/>
+              <a:gd name="adj" fmla="val 7692"/>
             </a:avLst>
           </a:prstGeom>
           <a:solidFill>
@@ -16634,8 +16883,8 @@
         </p:nvSpPr>
         <p:spPr>
           <a:xfrm>
-            <a:off x="4447032" y="4169664"/>
-            <a:ext cx="685800" cy="384048"/>
+            <a:off x="4850892" y="4169664"/>
+            <a:ext cx="685800" cy="475488"/>
           </a:xfrm>
           <a:prstGeom prst="rect">
             <a:avLst/>
@@ -16673,12 +16922,12 @@
         </p:nvSpPr>
         <p:spPr>
           <a:xfrm>
-            <a:off x="5254752" y="4169664"/>
-            <a:ext cx="685800" cy="384048"/>
+            <a:off x="5759577" y="4169664"/>
+            <a:ext cx="685800" cy="475488"/>
           </a:xfrm>
           <a:prstGeom prst="rect">
             <a:avLst>
-              <a:gd name="adj" fmla="val 9524"/>
+              <a:gd name="adj" fmla="val 7692"/>
             </a:avLst>
           </a:prstGeom>
           <a:solidFill>
@@ -16700,8 +16949,8 @@
         </p:nvSpPr>
         <p:spPr>
           <a:xfrm>
-            <a:off x="5254752" y="4169664"/>
-            <a:ext cx="685800" cy="384048"/>
+            <a:off x="5759577" y="4169664"/>
+            <a:ext cx="685800" cy="475488"/>
           </a:xfrm>
           <a:prstGeom prst="rect">
             <a:avLst/>
@@ -16739,12 +16988,12 @@
         </p:nvSpPr>
         <p:spPr>
           <a:xfrm>
-            <a:off x="6062472" y="4169664"/>
-            <a:ext cx="685800" cy="384048"/>
+            <a:off x="6668262" y="4169664"/>
+            <a:ext cx="685800" cy="475488"/>
           </a:xfrm>
           <a:prstGeom prst="rect">
             <a:avLst>
-              <a:gd name="adj" fmla="val 9524"/>
+              <a:gd name="adj" fmla="val 7692"/>
             </a:avLst>
           </a:prstGeom>
           <a:solidFill>
@@ -16766,8 +17015,8 @@
         </p:nvSpPr>
         <p:spPr>
           <a:xfrm>
-            <a:off x="6062472" y="4169664"/>
-            <a:ext cx="685800" cy="384048"/>
+            <a:off x="6668262" y="4169664"/>
+            <a:ext cx="685800" cy="475488"/>
           </a:xfrm>
           <a:prstGeom prst="rect">
             <a:avLst/>
@@ -16805,12 +17054,12 @@
         </p:nvSpPr>
         <p:spPr>
           <a:xfrm>
-            <a:off x="6870192" y="4169664"/>
-            <a:ext cx="685800" cy="384048"/>
+            <a:off x="7576947" y="4169664"/>
+            <a:ext cx="685800" cy="475488"/>
           </a:xfrm>
           <a:prstGeom prst="rect">
             <a:avLst>
-              <a:gd name="adj" fmla="val 9524"/>
+              <a:gd name="adj" fmla="val 7692"/>
             </a:avLst>
           </a:prstGeom>
           <a:solidFill>
@@ -16832,8 +17081,8 @@
         </p:nvSpPr>
         <p:spPr>
           <a:xfrm>
-            <a:off x="6870192" y="4169664"/>
-            <a:ext cx="685800" cy="384048"/>
+            <a:off x="7576947" y="4169664"/>
+            <a:ext cx="685800" cy="475488"/>
           </a:xfrm>
           <a:prstGeom prst="rect">
             <a:avLst/>
@@ -16857,114 +17106,9 @@
                 <a:ea typeface="Trebuchet MS" pitchFamily="34" charset="-122"/>
                 <a:cs typeface="Trebuchet MS" pitchFamily="34" charset="-120"/>
               </a:rPr>
-              <a:t>l</a:t>
+              <a:t>le</a:t>
             </a:r>
             <a:endParaRPr lang="en-US" sz="900" dirty="0"/>
-          </a:p>
-        </p:txBody>
-      </p:sp>
-      <p:sp>
-        <p:nvSpPr>
-          <p:cNvPr id="50" name="Shape 48"/>
-          <p:cNvSpPr/>
-          <p:nvPr/>
-        </p:nvSpPr>
-        <p:spPr>
-          <a:xfrm>
-            <a:off x="7677912" y="4169664"/>
-            <a:ext cx="685800" cy="384048"/>
-          </a:xfrm>
-          <a:prstGeom prst="rect">
-            <a:avLst>
-              <a:gd name="adj" fmla="val 9524"/>
-            </a:avLst>
-          </a:prstGeom>
-          <a:solidFill>
-            <a:srgbClr val="FFFFFF"/>
-          </a:solidFill>
-          <a:ln w="12700">
-            <a:solidFill>
-              <a:srgbClr val="DB2777"/>
-            </a:solidFill>
-            <a:prstDash val="solid"/>
-          </a:ln>
-        </p:spPr>
-      </p:sp>
-      <p:sp>
-        <p:nvSpPr>
-          <p:cNvPr id="51" name="Text 49"/>
-          <p:cNvSpPr/>
-          <p:nvPr/>
-        </p:nvSpPr>
-        <p:spPr>
-          <a:xfrm>
-            <a:off x="7677912" y="4169664"/>
-            <a:ext cx="685800" cy="384048"/>
-          </a:xfrm>
-          <a:prstGeom prst="rect">
-            <a:avLst/>
-          </a:prstGeom>
-          <a:noFill/>
-          <a:ln/>
-        </p:spPr>
-        <p:txBody>
-          <a:bodyPr wrap="square" lIns="0" tIns="0" rIns="0" bIns="0" rtlCol="0" anchor="ctr"/>
-          <a:lstStyle/>
-          <a:p>
-            <a:pPr algn="ctr" indent="0" marL="0">
-              <a:buNone/>
-            </a:pPr>
-            <a:r>
-              <a:rPr lang="en-US" sz="900" b="1" dirty="0">
-                <a:solidFill>
-                  <a:srgbClr val="9D174D"/>
-                </a:solidFill>
-                <a:latin typeface="Trebuchet MS" pitchFamily="34" charset="0"/>
-                <a:ea typeface="Trebuchet MS" pitchFamily="34" charset="-122"/>
-                <a:cs typeface="Trebuchet MS" pitchFamily="34" charset="-120"/>
-              </a:rPr>
-              <a:t>y</a:t>
-            </a:r>
-            <a:endParaRPr lang="en-US" sz="900" dirty="0"/>
-          </a:p>
-        </p:txBody>
-      </p:sp>
-      <p:sp>
-        <p:nvSpPr>
-          <p:cNvPr id="52" name="Text 50"/>
-          <p:cNvSpPr/>
-          <p:nvPr/>
-        </p:nvSpPr>
-        <p:spPr>
-          <a:xfrm>
-            <a:off x="7677912" y="4572000"/>
-            <a:ext cx="685800" cy="219456"/>
-          </a:xfrm>
-          <a:prstGeom prst="rect">
-            <a:avLst/>
-          </a:prstGeom>
-          <a:noFill/>
-          <a:ln/>
-        </p:spPr>
-        <p:txBody>
-          <a:bodyPr wrap="square" lIns="0" tIns="0" rIns="0" bIns="0" rtlCol="0" anchor="t"/>
-          <a:lstStyle/>
-          <a:p>
-            <a:pPr algn="ctr" indent="0" marL="0">
-              <a:buNone/>
-            </a:pPr>
-            <a:r>
-              <a:rPr lang="en-US" sz="750" i="1" dirty="0">
-                <a:solidFill>
-                  <a:srgbClr val="94A3B8"/>
-                </a:solidFill>
-                <a:latin typeface="Calibri" pitchFamily="34" charset="0"/>
-                <a:ea typeface="Calibri" pitchFamily="34" charset="-122"/>
-                <a:cs typeface="Calibri" pitchFamily="34" charset="-120"/>
-              </a:rPr>
-              <a:t>/ee/</a:t>
-            </a:r>
-            <a:endParaRPr lang="en-US" sz="750" dirty="0"/>
           </a:p>
         </p:txBody>
       </p:sp>
@@ -18305,7 +18449,7 @@
                 <a:ea typeface="Calibri" pitchFamily="34" charset="-122"/>
                 <a:cs typeface="Calibri" pitchFamily="34" charset="-120"/>
               </a:rPr>
-              <a:t>multicultural</a:t>
+              <a:t>multimedia</a:t>
             </a:r>
             <a:pPr algn="l" indent="0" marL="0">
               <a:buNone/>
@@ -18319,7 +18463,7 @@
                 <a:ea typeface="Calibri" pitchFamily="34" charset="-122"/>
                 <a:cs typeface="Calibri" pitchFamily="34" charset="-120"/>
               </a:rPr>
-              <a:t> festival was a </a:t>
+              <a:t> display used </a:t>
             </a:r>
             <a:pPr algn="l" indent="0" marL="0">
               <a:buNone/>
@@ -18336,7 +18480,7 @@
                 <a:ea typeface="Calibri" pitchFamily="34" charset="-122"/>
                 <a:cs typeface="Calibri" pitchFamily="34" charset="-120"/>
               </a:rPr>
-              <a:t>multimedia</a:t>
+              <a:t>multicoloured</a:t>
             </a:r>
             <a:pPr algn="l" indent="0" marL="0">
               <a:buNone/>
@@ -18350,7 +18494,7 @@
                 <a:ea typeface="Calibri" pitchFamily="34" charset="-122"/>
                 <a:cs typeface="Calibri" pitchFamily="34" charset="-120"/>
               </a:rPr>
-              <a:t> event, and everyone had to </a:t>
+              <a:t> lights, and the presenter had to </a:t>
             </a:r>
             <a:pPr algn="l" indent="0" marL="0">
               <a:buNone/>
@@ -18381,7 +18525,7 @@
                 <a:ea typeface="Calibri" pitchFamily="34" charset="-122"/>
                 <a:cs typeface="Calibri" pitchFamily="34" charset="-120"/>
               </a:rPr>
-              <a:t> to make it run smoothly.</a:t>
+              <a:t> to run it all.</a:t>
             </a:r>
             <a:endParaRPr lang="en-US" sz="1800" dirty="0"/>
           </a:p>
@@ -18536,7 +18680,7 @@
                 <a:ea typeface="Trebuchet MS" pitchFamily="34" charset="-122"/>
                 <a:cs typeface="Trebuchet MS" pitchFamily="34" charset="-120"/>
               </a:rPr>
-              <a:t>multicultural</a:t>
+              <a:t>multimedia</a:t>
             </a:r>
             <a:endParaRPr lang="en-US" sz="1400" dirty="0"/>
           </a:p>
@@ -18664,7 +18808,7 @@
                 <a:ea typeface="Trebuchet MS" pitchFamily="34" charset="-122"/>
                 <a:cs typeface="Trebuchet MS" pitchFamily="34" charset="-120"/>
               </a:rPr>
-              <a:t>multimedia</a:t>
+              <a:t>multicoloured</a:t>
             </a:r>
             <a:endParaRPr lang="en-US" sz="1400" dirty="0"/>
           </a:p>
@@ -19262,7 +19406,7 @@
                 <a:ea typeface="Trebuchet MS" pitchFamily="34" charset="-122"/>
                 <a:cs typeface="Trebuchet MS" pitchFamily="34" charset="-120"/>
               </a:rPr>
-              <a:t>multicultural</a:t>
+              <a:t>multimedia</a:t>
             </a:r>
             <a:endParaRPr lang="en-US" sz="2800" dirty="0"/>
           </a:p>
@@ -20089,7 +20233,7 @@
                 <a:ea typeface="Trebuchet MS" pitchFamily="34" charset="-122"/>
                 <a:cs typeface="Trebuchet MS" pitchFamily="34" charset="-120"/>
               </a:rPr>
-              <a:t>multicultural</a:t>
+              <a:t>multimedia</a:t>
             </a:r>
             <a:endParaRPr lang="en-US" sz="2800" dirty="0"/>
           </a:p>
@@ -20169,7 +20313,7 @@
         </p:nvSpPr>
         <p:spPr>
           <a:xfrm>
-            <a:off x="2221992" y="2258568"/>
+            <a:off x="2938272" y="2258568"/>
             <a:ext cx="1828800" cy="292608"/>
           </a:xfrm>
           <a:prstGeom prst="rect">
@@ -20203,7 +20347,7 @@
         </p:nvSpPr>
         <p:spPr>
           <a:xfrm>
-            <a:off x="2221992" y="2258568"/>
+            <a:off x="2938272" y="2258568"/>
             <a:ext cx="1828800" cy="292608"/>
           </a:xfrm>
           <a:prstGeom prst="rect">
@@ -20242,7 +20386,7 @@
         </p:nvSpPr>
         <p:spPr>
           <a:xfrm>
-            <a:off x="2221992" y="2569464"/>
+            <a:off x="2938272" y="2569464"/>
             <a:ext cx="1828800" cy="201168"/>
           </a:xfrm>
           <a:prstGeom prst="rect">
@@ -20281,7 +20425,7 @@
         </p:nvSpPr>
         <p:spPr>
           <a:xfrm>
-            <a:off x="4370832" y="2258568"/>
+            <a:off x="5803392" y="2258568"/>
             <a:ext cx="1828800" cy="292608"/>
           </a:xfrm>
           <a:prstGeom prst="rect">
@@ -20315,7 +20459,7 @@
         </p:nvSpPr>
         <p:spPr>
           <a:xfrm>
-            <a:off x="4370832" y="2258568"/>
+            <a:off x="5803392" y="2258568"/>
             <a:ext cx="1828800" cy="292608"/>
           </a:xfrm>
           <a:prstGeom prst="rect">
@@ -20340,7 +20484,7 @@
                 <a:ea typeface="Trebuchet MS" pitchFamily="34" charset="-122"/>
                 <a:cs typeface="Trebuchet MS" pitchFamily="34" charset="-120"/>
               </a:rPr>
-              <a:t>cultur</a:t>
+              <a:t>media</a:t>
             </a:r>
             <a:endParaRPr lang="en-US" sz="1300" dirty="0"/>
           </a:p>
@@ -20354,7 +20498,7 @@
         </p:nvSpPr>
         <p:spPr>
           <a:xfrm>
-            <a:off x="4370832" y="2569464"/>
+            <a:off x="5803392" y="2569464"/>
             <a:ext cx="1828800" cy="201168"/>
           </a:xfrm>
           <a:prstGeom prst="rect">
@@ -20379,7 +20523,7 @@
                 <a:ea typeface="Calibri" pitchFamily="34" charset="-122"/>
                 <a:cs typeface="Calibri" pitchFamily="34" charset="-120"/>
               </a:rPr>
-              <a:t>way of life</a:t>
+              <a:t>means of communication</a:t>
             </a:r>
             <a:endParaRPr lang="en-US" sz="850" dirty="0"/>
           </a:p>
@@ -20393,30 +20537,23 @@
         </p:nvSpPr>
         <p:spPr>
           <a:xfrm>
-            <a:off x="6519672" y="2258568"/>
-            <a:ext cx="1828800" cy="292608"/>
+            <a:off x="365760" y="3273552"/>
+            <a:ext cx="1371600" cy="658368"/>
           </a:xfrm>
           <a:prstGeom prst="rect">
             <a:avLst>
-              <a:gd name="adj" fmla="val 25000"/>
+              <a:gd name="adj" fmla="val 8333"/>
             </a:avLst>
           </a:prstGeom>
           <a:solidFill>
-            <a:srgbClr val="FCE7F3"/>
-          </a:solidFill>
-          <a:ln w="19050">
-            <a:solidFill>
-              <a:srgbClr val="DB2777"/>
-            </a:solidFill>
-            <a:prstDash val="solid"/>
-          </a:ln>
-          <a:effectLst>
-            <a:outerShdw sx="100000" sy="100000" kx="0" ky="0" algn="bl" rotWithShape="0" blurRad="101600" dist="38100" dir="8100000">
-              <a:srgbClr val="000000">
-                <a:alpha val="12000"/>
-              </a:srgbClr>
-            </a:outerShdw>
-          </a:effectLst>
+            <a:srgbClr val="E2E8F0"/>
+          </a:solidFill>
+          <a:ln w="12700">
+            <a:solidFill>
+              <a:srgbClr val="E2E8F0"/>
+            </a:solidFill>
+            <a:prstDash val="solid"/>
+          </a:ln>
         </p:spPr>
       </p:sp>
       <p:sp>
@@ -20427,90 +20564,117 @@
         </p:nvSpPr>
         <p:spPr>
           <a:xfrm>
-            <a:off x="6519672" y="2258568"/>
-            <a:ext cx="1828800" cy="292608"/>
-          </a:xfrm>
-          <a:prstGeom prst="rect">
-            <a:avLst/>
-          </a:prstGeom>
-          <a:noFill/>
-          <a:ln/>
-        </p:spPr>
-        <p:txBody>
-          <a:bodyPr wrap="square" lIns="0" tIns="0" rIns="0" bIns="0" rtlCol="0" anchor="ctr"/>
-          <a:lstStyle/>
-          <a:p>
-            <a:pPr algn="ctr" indent="0" marL="0">
-              <a:buNone/>
-            </a:pPr>
-            <a:r>
-              <a:rPr lang="en-US" sz="1300" b="1" dirty="0">
-                <a:solidFill>
-                  <a:srgbClr val="9D174D"/>
+            <a:off x="365760" y="3273552"/>
+            <a:ext cx="1371600" cy="658368"/>
+          </a:xfrm>
+          <a:prstGeom prst="rect">
+            <a:avLst/>
+          </a:prstGeom>
+          <a:noFill/>
+          <a:ln/>
+        </p:spPr>
+        <p:txBody>
+          <a:bodyPr wrap="square" lIns="0" tIns="0" rIns="0" bIns="0" rtlCol="0" anchor="ctr"/>
+          <a:lstStyle/>
+          <a:p>
+            <a:pPr algn="ctr" indent="0" marL="0">
+              <a:buNone/>
+            </a:pPr>
+            <a:r>
+              <a:rPr lang="en-US" sz="1100" b="1" dirty="0">
+                <a:solidFill>
+                  <a:srgbClr val="475569"/>
                 </a:solidFill>
                 <a:latin typeface="Trebuchet MS" pitchFamily="34" charset="0"/>
                 <a:ea typeface="Trebuchet MS" pitchFamily="34" charset="-122"/>
                 <a:cs typeface="Trebuchet MS" pitchFamily="34" charset="-120"/>
               </a:rPr>
-              <a:t>al</a:t>
-            </a:r>
-            <a:endParaRPr lang="en-US" sz="1300" dirty="0"/>
-          </a:p>
-        </p:txBody>
-      </p:sp>
-      <p:sp>
-        <p:nvSpPr>
-          <p:cNvPr id="24" name="Text 22"/>
-          <p:cNvSpPr/>
-          <p:nvPr/>
-        </p:nvSpPr>
-        <p:spPr>
-          <a:xfrm>
-            <a:off x="6519672" y="2569464"/>
-            <a:ext cx="1828800" cy="201168"/>
-          </a:xfrm>
-          <a:prstGeom prst="rect">
-            <a:avLst/>
-          </a:prstGeom>
-          <a:noFill/>
-          <a:ln/>
-        </p:spPr>
-        <p:txBody>
-          <a:bodyPr wrap="square" lIns="0" tIns="0" rIns="0" bIns="0" rtlCol="0" anchor="t"/>
-          <a:lstStyle/>
-          <a:p>
-            <a:pPr algn="ctr" indent="0" marL="0">
-              <a:buNone/>
-            </a:pPr>
-            <a:r>
-              <a:rPr lang="en-US" sz="850" dirty="0">
-                <a:solidFill>
-                  <a:srgbClr val="475569"/>
+              <a:t>Syllables</a:t>
+            </a:r>
+            <a:endParaRPr lang="en-US" sz="1100" dirty="0"/>
+          </a:p>
+        </p:txBody>
+      </p:sp>
+      <p:sp>
+        <p:nvSpPr>
+          <p:cNvPr id="24" name="Shape 22"/>
+          <p:cNvSpPr/>
+          <p:nvPr/>
+        </p:nvSpPr>
+        <p:spPr>
+          <a:xfrm>
+            <a:off x="1874520" y="3273552"/>
+            <a:ext cx="6903720" cy="658368"/>
+          </a:xfrm>
+          <a:prstGeom prst="rect">
+            <a:avLst>
+              <a:gd name="adj" fmla="val 8333"/>
+            </a:avLst>
+          </a:prstGeom>
+          <a:solidFill>
+            <a:srgbClr val="F8FAFC"/>
+          </a:solidFill>
+          <a:ln w="12700">
+            <a:solidFill>
+              <a:srgbClr val="E2E8F0"/>
+            </a:solidFill>
+            <a:prstDash val="dash"/>
+          </a:ln>
+        </p:spPr>
+      </p:sp>
+      <p:sp>
+        <p:nvSpPr>
+          <p:cNvPr id="25" name="Text 23"/>
+          <p:cNvSpPr/>
+          <p:nvPr/>
+        </p:nvSpPr>
+        <p:spPr>
+          <a:xfrm>
+            <a:off x="1874520" y="3273552"/>
+            <a:ext cx="6903720" cy="658368"/>
+          </a:xfrm>
+          <a:prstGeom prst="rect">
+            <a:avLst/>
+          </a:prstGeom>
+          <a:noFill/>
+          <a:ln/>
+        </p:spPr>
+        <p:txBody>
+          <a:bodyPr wrap="square" rtlCol="0" anchor="ctr"/>
+          <a:lstStyle/>
+          <a:p>
+            <a:pPr algn="ctr" indent="0" marL="0">
+              <a:buNone/>
+            </a:pPr>
+            <a:r>
+              <a:rPr lang="en-US" sz="1100" i="1" dirty="0">
+                <a:solidFill>
+                  <a:srgbClr val="CBD5E1"/>
                 </a:solidFill>
                 <a:latin typeface="Calibri" pitchFamily="34" charset="0"/>
                 <a:ea typeface="Calibri" pitchFamily="34" charset="-122"/>
                 <a:cs typeface="Calibri" pitchFamily="34" charset="-120"/>
               </a:rPr>
-              <a:t>relating to</a:t>
-            </a:r>
-            <a:endParaRPr lang="en-US" sz="850" dirty="0"/>
-          </a:p>
-        </p:txBody>
-      </p:sp>
-      <p:sp>
-        <p:nvSpPr>
-          <p:cNvPr id="25" name="Shape 23"/>
-          <p:cNvSpPr/>
-          <p:nvPr/>
-        </p:nvSpPr>
-        <p:spPr>
-          <a:xfrm>
-            <a:off x="365760" y="3273552"/>
-            <a:ext cx="1371600" cy="658368"/>
+              <a:t>Write here...</a:t>
+            </a:r>
+            <a:endParaRPr lang="en-US" sz="1100" dirty="0"/>
+          </a:p>
+        </p:txBody>
+      </p:sp>
+      <p:sp>
+        <p:nvSpPr>
+          <p:cNvPr id="26" name="Shape 24"/>
+          <p:cNvSpPr/>
+          <p:nvPr/>
+        </p:nvSpPr>
+        <p:spPr>
+          <a:xfrm>
+            <a:off x="365760" y="4096512"/>
+            <a:ext cx="1371600" cy="804672"/>
           </a:xfrm>
           <a:prstGeom prst="rect">
             <a:avLst>
-              <a:gd name="adj" fmla="val 8333"/>
+              <a:gd name="adj" fmla="val 6818"/>
             </a:avLst>
           </a:prstGeom>
           <a:solidFill>
@@ -20526,14 +20690,14 @@
       </p:sp>
       <p:sp>
         <p:nvSpPr>
-          <p:cNvPr id="26" name="Text 24"/>
-          <p:cNvSpPr/>
-          <p:nvPr/>
-        </p:nvSpPr>
-        <p:spPr>
-          <a:xfrm>
-            <a:off x="365760" y="3273552"/>
-            <a:ext cx="1371600" cy="658368"/>
+          <p:cNvPr id="27" name="Text 25"/>
+          <p:cNvSpPr/>
+          <p:nvPr/>
+        </p:nvSpPr>
+        <p:spPr>
+          <a:xfrm>
+            <a:off x="365760" y="4096512"/>
+            <a:ext cx="1371600" cy="804672"/>
           </a:xfrm>
           <a:prstGeom prst="rect">
             <a:avLst/>
@@ -20557,7 +20721,7 @@
                 <a:ea typeface="Trebuchet MS" pitchFamily="34" charset="-122"/>
                 <a:cs typeface="Trebuchet MS" pitchFamily="34" charset="-120"/>
               </a:rPr>
-              <a:t>Syllables</a:t>
+              <a:t>Phonemes</a:t>
             </a:r>
             <a:endParaRPr lang="en-US" sz="1100" dirty="0"/>
           </a:p>
@@ -20565,80 +20729,14 @@
       </p:sp>
       <p:sp>
         <p:nvSpPr>
-          <p:cNvPr id="27" name="Shape 25"/>
-          <p:cNvSpPr/>
-          <p:nvPr/>
-        </p:nvSpPr>
-        <p:spPr>
-          <a:xfrm>
-            <a:off x="1874520" y="3273552"/>
-            <a:ext cx="6903720" cy="658368"/>
-          </a:xfrm>
-          <a:prstGeom prst="rect">
-            <a:avLst>
-              <a:gd name="adj" fmla="val 8333"/>
-            </a:avLst>
-          </a:prstGeom>
-          <a:solidFill>
-            <a:srgbClr val="F8FAFC"/>
-          </a:solidFill>
-          <a:ln w="12700">
-            <a:solidFill>
-              <a:srgbClr val="E2E8F0"/>
-            </a:solidFill>
-            <a:prstDash val="dash"/>
-          </a:ln>
-        </p:spPr>
-      </p:sp>
-      <p:sp>
-        <p:nvSpPr>
-          <p:cNvPr id="28" name="Text 26"/>
-          <p:cNvSpPr/>
-          <p:nvPr/>
-        </p:nvSpPr>
-        <p:spPr>
-          <a:xfrm>
-            <a:off x="1874520" y="3273552"/>
-            <a:ext cx="6903720" cy="658368"/>
-          </a:xfrm>
-          <a:prstGeom prst="rect">
-            <a:avLst/>
-          </a:prstGeom>
-          <a:noFill/>
-          <a:ln/>
-        </p:spPr>
-        <p:txBody>
-          <a:bodyPr wrap="square" rtlCol="0" anchor="ctr"/>
-          <a:lstStyle/>
-          <a:p>
-            <a:pPr algn="ctr" indent="0" marL="0">
-              <a:buNone/>
-            </a:pPr>
-            <a:r>
-              <a:rPr lang="en-US" sz="1100" i="1" dirty="0">
-                <a:solidFill>
-                  <a:srgbClr val="CBD5E1"/>
-                </a:solidFill>
-                <a:latin typeface="Calibri" pitchFamily="34" charset="0"/>
-                <a:ea typeface="Calibri" pitchFamily="34" charset="-122"/>
-                <a:cs typeface="Calibri" pitchFamily="34" charset="-120"/>
-              </a:rPr>
-              <a:t>Write here...</a:t>
-            </a:r>
-            <a:endParaRPr lang="en-US" sz="1100" dirty="0"/>
-          </a:p>
-        </p:txBody>
-      </p:sp>
-      <p:sp>
-        <p:nvSpPr>
-          <p:cNvPr id="29" name="Shape 27"/>
-          <p:cNvSpPr/>
-          <p:nvPr/>
-        </p:nvSpPr>
-        <p:spPr>
-          <a:xfrm>
-            <a:off x="365760" y="4096512"/>
-            <a:ext cx="1371600" cy="804672"/>
+          <p:cNvPr id="28" name="Shape 26"/>
+          <p:cNvSpPr/>
+          <p:nvPr/>
+        </p:nvSpPr>
+        <p:spPr>
+          <a:xfrm>
+            <a:off x="1874520" y="4096512"/>
+            <a:ext cx="6903720" cy="804672"/>
           </a:xfrm>
           <a:prstGeom prst="rect">
             <a:avLst>
@@ -20646,85 +20744,19 @@
             </a:avLst>
           </a:prstGeom>
           <a:solidFill>
-            <a:srgbClr val="E2E8F0"/>
+            <a:srgbClr val="F8FAFC"/>
           </a:solidFill>
           <a:ln w="12700">
             <a:solidFill>
               <a:srgbClr val="E2E8F0"/>
             </a:solidFill>
-            <a:prstDash val="solid"/>
-          </a:ln>
-        </p:spPr>
-      </p:sp>
-      <p:sp>
-        <p:nvSpPr>
-          <p:cNvPr id="30" name="Text 28"/>
-          <p:cNvSpPr/>
-          <p:nvPr/>
-        </p:nvSpPr>
-        <p:spPr>
-          <a:xfrm>
-            <a:off x="365760" y="4096512"/>
-            <a:ext cx="1371600" cy="804672"/>
-          </a:xfrm>
-          <a:prstGeom prst="rect">
-            <a:avLst/>
-          </a:prstGeom>
-          <a:noFill/>
-          <a:ln/>
-        </p:spPr>
-        <p:txBody>
-          <a:bodyPr wrap="square" lIns="0" tIns="0" rIns="0" bIns="0" rtlCol="0" anchor="ctr"/>
-          <a:lstStyle/>
-          <a:p>
-            <a:pPr algn="ctr" indent="0" marL="0">
-              <a:buNone/>
-            </a:pPr>
-            <a:r>
-              <a:rPr lang="en-US" sz="1100" b="1" dirty="0">
-                <a:solidFill>
-                  <a:srgbClr val="475569"/>
-                </a:solidFill>
-                <a:latin typeface="Trebuchet MS" pitchFamily="34" charset="0"/>
-                <a:ea typeface="Trebuchet MS" pitchFamily="34" charset="-122"/>
-                <a:cs typeface="Trebuchet MS" pitchFamily="34" charset="-120"/>
-              </a:rPr>
-              <a:t>Phonemes</a:t>
-            </a:r>
-            <a:endParaRPr lang="en-US" sz="1100" dirty="0"/>
-          </a:p>
-        </p:txBody>
-      </p:sp>
-      <p:sp>
-        <p:nvSpPr>
-          <p:cNvPr id="31" name="Shape 29"/>
-          <p:cNvSpPr/>
-          <p:nvPr/>
-        </p:nvSpPr>
-        <p:spPr>
-          <a:xfrm>
-            <a:off x="1874520" y="4096512"/>
-            <a:ext cx="6903720" cy="804672"/>
-          </a:xfrm>
-          <a:prstGeom prst="rect">
-            <a:avLst>
-              <a:gd name="adj" fmla="val 6818"/>
-            </a:avLst>
-          </a:prstGeom>
-          <a:solidFill>
-            <a:srgbClr val="F8FAFC"/>
-          </a:solidFill>
-          <a:ln w="12700">
-            <a:solidFill>
-              <a:srgbClr val="E2E8F0"/>
-            </a:solidFill>
             <a:prstDash val="dash"/>
           </a:ln>
         </p:spPr>
       </p:sp>
       <p:sp>
         <p:nvSpPr>
-          <p:cNvPr id="32" name="Text 30"/>
+          <p:cNvPr id="29" name="Text 27"/>
           <p:cNvSpPr/>
           <p:nvPr/>
         </p:nvSpPr>
@@ -21186,7 +21218,7 @@
                 <a:ea typeface="Trebuchet MS" pitchFamily="34" charset="-122"/>
                 <a:cs typeface="Trebuchet MS" pitchFamily="34" charset="-120"/>
               </a:rPr>
-              <a:t>multicultural</a:t>
+              <a:t>multimedia</a:t>
             </a:r>
             <a:endParaRPr lang="en-US" sz="2800" dirty="0"/>
           </a:p>
@@ -21266,7 +21298,7 @@
         </p:nvSpPr>
         <p:spPr>
           <a:xfrm>
-            <a:off x="2221992" y="2258568"/>
+            <a:off x="2938272" y="2258568"/>
             <a:ext cx="1828800" cy="292608"/>
           </a:xfrm>
           <a:prstGeom prst="rect">
@@ -21300,7 +21332,7 @@
         </p:nvSpPr>
         <p:spPr>
           <a:xfrm>
-            <a:off x="2221992" y="2258568"/>
+            <a:off x="2938272" y="2258568"/>
             <a:ext cx="1828800" cy="292608"/>
           </a:xfrm>
           <a:prstGeom prst="rect">
@@ -21339,7 +21371,7 @@
         </p:nvSpPr>
         <p:spPr>
           <a:xfrm>
-            <a:off x="2221992" y="2569464"/>
+            <a:off x="2938272" y="2569464"/>
             <a:ext cx="1828800" cy="201168"/>
           </a:xfrm>
           <a:prstGeom prst="rect">
@@ -21378,7 +21410,7 @@
         </p:nvSpPr>
         <p:spPr>
           <a:xfrm>
-            <a:off x="4370832" y="2258568"/>
+            <a:off x="5803392" y="2258568"/>
             <a:ext cx="1828800" cy="292608"/>
           </a:xfrm>
           <a:prstGeom prst="rect">
@@ -21412,7 +21444,7 @@
         </p:nvSpPr>
         <p:spPr>
           <a:xfrm>
-            <a:off x="4370832" y="2258568"/>
+            <a:off x="5803392" y="2258568"/>
             <a:ext cx="1828800" cy="292608"/>
           </a:xfrm>
           <a:prstGeom prst="rect">
@@ -21437,7 +21469,7 @@
                 <a:ea typeface="Trebuchet MS" pitchFamily="34" charset="-122"/>
                 <a:cs typeface="Trebuchet MS" pitchFamily="34" charset="-120"/>
               </a:rPr>
-              <a:t>cultur</a:t>
+              <a:t>media</a:t>
             </a:r>
             <a:endParaRPr lang="en-US" sz="1300" dirty="0"/>
           </a:p>
@@ -21451,7 +21483,7 @@
         </p:nvSpPr>
         <p:spPr>
           <a:xfrm>
-            <a:off x="4370832" y="2569464"/>
+            <a:off x="5803392" y="2569464"/>
             <a:ext cx="1828800" cy="201168"/>
           </a:xfrm>
           <a:prstGeom prst="rect">
@@ -21476,7 +21508,7 @@
                 <a:ea typeface="Calibri" pitchFamily="34" charset="-122"/>
                 <a:cs typeface="Calibri" pitchFamily="34" charset="-120"/>
               </a:rPr>
-              <a:t>way of life</a:t>
+              <a:t>means of communication</a:t>
             </a:r>
             <a:endParaRPr lang="en-US" sz="850" dirty="0"/>
           </a:p>
@@ -21490,30 +21522,23 @@
         </p:nvSpPr>
         <p:spPr>
           <a:xfrm>
-            <a:off x="6519672" y="2258568"/>
-            <a:ext cx="1828800" cy="292608"/>
+            <a:off x="365760" y="3273552"/>
+            <a:ext cx="1371600" cy="658368"/>
           </a:xfrm>
           <a:prstGeom prst="rect">
             <a:avLst>
-              <a:gd name="adj" fmla="val 25000"/>
+              <a:gd name="adj" fmla="val 8333"/>
             </a:avLst>
           </a:prstGeom>
           <a:solidFill>
-            <a:srgbClr val="FCE7F3"/>
-          </a:solidFill>
-          <a:ln w="19050">
-            <a:solidFill>
-              <a:srgbClr val="DB2777"/>
-            </a:solidFill>
-            <a:prstDash val="solid"/>
-          </a:ln>
-          <a:effectLst>
-            <a:outerShdw sx="100000" sy="100000" kx="0" ky="0" algn="bl" rotWithShape="0" blurRad="101600" dist="38100" dir="8100000">
-              <a:srgbClr val="000000">
-                <a:alpha val="12000"/>
-              </a:srgbClr>
-            </a:outerShdw>
-          </a:effectLst>
+            <a:srgbClr val="E2E8F0"/>
+          </a:solidFill>
+          <a:ln w="12700">
+            <a:solidFill>
+              <a:srgbClr val="E2E8F0"/>
+            </a:solidFill>
+            <a:prstDash val="solid"/>
+          </a:ln>
         </p:spPr>
       </p:sp>
       <p:sp>
@@ -21524,86 +21549,47 @@
         </p:nvSpPr>
         <p:spPr>
           <a:xfrm>
-            <a:off x="6519672" y="2258568"/>
-            <a:ext cx="1828800" cy="292608"/>
-          </a:xfrm>
-          <a:prstGeom prst="rect">
-            <a:avLst/>
-          </a:prstGeom>
-          <a:noFill/>
-          <a:ln/>
-        </p:spPr>
-        <p:txBody>
-          <a:bodyPr wrap="square" lIns="0" tIns="0" rIns="0" bIns="0" rtlCol="0" anchor="ctr"/>
-          <a:lstStyle/>
-          <a:p>
-            <a:pPr algn="ctr" indent="0" marL="0">
-              <a:buNone/>
-            </a:pPr>
-            <a:r>
-              <a:rPr lang="en-US" sz="1300" b="1" dirty="0">
-                <a:solidFill>
-                  <a:srgbClr val="9D174D"/>
+            <a:off x="365760" y="3273552"/>
+            <a:ext cx="1371600" cy="658368"/>
+          </a:xfrm>
+          <a:prstGeom prst="rect">
+            <a:avLst/>
+          </a:prstGeom>
+          <a:noFill/>
+          <a:ln/>
+        </p:spPr>
+        <p:txBody>
+          <a:bodyPr wrap="square" lIns="0" tIns="0" rIns="0" bIns="0" rtlCol="0" anchor="ctr"/>
+          <a:lstStyle/>
+          <a:p>
+            <a:pPr algn="ctr" indent="0" marL="0">
+              <a:buNone/>
+            </a:pPr>
+            <a:r>
+              <a:rPr lang="en-US" sz="1100" b="1" dirty="0">
+                <a:solidFill>
+                  <a:srgbClr val="475569"/>
                 </a:solidFill>
                 <a:latin typeface="Trebuchet MS" pitchFamily="34" charset="0"/>
                 <a:ea typeface="Trebuchet MS" pitchFamily="34" charset="-122"/>
                 <a:cs typeface="Trebuchet MS" pitchFamily="34" charset="-120"/>
               </a:rPr>
-              <a:t>al</a:t>
-            </a:r>
-            <a:endParaRPr lang="en-US" sz="1300" dirty="0"/>
-          </a:p>
-        </p:txBody>
-      </p:sp>
-      <p:sp>
-        <p:nvSpPr>
-          <p:cNvPr id="24" name="Text 22"/>
-          <p:cNvSpPr/>
-          <p:nvPr/>
-        </p:nvSpPr>
-        <p:spPr>
-          <a:xfrm>
-            <a:off x="6519672" y="2569464"/>
-            <a:ext cx="1828800" cy="201168"/>
-          </a:xfrm>
-          <a:prstGeom prst="rect">
-            <a:avLst/>
-          </a:prstGeom>
-          <a:noFill/>
-          <a:ln/>
-        </p:spPr>
-        <p:txBody>
-          <a:bodyPr wrap="square" lIns="0" tIns="0" rIns="0" bIns="0" rtlCol="0" anchor="t"/>
-          <a:lstStyle/>
-          <a:p>
-            <a:pPr algn="ctr" indent="0" marL="0">
-              <a:buNone/>
-            </a:pPr>
-            <a:r>
-              <a:rPr lang="en-US" sz="850" dirty="0">
-                <a:solidFill>
-                  <a:srgbClr val="475569"/>
-                </a:solidFill>
-                <a:latin typeface="Calibri" pitchFamily="34" charset="0"/>
-                <a:ea typeface="Calibri" pitchFamily="34" charset="-122"/>
-                <a:cs typeface="Calibri" pitchFamily="34" charset="-120"/>
-              </a:rPr>
-              <a:t>relating to</a:t>
-            </a:r>
-            <a:endParaRPr lang="en-US" sz="850" dirty="0"/>
-          </a:p>
-        </p:txBody>
-      </p:sp>
-      <p:sp>
-        <p:nvSpPr>
-          <p:cNvPr id="25" name="Shape 23"/>
-          <p:cNvSpPr/>
-          <p:nvPr/>
-        </p:nvSpPr>
-        <p:spPr>
-          <a:xfrm>
-            <a:off x="365760" y="3273552"/>
-            <a:ext cx="1371600" cy="658368"/>
+              <a:t>Syllables</a:t>
+            </a:r>
+            <a:endParaRPr lang="en-US" sz="1100" dirty="0"/>
+          </a:p>
+        </p:txBody>
+      </p:sp>
+      <p:sp>
+        <p:nvSpPr>
+          <p:cNvPr id="24" name="Shape 22"/>
+          <p:cNvSpPr/>
+          <p:nvPr/>
+        </p:nvSpPr>
+        <p:spPr>
+          <a:xfrm>
+            <a:off x="1874520" y="3273552"/>
+            <a:ext cx="6903720" cy="658368"/>
           </a:xfrm>
           <a:prstGeom prst="rect">
             <a:avLst>
@@ -21611,11 +21597,38 @@
             </a:avLst>
           </a:prstGeom>
           <a:solidFill>
-            <a:srgbClr val="E2E8F0"/>
-          </a:solidFill>
-          <a:ln w="12700">
-            <a:solidFill>
-              <a:srgbClr val="E2E8F0"/>
+            <a:srgbClr val="CCFBF1"/>
+          </a:solidFill>
+          <a:ln w="12700">
+            <a:solidFill>
+              <a:srgbClr val="0D9488"/>
+            </a:solidFill>
+            <a:prstDash val="solid"/>
+          </a:ln>
+        </p:spPr>
+      </p:sp>
+      <p:sp>
+        <p:nvSpPr>
+          <p:cNvPr id="25" name="Shape 23"/>
+          <p:cNvSpPr/>
+          <p:nvPr/>
+        </p:nvSpPr>
+        <p:spPr>
+          <a:xfrm>
+            <a:off x="1978152" y="3364992"/>
+            <a:ext cx="1225296" cy="475488"/>
+          </a:xfrm>
+          <a:prstGeom prst="rect">
+            <a:avLst>
+              <a:gd name="adj" fmla="val 9615"/>
+            </a:avLst>
+          </a:prstGeom>
+          <a:solidFill>
+            <a:srgbClr val="FFFFFF"/>
+          </a:solidFill>
+          <a:ln w="12700">
+            <a:solidFill>
+              <a:srgbClr val="0D9488"/>
             </a:solidFill>
             <a:prstDash val="solid"/>
           </a:ln>
@@ -21629,63 +21642,75 @@
         </p:nvSpPr>
         <p:spPr>
           <a:xfrm>
-            <a:off x="365760" y="3273552"/>
-            <a:ext cx="1371600" cy="658368"/>
-          </a:xfrm>
-          <a:prstGeom prst="rect">
-            <a:avLst/>
-          </a:prstGeom>
-          <a:noFill/>
-          <a:ln/>
-        </p:spPr>
-        <p:txBody>
-          <a:bodyPr wrap="square" lIns="0" tIns="0" rIns="0" bIns="0" rtlCol="0" anchor="ctr"/>
-          <a:lstStyle/>
-          <a:p>
-            <a:pPr algn="ctr" indent="0" marL="0">
-              <a:buNone/>
-            </a:pPr>
-            <a:r>
-              <a:rPr lang="en-US" sz="1100" b="1" dirty="0">
-                <a:solidFill>
-                  <a:srgbClr val="475569"/>
+            <a:off x="1978152" y="3364992"/>
+            <a:ext cx="1225296" cy="475488"/>
+          </a:xfrm>
+          <a:prstGeom prst="rect">
+            <a:avLst/>
+          </a:prstGeom>
+          <a:noFill/>
+          <a:ln/>
+        </p:spPr>
+        <p:txBody>
+          <a:bodyPr wrap="square" lIns="0" tIns="0" rIns="0" bIns="0" rtlCol="0" anchor="ctr"/>
+          <a:lstStyle/>
+          <a:p>
+            <a:pPr algn="ctr" indent="0" marL="0">
+              <a:buNone/>
+            </a:pPr>
+            <a:r>
+              <a:rPr lang="en-US" sz="1400" b="1" dirty="0">
+                <a:solidFill>
+                  <a:srgbClr val="0D9488"/>
                 </a:solidFill>
                 <a:latin typeface="Trebuchet MS" pitchFamily="34" charset="0"/>
                 <a:ea typeface="Trebuchet MS" pitchFamily="34" charset="-122"/>
                 <a:cs typeface="Trebuchet MS" pitchFamily="34" charset="-120"/>
               </a:rPr>
-              <a:t>Syllables</a:t>
-            </a:r>
-            <a:endParaRPr lang="en-US" sz="1100" dirty="0"/>
-          </a:p>
-        </p:txBody>
-      </p:sp>
-      <p:sp>
-        <p:nvSpPr>
-          <p:cNvPr id="27" name="Shape 25"/>
-          <p:cNvSpPr/>
-          <p:nvPr/>
-        </p:nvSpPr>
-        <p:spPr>
-          <a:xfrm>
-            <a:off x="1874520" y="3273552"/>
-            <a:ext cx="6903720" cy="658368"/>
-          </a:xfrm>
-          <a:prstGeom prst="rect">
-            <a:avLst>
-              <a:gd name="adj" fmla="val 8333"/>
-            </a:avLst>
-          </a:prstGeom>
-          <a:solidFill>
-            <a:srgbClr val="CCFBF1"/>
-          </a:solidFill>
-          <a:ln w="12700">
-            <a:solidFill>
-              <a:srgbClr val="0D9488"/>
-            </a:solidFill>
-            <a:prstDash val="solid"/>
-          </a:ln>
-        </p:spPr>
+              <a:t>mul</a:t>
+            </a:r>
+            <a:endParaRPr lang="en-US" sz="1400" dirty="0"/>
+          </a:p>
+        </p:txBody>
+      </p:sp>
+      <p:sp>
+        <p:nvSpPr>
+          <p:cNvPr id="27" name="Text 25"/>
+          <p:cNvSpPr/>
+          <p:nvPr/>
+        </p:nvSpPr>
+        <p:spPr>
+          <a:xfrm>
+            <a:off x="3203448" y="3364992"/>
+            <a:ext cx="76200" cy="475488"/>
+          </a:xfrm>
+          <a:prstGeom prst="rect">
+            <a:avLst/>
+          </a:prstGeom>
+          <a:noFill/>
+          <a:ln/>
+        </p:spPr>
+        <p:txBody>
+          <a:bodyPr wrap="square" lIns="0" tIns="0" rIns="0" bIns="0" rtlCol="0" anchor="ctr"/>
+          <a:lstStyle/>
+          <a:p>
+            <a:pPr algn="ctr" indent="0" marL="0">
+              <a:buNone/>
+            </a:pPr>
+            <a:r>
+              <a:rPr lang="en-US" sz="1600" b="1" dirty="0">
+                <a:solidFill>
+                  <a:srgbClr val="0D9488"/>
+                </a:solidFill>
+                <a:latin typeface="Trebuchet MS" pitchFamily="34" charset="0"/>
+                <a:ea typeface="Trebuchet MS" pitchFamily="34" charset="-122"/>
+                <a:cs typeface="Trebuchet MS" pitchFamily="34" charset="-120"/>
+              </a:rPr>
+              <a:t>·</a:t>
+            </a:r>
+            <a:endParaRPr lang="en-US" sz="1600" dirty="0"/>
+          </a:p>
+        </p:txBody>
       </p:sp>
       <p:sp>
         <p:nvSpPr>
@@ -21695,7 +21720,7 @@
         </p:nvSpPr>
         <p:spPr>
           <a:xfrm>
-            <a:off x="1978152" y="3364992"/>
+            <a:off x="3279648" y="3364992"/>
             <a:ext cx="1225296" cy="475488"/>
           </a:xfrm>
           <a:prstGeom prst="rect">
@@ -21722,7 +21747,7 @@
         </p:nvSpPr>
         <p:spPr>
           <a:xfrm>
-            <a:off x="1978152" y="3364992"/>
+            <a:off x="3279648" y="3364992"/>
             <a:ext cx="1225296" cy="475488"/>
           </a:xfrm>
           <a:prstGeom prst="rect">
@@ -21747,7 +21772,7 @@
                 <a:ea typeface="Trebuchet MS" pitchFamily="34" charset="-122"/>
                 <a:cs typeface="Trebuchet MS" pitchFamily="34" charset="-120"/>
               </a:rPr>
-              <a:t>mul</a:t>
+              <a:t>ti</a:t>
             </a:r>
             <a:endParaRPr lang="en-US" sz="1400" dirty="0"/>
           </a:p>
@@ -21761,7 +21786,7 @@
         </p:nvSpPr>
         <p:spPr>
           <a:xfrm>
-            <a:off x="3203448" y="3364992"/>
+            <a:off x="4504944" y="3364992"/>
             <a:ext cx="76200" cy="475488"/>
           </a:xfrm>
           <a:prstGeom prst="rect">
@@ -21800,7 +21825,7 @@
         </p:nvSpPr>
         <p:spPr>
           <a:xfrm>
-            <a:off x="3279648" y="3364992"/>
+            <a:off x="4581144" y="3364992"/>
             <a:ext cx="1225296" cy="475488"/>
           </a:xfrm>
           <a:prstGeom prst="rect">
@@ -21827,7 +21852,7 @@
         </p:nvSpPr>
         <p:spPr>
           <a:xfrm>
-            <a:off x="3279648" y="3364992"/>
+            <a:off x="4581144" y="3364992"/>
             <a:ext cx="1225296" cy="475488"/>
           </a:xfrm>
           <a:prstGeom prst="rect">
@@ -21852,7 +21877,7 @@
                 <a:ea typeface="Trebuchet MS" pitchFamily="34" charset="-122"/>
                 <a:cs typeface="Trebuchet MS" pitchFamily="34" charset="-120"/>
               </a:rPr>
-              <a:t>ti</a:t>
+              <a:t>me</a:t>
             </a:r>
             <a:endParaRPr lang="en-US" sz="1400" dirty="0"/>
           </a:p>
@@ -21866,7 +21891,7 @@
         </p:nvSpPr>
         <p:spPr>
           <a:xfrm>
-            <a:off x="4504944" y="3364992"/>
+            <a:off x="5806440" y="3364992"/>
             <a:ext cx="76200" cy="475488"/>
           </a:xfrm>
           <a:prstGeom prst="rect">
@@ -21905,7 +21930,7 @@
         </p:nvSpPr>
         <p:spPr>
           <a:xfrm>
-            <a:off x="4581144" y="3364992"/>
+            <a:off x="5882640" y="3364992"/>
             <a:ext cx="1225296" cy="475488"/>
           </a:xfrm>
           <a:prstGeom prst="rect">
@@ -21932,7 +21957,7 @@
         </p:nvSpPr>
         <p:spPr>
           <a:xfrm>
-            <a:off x="4581144" y="3364992"/>
+            <a:off x="5882640" y="3364992"/>
             <a:ext cx="1225296" cy="475488"/>
           </a:xfrm>
           <a:prstGeom prst="rect">
@@ -21957,7 +21982,7 @@
                 <a:ea typeface="Trebuchet MS" pitchFamily="34" charset="-122"/>
                 <a:cs typeface="Trebuchet MS" pitchFamily="34" charset="-120"/>
               </a:rPr>
-              <a:t>cul</a:t>
+              <a:t>di</a:t>
             </a:r>
             <a:endParaRPr lang="en-US" sz="1400" dirty="0"/>
           </a:p>
@@ -21971,7 +21996,7 @@
         </p:nvSpPr>
         <p:spPr>
           <a:xfrm>
-            <a:off x="5806440" y="3364992"/>
+            <a:off x="7107936" y="3364992"/>
             <a:ext cx="76200" cy="475488"/>
           </a:xfrm>
           <a:prstGeom prst="rect">
@@ -22010,7 +22035,7 @@
         </p:nvSpPr>
         <p:spPr>
           <a:xfrm>
-            <a:off x="5882640" y="3364992"/>
+            <a:off x="7184136" y="3364992"/>
             <a:ext cx="1225296" cy="475488"/>
           </a:xfrm>
           <a:prstGeom prst="rect">
@@ -22037,7 +22062,7 @@
         </p:nvSpPr>
         <p:spPr>
           <a:xfrm>
-            <a:off x="5882640" y="3364992"/>
+            <a:off x="7184136" y="3364992"/>
             <a:ext cx="1225296" cy="475488"/>
           </a:xfrm>
           <a:prstGeom prst="rect">
@@ -22062,7 +22087,7 @@
                 <a:ea typeface="Trebuchet MS" pitchFamily="34" charset="-122"/>
                 <a:cs typeface="Trebuchet MS" pitchFamily="34" charset="-120"/>
               </a:rPr>
-              <a:t>tur</a:t>
+              <a:t>a</a:t>
             </a:r>
             <a:endParaRPr lang="en-US" sz="1400" dirty="0"/>
           </a:p>
@@ -22070,119 +22095,80 @@
       </p:sp>
       <p:sp>
         <p:nvSpPr>
-          <p:cNvPr id="39" name="Text 37"/>
-          <p:cNvSpPr/>
-          <p:nvPr/>
-        </p:nvSpPr>
-        <p:spPr>
-          <a:xfrm>
-            <a:off x="7107936" y="3364992"/>
-            <a:ext cx="76200" cy="475488"/>
-          </a:xfrm>
-          <a:prstGeom prst="rect">
-            <a:avLst/>
-          </a:prstGeom>
-          <a:noFill/>
-          <a:ln/>
-        </p:spPr>
-        <p:txBody>
-          <a:bodyPr wrap="square" lIns="0" tIns="0" rIns="0" bIns="0" rtlCol="0" anchor="ctr"/>
-          <a:lstStyle/>
-          <a:p>
-            <a:pPr algn="ctr" indent="0" marL="0">
-              <a:buNone/>
-            </a:pPr>
-            <a:r>
-              <a:rPr lang="en-US" sz="1600" b="1" dirty="0">
-                <a:solidFill>
-                  <a:srgbClr val="0D9488"/>
+          <p:cNvPr id="39" name="Shape 37"/>
+          <p:cNvSpPr/>
+          <p:nvPr/>
+        </p:nvSpPr>
+        <p:spPr>
+          <a:xfrm>
+            <a:off x="365760" y="4096512"/>
+            <a:ext cx="1371600" cy="804672"/>
+          </a:xfrm>
+          <a:prstGeom prst="rect">
+            <a:avLst>
+              <a:gd name="adj" fmla="val 6818"/>
+            </a:avLst>
+          </a:prstGeom>
+          <a:solidFill>
+            <a:srgbClr val="E2E8F0"/>
+          </a:solidFill>
+          <a:ln w="12700">
+            <a:solidFill>
+              <a:srgbClr val="E2E8F0"/>
+            </a:solidFill>
+            <a:prstDash val="solid"/>
+          </a:ln>
+        </p:spPr>
+      </p:sp>
+      <p:sp>
+        <p:nvSpPr>
+          <p:cNvPr id="40" name="Text 38"/>
+          <p:cNvSpPr/>
+          <p:nvPr/>
+        </p:nvSpPr>
+        <p:spPr>
+          <a:xfrm>
+            <a:off x="365760" y="4096512"/>
+            <a:ext cx="1371600" cy="804672"/>
+          </a:xfrm>
+          <a:prstGeom prst="rect">
+            <a:avLst/>
+          </a:prstGeom>
+          <a:noFill/>
+          <a:ln/>
+        </p:spPr>
+        <p:txBody>
+          <a:bodyPr wrap="square" lIns="0" tIns="0" rIns="0" bIns="0" rtlCol="0" anchor="ctr"/>
+          <a:lstStyle/>
+          <a:p>
+            <a:pPr algn="ctr" indent="0" marL="0">
+              <a:buNone/>
+            </a:pPr>
+            <a:r>
+              <a:rPr lang="en-US" sz="1100" b="1" dirty="0">
+                <a:solidFill>
+                  <a:srgbClr val="475569"/>
                 </a:solidFill>
                 <a:latin typeface="Trebuchet MS" pitchFamily="34" charset="0"/>
                 <a:ea typeface="Trebuchet MS" pitchFamily="34" charset="-122"/>
                 <a:cs typeface="Trebuchet MS" pitchFamily="34" charset="-120"/>
               </a:rPr>
-              <a:t>·</a:t>
-            </a:r>
-            <a:endParaRPr lang="en-US" sz="1600" dirty="0"/>
-          </a:p>
-        </p:txBody>
-      </p:sp>
-      <p:sp>
-        <p:nvSpPr>
-          <p:cNvPr id="40" name="Shape 38"/>
-          <p:cNvSpPr/>
-          <p:nvPr/>
-        </p:nvSpPr>
-        <p:spPr>
-          <a:xfrm>
-            <a:off x="7184136" y="3364992"/>
-            <a:ext cx="1225296" cy="475488"/>
-          </a:xfrm>
-          <a:prstGeom prst="rect">
-            <a:avLst>
-              <a:gd name="adj" fmla="val 9615"/>
-            </a:avLst>
-          </a:prstGeom>
-          <a:solidFill>
-            <a:srgbClr val="FFFFFF"/>
-          </a:solidFill>
-          <a:ln w="12700">
-            <a:solidFill>
-              <a:srgbClr val="0D9488"/>
-            </a:solidFill>
-            <a:prstDash val="solid"/>
-          </a:ln>
-        </p:spPr>
-      </p:sp>
-      <p:sp>
-        <p:nvSpPr>
-          <p:cNvPr id="41" name="Text 39"/>
-          <p:cNvSpPr/>
-          <p:nvPr/>
-        </p:nvSpPr>
-        <p:spPr>
-          <a:xfrm>
-            <a:off x="7184136" y="3364992"/>
-            <a:ext cx="1225296" cy="475488"/>
-          </a:xfrm>
-          <a:prstGeom prst="rect">
-            <a:avLst/>
-          </a:prstGeom>
-          <a:noFill/>
-          <a:ln/>
-        </p:spPr>
-        <p:txBody>
-          <a:bodyPr wrap="square" lIns="0" tIns="0" rIns="0" bIns="0" rtlCol="0" anchor="ctr"/>
-          <a:lstStyle/>
-          <a:p>
-            <a:pPr algn="ctr" indent="0" marL="0">
-              <a:buNone/>
-            </a:pPr>
-            <a:r>
-              <a:rPr lang="en-US" sz="1400" b="1" dirty="0">
-                <a:solidFill>
-                  <a:srgbClr val="0D9488"/>
-                </a:solidFill>
-                <a:latin typeface="Trebuchet MS" pitchFamily="34" charset="0"/>
-                <a:ea typeface="Trebuchet MS" pitchFamily="34" charset="-122"/>
-                <a:cs typeface="Trebuchet MS" pitchFamily="34" charset="-120"/>
-              </a:rPr>
-              <a:t>al</a:t>
-            </a:r>
-            <a:endParaRPr lang="en-US" sz="1400" dirty="0"/>
-          </a:p>
-        </p:txBody>
-      </p:sp>
-      <p:sp>
-        <p:nvSpPr>
-          <p:cNvPr id="42" name="Shape 40"/>
-          <p:cNvSpPr/>
-          <p:nvPr/>
-        </p:nvSpPr>
-        <p:spPr>
-          <a:xfrm>
-            <a:off x="365760" y="4096512"/>
-            <a:ext cx="1371600" cy="804672"/>
+              <a:t>Phonemes</a:t>
+            </a:r>
+            <a:endParaRPr lang="en-US" sz="1100" dirty="0"/>
+          </a:p>
+        </p:txBody>
+      </p:sp>
+      <p:sp>
+        <p:nvSpPr>
+          <p:cNvPr id="41" name="Shape 39"/>
+          <p:cNvSpPr/>
+          <p:nvPr/>
+        </p:nvSpPr>
+        <p:spPr>
+          <a:xfrm>
+            <a:off x="1874520" y="4096512"/>
+            <a:ext cx="6903720" cy="804672"/>
           </a:xfrm>
           <a:prstGeom prst="rect">
             <a:avLst>
@@ -22190,85 +22176,19 @@
             </a:avLst>
           </a:prstGeom>
           <a:solidFill>
-            <a:srgbClr val="E2E8F0"/>
+            <a:srgbClr val="F8FAFC"/>
           </a:solidFill>
           <a:ln w="12700">
             <a:solidFill>
               <a:srgbClr val="E2E8F0"/>
             </a:solidFill>
-            <a:prstDash val="solid"/>
-          </a:ln>
-        </p:spPr>
-      </p:sp>
-      <p:sp>
-        <p:nvSpPr>
-          <p:cNvPr id="43" name="Text 41"/>
-          <p:cNvSpPr/>
-          <p:nvPr/>
-        </p:nvSpPr>
-        <p:spPr>
-          <a:xfrm>
-            <a:off x="365760" y="4096512"/>
-            <a:ext cx="1371600" cy="804672"/>
-          </a:xfrm>
-          <a:prstGeom prst="rect">
-            <a:avLst/>
-          </a:prstGeom>
-          <a:noFill/>
-          <a:ln/>
-        </p:spPr>
-        <p:txBody>
-          <a:bodyPr wrap="square" lIns="0" tIns="0" rIns="0" bIns="0" rtlCol="0" anchor="ctr"/>
-          <a:lstStyle/>
-          <a:p>
-            <a:pPr algn="ctr" indent="0" marL="0">
-              <a:buNone/>
-            </a:pPr>
-            <a:r>
-              <a:rPr lang="en-US" sz="1100" b="1" dirty="0">
-                <a:solidFill>
-                  <a:srgbClr val="475569"/>
-                </a:solidFill>
-                <a:latin typeface="Trebuchet MS" pitchFamily="34" charset="0"/>
-                <a:ea typeface="Trebuchet MS" pitchFamily="34" charset="-122"/>
-                <a:cs typeface="Trebuchet MS" pitchFamily="34" charset="-120"/>
-              </a:rPr>
-              <a:t>Phonemes</a:t>
-            </a:r>
-            <a:endParaRPr lang="en-US" sz="1100" dirty="0"/>
-          </a:p>
-        </p:txBody>
-      </p:sp>
-      <p:sp>
-        <p:nvSpPr>
-          <p:cNvPr id="44" name="Shape 42"/>
-          <p:cNvSpPr/>
-          <p:nvPr/>
-        </p:nvSpPr>
-        <p:spPr>
-          <a:xfrm>
-            <a:off x="1874520" y="4096512"/>
-            <a:ext cx="6903720" cy="804672"/>
-          </a:xfrm>
-          <a:prstGeom prst="rect">
-            <a:avLst>
-              <a:gd name="adj" fmla="val 6818"/>
-            </a:avLst>
-          </a:prstGeom>
-          <a:solidFill>
-            <a:srgbClr val="F8FAFC"/>
-          </a:solidFill>
-          <a:ln w="12700">
-            <a:solidFill>
-              <a:srgbClr val="E2E8F0"/>
-            </a:solidFill>
             <a:prstDash val="dash"/>
           </a:ln>
         </p:spPr>
       </p:sp>
       <p:sp>
         <p:nvSpPr>
-          <p:cNvPr id="45" name="Text 43"/>
+          <p:cNvPr id="42" name="Text 40"/>
           <p:cNvSpPr/>
           <p:nvPr/>
         </p:nvSpPr>
@@ -22730,7 +22650,7 @@
                 <a:ea typeface="Trebuchet MS" pitchFamily="34" charset="-122"/>
                 <a:cs typeface="Trebuchet MS" pitchFamily="34" charset="-120"/>
               </a:rPr>
-              <a:t>multicultural</a:t>
+              <a:t>multimedia</a:t>
             </a:r>
             <a:endParaRPr lang="en-US" sz="2800" dirty="0"/>
           </a:p>
@@ -22810,7 +22730,7 @@
         </p:nvSpPr>
         <p:spPr>
           <a:xfrm>
-            <a:off x="2221992" y="2258568"/>
+            <a:off x="2938272" y="2258568"/>
             <a:ext cx="1828800" cy="292608"/>
           </a:xfrm>
           <a:prstGeom prst="rect">
@@ -22844,7 +22764,7 @@
         </p:nvSpPr>
         <p:spPr>
           <a:xfrm>
-            <a:off x="2221992" y="2258568"/>
+            <a:off x="2938272" y="2258568"/>
             <a:ext cx="1828800" cy="292608"/>
           </a:xfrm>
           <a:prstGeom prst="rect">
@@ -22883,7 +22803,7 @@
         </p:nvSpPr>
         <p:spPr>
           <a:xfrm>
-            <a:off x="2221992" y="2569464"/>
+            <a:off x="2938272" y="2569464"/>
             <a:ext cx="1828800" cy="201168"/>
           </a:xfrm>
           <a:prstGeom prst="rect">
@@ -22922,7 +22842,7 @@
         </p:nvSpPr>
         <p:spPr>
           <a:xfrm>
-            <a:off x="4370832" y="2258568"/>
+            <a:off x="5803392" y="2258568"/>
             <a:ext cx="1828800" cy="292608"/>
           </a:xfrm>
           <a:prstGeom prst="rect">
@@ -22956,7 +22876,7 @@
         </p:nvSpPr>
         <p:spPr>
           <a:xfrm>
-            <a:off x="4370832" y="2258568"/>
+            <a:off x="5803392" y="2258568"/>
             <a:ext cx="1828800" cy="292608"/>
           </a:xfrm>
           <a:prstGeom prst="rect">
@@ -22981,7 +22901,7 @@
                 <a:ea typeface="Trebuchet MS" pitchFamily="34" charset="-122"/>
                 <a:cs typeface="Trebuchet MS" pitchFamily="34" charset="-120"/>
               </a:rPr>
-              <a:t>cultur</a:t>
+              <a:t>media</a:t>
             </a:r>
             <a:endParaRPr lang="en-US" sz="1300" dirty="0"/>
           </a:p>
@@ -22995,7 +22915,7 @@
         </p:nvSpPr>
         <p:spPr>
           <a:xfrm>
-            <a:off x="4370832" y="2569464"/>
+            <a:off x="5803392" y="2569464"/>
             <a:ext cx="1828800" cy="201168"/>
           </a:xfrm>
           <a:prstGeom prst="rect">
@@ -23020,7 +22940,7 @@
                 <a:ea typeface="Calibri" pitchFamily="34" charset="-122"/>
                 <a:cs typeface="Calibri" pitchFamily="34" charset="-120"/>
               </a:rPr>
-              <a:t>way of life</a:t>
+              <a:t>means of communication</a:t>
             </a:r>
             <a:endParaRPr lang="en-US" sz="850" dirty="0"/>
           </a:p>
@@ -23034,30 +22954,23 @@
         </p:nvSpPr>
         <p:spPr>
           <a:xfrm>
-            <a:off x="6519672" y="2258568"/>
-            <a:ext cx="1828800" cy="292608"/>
+            <a:off x="365760" y="3273552"/>
+            <a:ext cx="1371600" cy="658368"/>
           </a:xfrm>
           <a:prstGeom prst="rect">
             <a:avLst>
-              <a:gd name="adj" fmla="val 25000"/>
+              <a:gd name="adj" fmla="val 8333"/>
             </a:avLst>
           </a:prstGeom>
           <a:solidFill>
-            <a:srgbClr val="FCE7F3"/>
-          </a:solidFill>
-          <a:ln w="19050">
-            <a:solidFill>
-              <a:srgbClr val="DB2777"/>
-            </a:solidFill>
-            <a:prstDash val="solid"/>
-          </a:ln>
-          <a:effectLst>
-            <a:outerShdw sx="100000" sy="100000" kx="0" ky="0" algn="bl" rotWithShape="0" blurRad="101600" dist="38100" dir="8100000">
-              <a:srgbClr val="000000">
-                <a:alpha val="12000"/>
-              </a:srgbClr>
-            </a:outerShdw>
-          </a:effectLst>
+            <a:srgbClr val="E2E8F0"/>
+          </a:solidFill>
+          <a:ln w="12700">
+            <a:solidFill>
+              <a:srgbClr val="E2E8F0"/>
+            </a:solidFill>
+            <a:prstDash val="solid"/>
+          </a:ln>
         </p:spPr>
       </p:sp>
       <p:sp>
@@ -23068,86 +22981,47 @@
         </p:nvSpPr>
         <p:spPr>
           <a:xfrm>
-            <a:off x="6519672" y="2258568"/>
-            <a:ext cx="1828800" cy="292608"/>
-          </a:xfrm>
-          <a:prstGeom prst="rect">
-            <a:avLst/>
-          </a:prstGeom>
-          <a:noFill/>
-          <a:ln/>
-        </p:spPr>
-        <p:txBody>
-          <a:bodyPr wrap="square" lIns="0" tIns="0" rIns="0" bIns="0" rtlCol="0" anchor="ctr"/>
-          <a:lstStyle/>
-          <a:p>
-            <a:pPr algn="ctr" indent="0" marL="0">
-              <a:buNone/>
-            </a:pPr>
-            <a:r>
-              <a:rPr lang="en-US" sz="1300" b="1" dirty="0">
-                <a:solidFill>
-                  <a:srgbClr val="9D174D"/>
+            <a:off x="365760" y="3273552"/>
+            <a:ext cx="1371600" cy="658368"/>
+          </a:xfrm>
+          <a:prstGeom prst="rect">
+            <a:avLst/>
+          </a:prstGeom>
+          <a:noFill/>
+          <a:ln/>
+        </p:spPr>
+        <p:txBody>
+          <a:bodyPr wrap="square" lIns="0" tIns="0" rIns="0" bIns="0" rtlCol="0" anchor="ctr"/>
+          <a:lstStyle/>
+          <a:p>
+            <a:pPr algn="ctr" indent="0" marL="0">
+              <a:buNone/>
+            </a:pPr>
+            <a:r>
+              <a:rPr lang="en-US" sz="1100" b="1" dirty="0">
+                <a:solidFill>
+                  <a:srgbClr val="475569"/>
                 </a:solidFill>
                 <a:latin typeface="Trebuchet MS" pitchFamily="34" charset="0"/>
                 <a:ea typeface="Trebuchet MS" pitchFamily="34" charset="-122"/>
                 <a:cs typeface="Trebuchet MS" pitchFamily="34" charset="-120"/>
               </a:rPr>
-              <a:t>al</a:t>
-            </a:r>
-            <a:endParaRPr lang="en-US" sz="1300" dirty="0"/>
-          </a:p>
-        </p:txBody>
-      </p:sp>
-      <p:sp>
-        <p:nvSpPr>
-          <p:cNvPr id="24" name="Text 22"/>
-          <p:cNvSpPr/>
-          <p:nvPr/>
-        </p:nvSpPr>
-        <p:spPr>
-          <a:xfrm>
-            <a:off x="6519672" y="2569464"/>
-            <a:ext cx="1828800" cy="201168"/>
-          </a:xfrm>
-          <a:prstGeom prst="rect">
-            <a:avLst/>
-          </a:prstGeom>
-          <a:noFill/>
-          <a:ln/>
-        </p:spPr>
-        <p:txBody>
-          <a:bodyPr wrap="square" lIns="0" tIns="0" rIns="0" bIns="0" rtlCol="0" anchor="t"/>
-          <a:lstStyle/>
-          <a:p>
-            <a:pPr algn="ctr" indent="0" marL="0">
-              <a:buNone/>
-            </a:pPr>
-            <a:r>
-              <a:rPr lang="en-US" sz="850" dirty="0">
-                <a:solidFill>
-                  <a:srgbClr val="475569"/>
-                </a:solidFill>
-                <a:latin typeface="Calibri" pitchFamily="34" charset="0"/>
-                <a:ea typeface="Calibri" pitchFamily="34" charset="-122"/>
-                <a:cs typeface="Calibri" pitchFamily="34" charset="-120"/>
-              </a:rPr>
-              <a:t>relating to</a:t>
-            </a:r>
-            <a:endParaRPr lang="en-US" sz="850" dirty="0"/>
-          </a:p>
-        </p:txBody>
-      </p:sp>
-      <p:sp>
-        <p:nvSpPr>
-          <p:cNvPr id="25" name="Shape 23"/>
-          <p:cNvSpPr/>
-          <p:nvPr/>
-        </p:nvSpPr>
-        <p:spPr>
-          <a:xfrm>
-            <a:off x="365760" y="3273552"/>
-            <a:ext cx="1371600" cy="658368"/>
+              <a:t>Syllables</a:t>
+            </a:r>
+            <a:endParaRPr lang="en-US" sz="1100" dirty="0"/>
+          </a:p>
+        </p:txBody>
+      </p:sp>
+      <p:sp>
+        <p:nvSpPr>
+          <p:cNvPr id="24" name="Shape 22"/>
+          <p:cNvSpPr/>
+          <p:nvPr/>
+        </p:nvSpPr>
+        <p:spPr>
+          <a:xfrm>
+            <a:off x="1874520" y="3273552"/>
+            <a:ext cx="6903720" cy="658368"/>
           </a:xfrm>
           <a:prstGeom prst="rect">
             <a:avLst>
@@ -23155,11 +23029,38 @@
             </a:avLst>
           </a:prstGeom>
           <a:solidFill>
-            <a:srgbClr val="E2E8F0"/>
-          </a:solidFill>
-          <a:ln w="12700">
-            <a:solidFill>
-              <a:srgbClr val="E2E8F0"/>
+            <a:srgbClr val="CCFBF1"/>
+          </a:solidFill>
+          <a:ln w="12700">
+            <a:solidFill>
+              <a:srgbClr val="0D9488"/>
+            </a:solidFill>
+            <a:prstDash val="solid"/>
+          </a:ln>
+        </p:spPr>
+      </p:sp>
+      <p:sp>
+        <p:nvSpPr>
+          <p:cNvPr id="25" name="Shape 23"/>
+          <p:cNvSpPr/>
+          <p:nvPr/>
+        </p:nvSpPr>
+        <p:spPr>
+          <a:xfrm>
+            <a:off x="1978152" y="3364992"/>
+            <a:ext cx="1225296" cy="475488"/>
+          </a:xfrm>
+          <a:prstGeom prst="rect">
+            <a:avLst>
+              <a:gd name="adj" fmla="val 9615"/>
+            </a:avLst>
+          </a:prstGeom>
+          <a:solidFill>
+            <a:srgbClr val="FFFFFF"/>
+          </a:solidFill>
+          <a:ln w="12700">
+            <a:solidFill>
+              <a:srgbClr val="0D9488"/>
             </a:solidFill>
             <a:prstDash val="solid"/>
           </a:ln>
@@ -23173,32 +23074,518 @@
         </p:nvSpPr>
         <p:spPr>
           <a:xfrm>
-            <a:off x="365760" y="3273552"/>
-            <a:ext cx="1371600" cy="658368"/>
-          </a:xfrm>
-          <a:prstGeom prst="rect">
-            <a:avLst/>
-          </a:prstGeom>
-          <a:noFill/>
-          <a:ln/>
-        </p:spPr>
-        <p:txBody>
-          <a:bodyPr wrap="square" lIns="0" tIns="0" rIns="0" bIns="0" rtlCol="0" anchor="ctr"/>
-          <a:lstStyle/>
-          <a:p>
-            <a:pPr algn="ctr" indent="0" marL="0">
-              <a:buNone/>
-            </a:pPr>
-            <a:r>
-              <a:rPr lang="en-US" sz="1100" b="1" dirty="0">
-                <a:solidFill>
-                  <a:srgbClr val="475569"/>
+            <a:off x="1978152" y="3364992"/>
+            <a:ext cx="1225296" cy="475488"/>
+          </a:xfrm>
+          <a:prstGeom prst="rect">
+            <a:avLst/>
+          </a:prstGeom>
+          <a:noFill/>
+          <a:ln/>
+        </p:spPr>
+        <p:txBody>
+          <a:bodyPr wrap="square" lIns="0" tIns="0" rIns="0" bIns="0" rtlCol="0" anchor="ctr"/>
+          <a:lstStyle/>
+          <a:p>
+            <a:pPr algn="ctr" indent="0" marL="0">
+              <a:buNone/>
+            </a:pPr>
+            <a:r>
+              <a:rPr lang="en-US" sz="1400" b="1" dirty="0">
+                <a:solidFill>
+                  <a:srgbClr val="0D9488"/>
                 </a:solidFill>
                 <a:latin typeface="Trebuchet MS" pitchFamily="34" charset="0"/>
                 <a:ea typeface="Trebuchet MS" pitchFamily="34" charset="-122"/>
                 <a:cs typeface="Trebuchet MS" pitchFamily="34" charset="-120"/>
               </a:rPr>
-              <a:t>Syllables</a:t>
+              <a:t>mul</a:t>
+            </a:r>
+            <a:endParaRPr lang="en-US" sz="1400" dirty="0"/>
+          </a:p>
+        </p:txBody>
+      </p:sp>
+      <p:sp>
+        <p:nvSpPr>
+          <p:cNvPr id="27" name="Text 25"/>
+          <p:cNvSpPr/>
+          <p:nvPr/>
+        </p:nvSpPr>
+        <p:spPr>
+          <a:xfrm>
+            <a:off x="3203448" y="3364992"/>
+            <a:ext cx="76200" cy="475488"/>
+          </a:xfrm>
+          <a:prstGeom prst="rect">
+            <a:avLst/>
+          </a:prstGeom>
+          <a:noFill/>
+          <a:ln/>
+        </p:spPr>
+        <p:txBody>
+          <a:bodyPr wrap="square" lIns="0" tIns="0" rIns="0" bIns="0" rtlCol="0" anchor="ctr"/>
+          <a:lstStyle/>
+          <a:p>
+            <a:pPr algn="ctr" indent="0" marL="0">
+              <a:buNone/>
+            </a:pPr>
+            <a:r>
+              <a:rPr lang="en-US" sz="1600" b="1" dirty="0">
+                <a:solidFill>
+                  <a:srgbClr val="0D9488"/>
+                </a:solidFill>
+                <a:latin typeface="Trebuchet MS" pitchFamily="34" charset="0"/>
+                <a:ea typeface="Trebuchet MS" pitchFamily="34" charset="-122"/>
+                <a:cs typeface="Trebuchet MS" pitchFamily="34" charset="-120"/>
+              </a:rPr>
+              <a:t>·</a:t>
+            </a:r>
+            <a:endParaRPr lang="en-US" sz="1600" dirty="0"/>
+          </a:p>
+        </p:txBody>
+      </p:sp>
+      <p:sp>
+        <p:nvSpPr>
+          <p:cNvPr id="28" name="Shape 26"/>
+          <p:cNvSpPr/>
+          <p:nvPr/>
+        </p:nvSpPr>
+        <p:spPr>
+          <a:xfrm>
+            <a:off x="3279648" y="3364992"/>
+            <a:ext cx="1225296" cy="475488"/>
+          </a:xfrm>
+          <a:prstGeom prst="rect">
+            <a:avLst>
+              <a:gd name="adj" fmla="val 9615"/>
+            </a:avLst>
+          </a:prstGeom>
+          <a:solidFill>
+            <a:srgbClr val="FFFFFF"/>
+          </a:solidFill>
+          <a:ln w="12700">
+            <a:solidFill>
+              <a:srgbClr val="0D9488"/>
+            </a:solidFill>
+            <a:prstDash val="solid"/>
+          </a:ln>
+        </p:spPr>
+      </p:sp>
+      <p:sp>
+        <p:nvSpPr>
+          <p:cNvPr id="29" name="Text 27"/>
+          <p:cNvSpPr/>
+          <p:nvPr/>
+        </p:nvSpPr>
+        <p:spPr>
+          <a:xfrm>
+            <a:off x="3279648" y="3364992"/>
+            <a:ext cx="1225296" cy="475488"/>
+          </a:xfrm>
+          <a:prstGeom prst="rect">
+            <a:avLst/>
+          </a:prstGeom>
+          <a:noFill/>
+          <a:ln/>
+        </p:spPr>
+        <p:txBody>
+          <a:bodyPr wrap="square" lIns="0" tIns="0" rIns="0" bIns="0" rtlCol="0" anchor="ctr"/>
+          <a:lstStyle/>
+          <a:p>
+            <a:pPr algn="ctr" indent="0" marL="0">
+              <a:buNone/>
+            </a:pPr>
+            <a:r>
+              <a:rPr lang="en-US" sz="1400" b="1" dirty="0">
+                <a:solidFill>
+                  <a:srgbClr val="0D9488"/>
+                </a:solidFill>
+                <a:latin typeface="Trebuchet MS" pitchFamily="34" charset="0"/>
+                <a:ea typeface="Trebuchet MS" pitchFamily="34" charset="-122"/>
+                <a:cs typeface="Trebuchet MS" pitchFamily="34" charset="-120"/>
+              </a:rPr>
+              <a:t>ti</a:t>
+            </a:r>
+            <a:endParaRPr lang="en-US" sz="1400" dirty="0"/>
+          </a:p>
+        </p:txBody>
+      </p:sp>
+      <p:sp>
+        <p:nvSpPr>
+          <p:cNvPr id="30" name="Text 28"/>
+          <p:cNvSpPr/>
+          <p:nvPr/>
+        </p:nvSpPr>
+        <p:spPr>
+          <a:xfrm>
+            <a:off x="4504944" y="3364992"/>
+            <a:ext cx="76200" cy="475488"/>
+          </a:xfrm>
+          <a:prstGeom prst="rect">
+            <a:avLst/>
+          </a:prstGeom>
+          <a:noFill/>
+          <a:ln/>
+        </p:spPr>
+        <p:txBody>
+          <a:bodyPr wrap="square" lIns="0" tIns="0" rIns="0" bIns="0" rtlCol="0" anchor="ctr"/>
+          <a:lstStyle/>
+          <a:p>
+            <a:pPr algn="ctr" indent="0" marL="0">
+              <a:buNone/>
+            </a:pPr>
+            <a:r>
+              <a:rPr lang="en-US" sz="1600" b="1" dirty="0">
+                <a:solidFill>
+                  <a:srgbClr val="0D9488"/>
+                </a:solidFill>
+                <a:latin typeface="Trebuchet MS" pitchFamily="34" charset="0"/>
+                <a:ea typeface="Trebuchet MS" pitchFamily="34" charset="-122"/>
+                <a:cs typeface="Trebuchet MS" pitchFamily="34" charset="-120"/>
+              </a:rPr>
+              <a:t>·</a:t>
+            </a:r>
+            <a:endParaRPr lang="en-US" sz="1600" dirty="0"/>
+          </a:p>
+        </p:txBody>
+      </p:sp>
+      <p:sp>
+        <p:nvSpPr>
+          <p:cNvPr id="31" name="Shape 29"/>
+          <p:cNvSpPr/>
+          <p:nvPr/>
+        </p:nvSpPr>
+        <p:spPr>
+          <a:xfrm>
+            <a:off x="4581144" y="3364992"/>
+            <a:ext cx="1225296" cy="475488"/>
+          </a:xfrm>
+          <a:prstGeom prst="rect">
+            <a:avLst>
+              <a:gd name="adj" fmla="val 9615"/>
+            </a:avLst>
+          </a:prstGeom>
+          <a:solidFill>
+            <a:srgbClr val="FFFFFF"/>
+          </a:solidFill>
+          <a:ln w="12700">
+            <a:solidFill>
+              <a:srgbClr val="0D9488"/>
+            </a:solidFill>
+            <a:prstDash val="solid"/>
+          </a:ln>
+        </p:spPr>
+      </p:sp>
+      <p:sp>
+        <p:nvSpPr>
+          <p:cNvPr id="32" name="Text 30"/>
+          <p:cNvSpPr/>
+          <p:nvPr/>
+        </p:nvSpPr>
+        <p:spPr>
+          <a:xfrm>
+            <a:off x="4581144" y="3364992"/>
+            <a:ext cx="1225296" cy="475488"/>
+          </a:xfrm>
+          <a:prstGeom prst="rect">
+            <a:avLst/>
+          </a:prstGeom>
+          <a:noFill/>
+          <a:ln/>
+        </p:spPr>
+        <p:txBody>
+          <a:bodyPr wrap="square" lIns="0" tIns="0" rIns="0" bIns="0" rtlCol="0" anchor="ctr"/>
+          <a:lstStyle/>
+          <a:p>
+            <a:pPr algn="ctr" indent="0" marL="0">
+              <a:buNone/>
+            </a:pPr>
+            <a:r>
+              <a:rPr lang="en-US" sz="1400" b="1" dirty="0">
+                <a:solidFill>
+                  <a:srgbClr val="0D9488"/>
+                </a:solidFill>
+                <a:latin typeface="Trebuchet MS" pitchFamily="34" charset="0"/>
+                <a:ea typeface="Trebuchet MS" pitchFamily="34" charset="-122"/>
+                <a:cs typeface="Trebuchet MS" pitchFamily="34" charset="-120"/>
+              </a:rPr>
+              <a:t>me</a:t>
+            </a:r>
+            <a:endParaRPr lang="en-US" sz="1400" dirty="0"/>
+          </a:p>
+        </p:txBody>
+      </p:sp>
+      <p:sp>
+        <p:nvSpPr>
+          <p:cNvPr id="33" name="Text 31"/>
+          <p:cNvSpPr/>
+          <p:nvPr/>
+        </p:nvSpPr>
+        <p:spPr>
+          <a:xfrm>
+            <a:off x="5806440" y="3364992"/>
+            <a:ext cx="76200" cy="475488"/>
+          </a:xfrm>
+          <a:prstGeom prst="rect">
+            <a:avLst/>
+          </a:prstGeom>
+          <a:noFill/>
+          <a:ln/>
+        </p:spPr>
+        <p:txBody>
+          <a:bodyPr wrap="square" lIns="0" tIns="0" rIns="0" bIns="0" rtlCol="0" anchor="ctr"/>
+          <a:lstStyle/>
+          <a:p>
+            <a:pPr algn="ctr" indent="0" marL="0">
+              <a:buNone/>
+            </a:pPr>
+            <a:r>
+              <a:rPr lang="en-US" sz="1600" b="1" dirty="0">
+                <a:solidFill>
+                  <a:srgbClr val="0D9488"/>
+                </a:solidFill>
+                <a:latin typeface="Trebuchet MS" pitchFamily="34" charset="0"/>
+                <a:ea typeface="Trebuchet MS" pitchFamily="34" charset="-122"/>
+                <a:cs typeface="Trebuchet MS" pitchFamily="34" charset="-120"/>
+              </a:rPr>
+              <a:t>·</a:t>
+            </a:r>
+            <a:endParaRPr lang="en-US" sz="1600" dirty="0"/>
+          </a:p>
+        </p:txBody>
+      </p:sp>
+      <p:sp>
+        <p:nvSpPr>
+          <p:cNvPr id="34" name="Shape 32"/>
+          <p:cNvSpPr/>
+          <p:nvPr/>
+        </p:nvSpPr>
+        <p:spPr>
+          <a:xfrm>
+            <a:off x="5882640" y="3364992"/>
+            <a:ext cx="1225296" cy="475488"/>
+          </a:xfrm>
+          <a:prstGeom prst="rect">
+            <a:avLst>
+              <a:gd name="adj" fmla="val 9615"/>
+            </a:avLst>
+          </a:prstGeom>
+          <a:solidFill>
+            <a:srgbClr val="FFFFFF"/>
+          </a:solidFill>
+          <a:ln w="12700">
+            <a:solidFill>
+              <a:srgbClr val="0D9488"/>
+            </a:solidFill>
+            <a:prstDash val="solid"/>
+          </a:ln>
+        </p:spPr>
+      </p:sp>
+      <p:sp>
+        <p:nvSpPr>
+          <p:cNvPr id="35" name="Text 33"/>
+          <p:cNvSpPr/>
+          <p:nvPr/>
+        </p:nvSpPr>
+        <p:spPr>
+          <a:xfrm>
+            <a:off x="5882640" y="3364992"/>
+            <a:ext cx="1225296" cy="475488"/>
+          </a:xfrm>
+          <a:prstGeom prst="rect">
+            <a:avLst/>
+          </a:prstGeom>
+          <a:noFill/>
+          <a:ln/>
+        </p:spPr>
+        <p:txBody>
+          <a:bodyPr wrap="square" lIns="0" tIns="0" rIns="0" bIns="0" rtlCol="0" anchor="ctr"/>
+          <a:lstStyle/>
+          <a:p>
+            <a:pPr algn="ctr" indent="0" marL="0">
+              <a:buNone/>
+            </a:pPr>
+            <a:r>
+              <a:rPr lang="en-US" sz="1400" b="1" dirty="0">
+                <a:solidFill>
+                  <a:srgbClr val="0D9488"/>
+                </a:solidFill>
+                <a:latin typeface="Trebuchet MS" pitchFamily="34" charset="0"/>
+                <a:ea typeface="Trebuchet MS" pitchFamily="34" charset="-122"/>
+                <a:cs typeface="Trebuchet MS" pitchFamily="34" charset="-120"/>
+              </a:rPr>
+              <a:t>di</a:t>
+            </a:r>
+            <a:endParaRPr lang="en-US" sz="1400" dirty="0"/>
+          </a:p>
+        </p:txBody>
+      </p:sp>
+      <p:sp>
+        <p:nvSpPr>
+          <p:cNvPr id="36" name="Text 34"/>
+          <p:cNvSpPr/>
+          <p:nvPr/>
+        </p:nvSpPr>
+        <p:spPr>
+          <a:xfrm>
+            <a:off x="7107936" y="3364992"/>
+            <a:ext cx="76200" cy="475488"/>
+          </a:xfrm>
+          <a:prstGeom prst="rect">
+            <a:avLst/>
+          </a:prstGeom>
+          <a:noFill/>
+          <a:ln/>
+        </p:spPr>
+        <p:txBody>
+          <a:bodyPr wrap="square" lIns="0" tIns="0" rIns="0" bIns="0" rtlCol="0" anchor="ctr"/>
+          <a:lstStyle/>
+          <a:p>
+            <a:pPr algn="ctr" indent="0" marL="0">
+              <a:buNone/>
+            </a:pPr>
+            <a:r>
+              <a:rPr lang="en-US" sz="1600" b="1" dirty="0">
+                <a:solidFill>
+                  <a:srgbClr val="0D9488"/>
+                </a:solidFill>
+                <a:latin typeface="Trebuchet MS" pitchFamily="34" charset="0"/>
+                <a:ea typeface="Trebuchet MS" pitchFamily="34" charset="-122"/>
+                <a:cs typeface="Trebuchet MS" pitchFamily="34" charset="-120"/>
+              </a:rPr>
+              <a:t>·</a:t>
+            </a:r>
+            <a:endParaRPr lang="en-US" sz="1600" dirty="0"/>
+          </a:p>
+        </p:txBody>
+      </p:sp>
+      <p:sp>
+        <p:nvSpPr>
+          <p:cNvPr id="37" name="Shape 35"/>
+          <p:cNvSpPr/>
+          <p:nvPr/>
+        </p:nvSpPr>
+        <p:spPr>
+          <a:xfrm>
+            <a:off x="7184136" y="3364992"/>
+            <a:ext cx="1225296" cy="475488"/>
+          </a:xfrm>
+          <a:prstGeom prst="rect">
+            <a:avLst>
+              <a:gd name="adj" fmla="val 9615"/>
+            </a:avLst>
+          </a:prstGeom>
+          <a:solidFill>
+            <a:srgbClr val="FFFFFF"/>
+          </a:solidFill>
+          <a:ln w="12700">
+            <a:solidFill>
+              <a:srgbClr val="0D9488"/>
+            </a:solidFill>
+            <a:prstDash val="solid"/>
+          </a:ln>
+        </p:spPr>
+      </p:sp>
+      <p:sp>
+        <p:nvSpPr>
+          <p:cNvPr id="38" name="Text 36"/>
+          <p:cNvSpPr/>
+          <p:nvPr/>
+        </p:nvSpPr>
+        <p:spPr>
+          <a:xfrm>
+            <a:off x="7184136" y="3364992"/>
+            <a:ext cx="1225296" cy="475488"/>
+          </a:xfrm>
+          <a:prstGeom prst="rect">
+            <a:avLst/>
+          </a:prstGeom>
+          <a:noFill/>
+          <a:ln/>
+        </p:spPr>
+        <p:txBody>
+          <a:bodyPr wrap="square" lIns="0" tIns="0" rIns="0" bIns="0" rtlCol="0" anchor="ctr"/>
+          <a:lstStyle/>
+          <a:p>
+            <a:pPr algn="ctr" indent="0" marL="0">
+              <a:buNone/>
+            </a:pPr>
+            <a:r>
+              <a:rPr lang="en-US" sz="1400" b="1" dirty="0">
+                <a:solidFill>
+                  <a:srgbClr val="0D9488"/>
+                </a:solidFill>
+                <a:latin typeface="Trebuchet MS" pitchFamily="34" charset="0"/>
+                <a:ea typeface="Trebuchet MS" pitchFamily="34" charset="-122"/>
+                <a:cs typeface="Trebuchet MS" pitchFamily="34" charset="-120"/>
+              </a:rPr>
+              <a:t>a</a:t>
+            </a:r>
+            <a:endParaRPr lang="en-US" sz="1400" dirty="0"/>
+          </a:p>
+        </p:txBody>
+      </p:sp>
+      <p:sp>
+        <p:nvSpPr>
+          <p:cNvPr id="39" name="Shape 37"/>
+          <p:cNvSpPr/>
+          <p:nvPr/>
+        </p:nvSpPr>
+        <p:spPr>
+          <a:xfrm>
+            <a:off x="365760" y="4096512"/>
+            <a:ext cx="1371600" cy="804672"/>
+          </a:xfrm>
+          <a:prstGeom prst="rect">
+            <a:avLst>
+              <a:gd name="adj" fmla="val 6818"/>
+            </a:avLst>
+          </a:prstGeom>
+          <a:solidFill>
+            <a:srgbClr val="E2E8F0"/>
+          </a:solidFill>
+          <a:ln w="12700">
+            <a:solidFill>
+              <a:srgbClr val="E2E8F0"/>
+            </a:solidFill>
+            <a:prstDash val="solid"/>
+          </a:ln>
+        </p:spPr>
+      </p:sp>
+      <p:sp>
+        <p:nvSpPr>
+          <p:cNvPr id="40" name="Text 38"/>
+          <p:cNvSpPr/>
+          <p:nvPr/>
+        </p:nvSpPr>
+        <p:spPr>
+          <a:xfrm>
+            <a:off x="365760" y="4096512"/>
+            <a:ext cx="1371600" cy="804672"/>
+          </a:xfrm>
+          <a:prstGeom prst="rect">
+            <a:avLst/>
+          </a:prstGeom>
+          <a:noFill/>
+          <a:ln/>
+        </p:spPr>
+        <p:txBody>
+          <a:bodyPr wrap="square" lIns="0" tIns="0" rIns="0" bIns="0" rtlCol="0" anchor="ctr"/>
+          <a:lstStyle/>
+          <a:p>
+            <a:pPr algn="ctr" indent="0" marL="0">
+              <a:buNone/>
+            </a:pPr>
+            <a:r>
+              <a:rPr lang="en-US" sz="1100" b="1" dirty="0">
+                <a:solidFill>
+                  <a:srgbClr val="475569"/>
+                </a:solidFill>
+                <a:latin typeface="Trebuchet MS" pitchFamily="34" charset="0"/>
+                <a:ea typeface="Trebuchet MS" pitchFamily="34" charset="-122"/>
+                <a:cs typeface="Trebuchet MS" pitchFamily="34" charset="-120"/>
+              </a:rPr>
+              <a:t>Phonemes</a:t>
             </a:r>
             <a:endParaRPr lang="en-US" sz="1100" dirty="0"/>
           </a:p>
@@ -23206,13 +23593,13 @@
       </p:sp>
       <p:sp>
         <p:nvSpPr>
-          <p:cNvPr id="27" name="Shape 25"/>
-          <p:cNvSpPr/>
-          <p:nvPr/>
-        </p:nvSpPr>
-        <p:spPr>
-          <a:xfrm>
-            <a:off x="1874520" y="3273552"/>
+          <p:cNvPr id="41" name="Shape 39"/>
+          <p:cNvSpPr/>
+          <p:nvPr/>
+        </p:nvSpPr>
+        <p:spPr>
+          <a:xfrm>
+            <a:off x="1874520" y="4096512"/>
             <a:ext cx="6903720" cy="658368"/>
           </a:xfrm>
           <a:prstGeom prst="rect">
@@ -23221,30 +23608,30 @@
             </a:avLst>
           </a:prstGeom>
           <a:solidFill>
-            <a:srgbClr val="CCFBF1"/>
-          </a:solidFill>
-          <a:ln w="12700">
-            <a:solidFill>
-              <a:srgbClr val="0D9488"/>
-            </a:solidFill>
-            <a:prstDash val="solid"/>
-          </a:ln>
-        </p:spPr>
-      </p:sp>
-      <p:sp>
-        <p:nvSpPr>
-          <p:cNvPr id="28" name="Shape 26"/>
-          <p:cNvSpPr/>
-          <p:nvPr/>
-        </p:nvSpPr>
-        <p:spPr>
-          <a:xfrm>
-            <a:off x="1978152" y="3364992"/>
-            <a:ext cx="1225296" cy="475488"/>
+            <a:srgbClr val="FCE7F3"/>
+          </a:solidFill>
+          <a:ln w="12700">
+            <a:solidFill>
+              <a:srgbClr val="DB2777"/>
+            </a:solidFill>
+            <a:prstDash val="solid"/>
+          </a:ln>
+        </p:spPr>
+      </p:sp>
+      <p:sp>
+        <p:nvSpPr>
+          <p:cNvPr id="42" name="Shape 40"/>
+          <p:cNvSpPr/>
+          <p:nvPr/>
+        </p:nvSpPr>
+        <p:spPr>
+          <a:xfrm>
+            <a:off x="1951828" y="4169664"/>
+            <a:ext cx="603504" cy="475488"/>
           </a:xfrm>
           <a:prstGeom prst="rect">
             <a:avLst>
-              <a:gd name="adj" fmla="val 9615"/>
+              <a:gd name="adj" fmla="val 7692"/>
             </a:avLst>
           </a:prstGeom>
           <a:solidFill>
@@ -23252,104 +23639,131 @@
           </a:solidFill>
           <a:ln w="12700">
             <a:solidFill>
-              <a:srgbClr val="0D9488"/>
-            </a:solidFill>
-            <a:prstDash val="solid"/>
-          </a:ln>
-        </p:spPr>
-      </p:sp>
-      <p:sp>
-        <p:nvSpPr>
-          <p:cNvPr id="29" name="Text 27"/>
-          <p:cNvSpPr/>
-          <p:nvPr/>
-        </p:nvSpPr>
-        <p:spPr>
-          <a:xfrm>
-            <a:off x="1978152" y="3364992"/>
-            <a:ext cx="1225296" cy="475488"/>
-          </a:xfrm>
-          <a:prstGeom prst="rect">
-            <a:avLst/>
-          </a:prstGeom>
-          <a:noFill/>
-          <a:ln/>
-        </p:spPr>
-        <p:txBody>
-          <a:bodyPr wrap="square" lIns="0" tIns="0" rIns="0" bIns="0" rtlCol="0" anchor="ctr"/>
-          <a:lstStyle/>
-          <a:p>
-            <a:pPr algn="ctr" indent="0" marL="0">
-              <a:buNone/>
-            </a:pPr>
-            <a:r>
-              <a:rPr lang="en-US" sz="1400" b="1" dirty="0">
-                <a:solidFill>
-                  <a:srgbClr val="0D9488"/>
+              <a:srgbClr val="DB2777"/>
+            </a:solidFill>
+            <a:prstDash val="solid"/>
+          </a:ln>
+        </p:spPr>
+      </p:sp>
+      <p:sp>
+        <p:nvSpPr>
+          <p:cNvPr id="43" name="Text 41"/>
+          <p:cNvSpPr/>
+          <p:nvPr/>
+        </p:nvSpPr>
+        <p:spPr>
+          <a:xfrm>
+            <a:off x="1951828" y="4169664"/>
+            <a:ext cx="603504" cy="475488"/>
+          </a:xfrm>
+          <a:prstGeom prst="rect">
+            <a:avLst/>
+          </a:prstGeom>
+          <a:noFill/>
+          <a:ln/>
+        </p:spPr>
+        <p:txBody>
+          <a:bodyPr wrap="square" lIns="0" tIns="0" rIns="0" bIns="0" rtlCol="0" anchor="ctr"/>
+          <a:lstStyle/>
+          <a:p>
+            <a:pPr algn="ctr" indent="0" marL="0">
+              <a:buNone/>
+            </a:pPr>
+            <a:r>
+              <a:rPr lang="en-US" sz="900" b="1" dirty="0">
+                <a:solidFill>
+                  <a:srgbClr val="9D174D"/>
                 </a:solidFill>
                 <a:latin typeface="Trebuchet MS" pitchFamily="34" charset="0"/>
                 <a:ea typeface="Trebuchet MS" pitchFamily="34" charset="-122"/>
                 <a:cs typeface="Trebuchet MS" pitchFamily="34" charset="-120"/>
               </a:rPr>
-              <a:t>mul</a:t>
-            </a:r>
-            <a:endParaRPr lang="en-US" sz="1400" dirty="0"/>
-          </a:p>
-        </p:txBody>
-      </p:sp>
-      <p:sp>
-        <p:nvSpPr>
-          <p:cNvPr id="30" name="Text 28"/>
-          <p:cNvSpPr/>
-          <p:nvPr/>
-        </p:nvSpPr>
-        <p:spPr>
-          <a:xfrm>
-            <a:off x="3203448" y="3364992"/>
-            <a:ext cx="76200" cy="475488"/>
-          </a:xfrm>
-          <a:prstGeom prst="rect">
-            <a:avLst/>
-          </a:prstGeom>
-          <a:noFill/>
-          <a:ln/>
-        </p:spPr>
-        <p:txBody>
-          <a:bodyPr wrap="square" lIns="0" tIns="0" rIns="0" bIns="0" rtlCol="0" anchor="ctr"/>
-          <a:lstStyle/>
-          <a:p>
-            <a:pPr algn="ctr" indent="0" marL="0">
-              <a:buNone/>
-            </a:pPr>
-            <a:r>
-              <a:rPr lang="en-US" sz="1600" b="1" dirty="0">
-                <a:solidFill>
-                  <a:srgbClr val="0D9488"/>
+              <a:t>m</a:t>
+            </a:r>
+            <a:endParaRPr lang="en-US" sz="900" dirty="0"/>
+          </a:p>
+        </p:txBody>
+      </p:sp>
+      <p:sp>
+        <p:nvSpPr>
+          <p:cNvPr id="44" name="Shape 42"/>
+          <p:cNvSpPr/>
+          <p:nvPr/>
+        </p:nvSpPr>
+        <p:spPr>
+          <a:xfrm>
+            <a:off x="2605209" y="4169664"/>
+            <a:ext cx="603504" cy="475488"/>
+          </a:xfrm>
+          <a:prstGeom prst="rect">
+            <a:avLst>
+              <a:gd name="adj" fmla="val 7692"/>
+            </a:avLst>
+          </a:prstGeom>
+          <a:solidFill>
+            <a:srgbClr val="FFFFFF"/>
+          </a:solidFill>
+          <a:ln w="12700">
+            <a:solidFill>
+              <a:srgbClr val="DB2777"/>
+            </a:solidFill>
+            <a:prstDash val="solid"/>
+          </a:ln>
+        </p:spPr>
+      </p:sp>
+      <p:sp>
+        <p:nvSpPr>
+          <p:cNvPr id="45" name="Text 43"/>
+          <p:cNvSpPr/>
+          <p:nvPr/>
+        </p:nvSpPr>
+        <p:spPr>
+          <a:xfrm>
+            <a:off x="2605209" y="4169664"/>
+            <a:ext cx="603504" cy="475488"/>
+          </a:xfrm>
+          <a:prstGeom prst="rect">
+            <a:avLst/>
+          </a:prstGeom>
+          <a:noFill/>
+          <a:ln/>
+        </p:spPr>
+        <p:txBody>
+          <a:bodyPr wrap="square" lIns="0" tIns="0" rIns="0" bIns="0" rtlCol="0" anchor="ctr"/>
+          <a:lstStyle/>
+          <a:p>
+            <a:pPr algn="ctr" indent="0" marL="0">
+              <a:buNone/>
+            </a:pPr>
+            <a:r>
+              <a:rPr lang="en-US" sz="900" b="1" dirty="0">
+                <a:solidFill>
+                  <a:srgbClr val="9D174D"/>
                 </a:solidFill>
                 <a:latin typeface="Trebuchet MS" pitchFamily="34" charset="0"/>
                 <a:ea typeface="Trebuchet MS" pitchFamily="34" charset="-122"/>
                 <a:cs typeface="Trebuchet MS" pitchFamily="34" charset="-120"/>
               </a:rPr>
-              <a:t>·</a:t>
-            </a:r>
-            <a:endParaRPr lang="en-US" sz="1600" dirty="0"/>
-          </a:p>
-        </p:txBody>
-      </p:sp>
-      <p:sp>
-        <p:nvSpPr>
-          <p:cNvPr id="31" name="Shape 29"/>
-          <p:cNvSpPr/>
-          <p:nvPr/>
-        </p:nvSpPr>
-        <p:spPr>
-          <a:xfrm>
-            <a:off x="3279648" y="3364992"/>
-            <a:ext cx="1225296" cy="475488"/>
+              <a:t>u</a:t>
+            </a:r>
+            <a:endParaRPr lang="en-US" sz="900" dirty="0"/>
+          </a:p>
+        </p:txBody>
+      </p:sp>
+      <p:sp>
+        <p:nvSpPr>
+          <p:cNvPr id="46" name="Shape 44"/>
+          <p:cNvSpPr/>
+          <p:nvPr/>
+        </p:nvSpPr>
+        <p:spPr>
+          <a:xfrm>
+            <a:off x="3258589" y="4169664"/>
+            <a:ext cx="603504" cy="475488"/>
           </a:xfrm>
           <a:prstGeom prst="rect">
             <a:avLst>
-              <a:gd name="adj" fmla="val 9615"/>
+              <a:gd name="adj" fmla="val 7692"/>
             </a:avLst>
           </a:prstGeom>
           <a:solidFill>
@@ -23357,104 +23771,131 @@
           </a:solidFill>
           <a:ln w="12700">
             <a:solidFill>
-              <a:srgbClr val="0D9488"/>
-            </a:solidFill>
-            <a:prstDash val="solid"/>
-          </a:ln>
-        </p:spPr>
-      </p:sp>
-      <p:sp>
-        <p:nvSpPr>
-          <p:cNvPr id="32" name="Text 30"/>
-          <p:cNvSpPr/>
-          <p:nvPr/>
-        </p:nvSpPr>
-        <p:spPr>
-          <a:xfrm>
-            <a:off x="3279648" y="3364992"/>
-            <a:ext cx="1225296" cy="475488"/>
-          </a:xfrm>
-          <a:prstGeom prst="rect">
-            <a:avLst/>
-          </a:prstGeom>
-          <a:noFill/>
-          <a:ln/>
-        </p:spPr>
-        <p:txBody>
-          <a:bodyPr wrap="square" lIns="0" tIns="0" rIns="0" bIns="0" rtlCol="0" anchor="ctr"/>
-          <a:lstStyle/>
-          <a:p>
-            <a:pPr algn="ctr" indent="0" marL="0">
-              <a:buNone/>
-            </a:pPr>
-            <a:r>
-              <a:rPr lang="en-US" sz="1400" b="1" dirty="0">
-                <a:solidFill>
-                  <a:srgbClr val="0D9488"/>
+              <a:srgbClr val="DB2777"/>
+            </a:solidFill>
+            <a:prstDash val="solid"/>
+          </a:ln>
+        </p:spPr>
+      </p:sp>
+      <p:sp>
+        <p:nvSpPr>
+          <p:cNvPr id="47" name="Text 45"/>
+          <p:cNvSpPr/>
+          <p:nvPr/>
+        </p:nvSpPr>
+        <p:spPr>
+          <a:xfrm>
+            <a:off x="3258589" y="4169664"/>
+            <a:ext cx="603504" cy="475488"/>
+          </a:xfrm>
+          <a:prstGeom prst="rect">
+            <a:avLst/>
+          </a:prstGeom>
+          <a:noFill/>
+          <a:ln/>
+        </p:spPr>
+        <p:txBody>
+          <a:bodyPr wrap="square" lIns="0" tIns="0" rIns="0" bIns="0" rtlCol="0" anchor="ctr"/>
+          <a:lstStyle/>
+          <a:p>
+            <a:pPr algn="ctr" indent="0" marL="0">
+              <a:buNone/>
+            </a:pPr>
+            <a:r>
+              <a:rPr lang="en-US" sz="900" b="1" dirty="0">
+                <a:solidFill>
+                  <a:srgbClr val="9D174D"/>
                 </a:solidFill>
                 <a:latin typeface="Trebuchet MS" pitchFamily="34" charset="0"/>
                 <a:ea typeface="Trebuchet MS" pitchFamily="34" charset="-122"/>
                 <a:cs typeface="Trebuchet MS" pitchFamily="34" charset="-120"/>
               </a:rPr>
-              <a:t>ti</a:t>
-            </a:r>
-            <a:endParaRPr lang="en-US" sz="1400" dirty="0"/>
-          </a:p>
-        </p:txBody>
-      </p:sp>
-      <p:sp>
-        <p:nvSpPr>
-          <p:cNvPr id="33" name="Text 31"/>
-          <p:cNvSpPr/>
-          <p:nvPr/>
-        </p:nvSpPr>
-        <p:spPr>
-          <a:xfrm>
-            <a:off x="4504944" y="3364992"/>
-            <a:ext cx="76200" cy="475488"/>
-          </a:xfrm>
-          <a:prstGeom prst="rect">
-            <a:avLst/>
-          </a:prstGeom>
-          <a:noFill/>
-          <a:ln/>
-        </p:spPr>
-        <p:txBody>
-          <a:bodyPr wrap="square" lIns="0" tIns="0" rIns="0" bIns="0" rtlCol="0" anchor="ctr"/>
-          <a:lstStyle/>
-          <a:p>
-            <a:pPr algn="ctr" indent="0" marL="0">
-              <a:buNone/>
-            </a:pPr>
-            <a:r>
-              <a:rPr lang="en-US" sz="1600" b="1" dirty="0">
-                <a:solidFill>
-                  <a:srgbClr val="0D9488"/>
+              <a:t>l</a:t>
+            </a:r>
+            <a:endParaRPr lang="en-US" sz="900" dirty="0"/>
+          </a:p>
+        </p:txBody>
+      </p:sp>
+      <p:sp>
+        <p:nvSpPr>
+          <p:cNvPr id="48" name="Shape 46"/>
+          <p:cNvSpPr/>
+          <p:nvPr/>
+        </p:nvSpPr>
+        <p:spPr>
+          <a:xfrm>
+            <a:off x="3911969" y="4169664"/>
+            <a:ext cx="603504" cy="475488"/>
+          </a:xfrm>
+          <a:prstGeom prst="rect">
+            <a:avLst>
+              <a:gd name="adj" fmla="val 7692"/>
+            </a:avLst>
+          </a:prstGeom>
+          <a:solidFill>
+            <a:srgbClr val="FFFFFF"/>
+          </a:solidFill>
+          <a:ln w="12700">
+            <a:solidFill>
+              <a:srgbClr val="DB2777"/>
+            </a:solidFill>
+            <a:prstDash val="solid"/>
+          </a:ln>
+        </p:spPr>
+      </p:sp>
+      <p:sp>
+        <p:nvSpPr>
+          <p:cNvPr id="49" name="Text 47"/>
+          <p:cNvSpPr/>
+          <p:nvPr/>
+        </p:nvSpPr>
+        <p:spPr>
+          <a:xfrm>
+            <a:off x="3911969" y="4169664"/>
+            <a:ext cx="603504" cy="475488"/>
+          </a:xfrm>
+          <a:prstGeom prst="rect">
+            <a:avLst/>
+          </a:prstGeom>
+          <a:noFill/>
+          <a:ln/>
+        </p:spPr>
+        <p:txBody>
+          <a:bodyPr wrap="square" lIns="0" tIns="0" rIns="0" bIns="0" rtlCol="0" anchor="ctr"/>
+          <a:lstStyle/>
+          <a:p>
+            <a:pPr algn="ctr" indent="0" marL="0">
+              <a:buNone/>
+            </a:pPr>
+            <a:r>
+              <a:rPr lang="en-US" sz="900" b="1" dirty="0">
+                <a:solidFill>
+                  <a:srgbClr val="9D174D"/>
                 </a:solidFill>
                 <a:latin typeface="Trebuchet MS" pitchFamily="34" charset="0"/>
                 <a:ea typeface="Trebuchet MS" pitchFamily="34" charset="-122"/>
                 <a:cs typeface="Trebuchet MS" pitchFamily="34" charset="-120"/>
               </a:rPr>
-              <a:t>·</a:t>
-            </a:r>
-            <a:endParaRPr lang="en-US" sz="1600" dirty="0"/>
-          </a:p>
-        </p:txBody>
-      </p:sp>
-      <p:sp>
-        <p:nvSpPr>
-          <p:cNvPr id="34" name="Shape 32"/>
-          <p:cNvSpPr/>
-          <p:nvPr/>
-        </p:nvSpPr>
-        <p:spPr>
-          <a:xfrm>
-            <a:off x="4581144" y="3364992"/>
-            <a:ext cx="1225296" cy="475488"/>
+              <a:t>t</a:t>
+            </a:r>
+            <a:endParaRPr lang="en-US" sz="900" dirty="0"/>
+          </a:p>
+        </p:txBody>
+      </p:sp>
+      <p:sp>
+        <p:nvSpPr>
+          <p:cNvPr id="50" name="Shape 48"/>
+          <p:cNvSpPr/>
+          <p:nvPr/>
+        </p:nvSpPr>
+        <p:spPr>
+          <a:xfrm>
+            <a:off x="4565350" y="4169664"/>
+            <a:ext cx="603504" cy="475488"/>
           </a:xfrm>
           <a:prstGeom prst="rect">
             <a:avLst>
-              <a:gd name="adj" fmla="val 9615"/>
+              <a:gd name="adj" fmla="val 7692"/>
             </a:avLst>
           </a:prstGeom>
           <a:solidFill>
@@ -23462,104 +23903,131 @@
           </a:solidFill>
           <a:ln w="12700">
             <a:solidFill>
-              <a:srgbClr val="0D9488"/>
-            </a:solidFill>
-            <a:prstDash val="solid"/>
-          </a:ln>
-        </p:spPr>
-      </p:sp>
-      <p:sp>
-        <p:nvSpPr>
-          <p:cNvPr id="35" name="Text 33"/>
-          <p:cNvSpPr/>
-          <p:nvPr/>
-        </p:nvSpPr>
-        <p:spPr>
-          <a:xfrm>
-            <a:off x="4581144" y="3364992"/>
-            <a:ext cx="1225296" cy="475488"/>
-          </a:xfrm>
-          <a:prstGeom prst="rect">
-            <a:avLst/>
-          </a:prstGeom>
-          <a:noFill/>
-          <a:ln/>
-        </p:spPr>
-        <p:txBody>
-          <a:bodyPr wrap="square" lIns="0" tIns="0" rIns="0" bIns="0" rtlCol="0" anchor="ctr"/>
-          <a:lstStyle/>
-          <a:p>
-            <a:pPr algn="ctr" indent="0" marL="0">
-              <a:buNone/>
-            </a:pPr>
-            <a:r>
-              <a:rPr lang="en-US" sz="1400" b="1" dirty="0">
-                <a:solidFill>
-                  <a:srgbClr val="0D9488"/>
+              <a:srgbClr val="DB2777"/>
+            </a:solidFill>
+            <a:prstDash val="solid"/>
+          </a:ln>
+        </p:spPr>
+      </p:sp>
+      <p:sp>
+        <p:nvSpPr>
+          <p:cNvPr id="51" name="Text 49"/>
+          <p:cNvSpPr/>
+          <p:nvPr/>
+        </p:nvSpPr>
+        <p:spPr>
+          <a:xfrm>
+            <a:off x="4565350" y="4169664"/>
+            <a:ext cx="603504" cy="475488"/>
+          </a:xfrm>
+          <a:prstGeom prst="rect">
+            <a:avLst/>
+          </a:prstGeom>
+          <a:noFill/>
+          <a:ln/>
+        </p:spPr>
+        <p:txBody>
+          <a:bodyPr wrap="square" lIns="0" tIns="0" rIns="0" bIns="0" rtlCol="0" anchor="ctr"/>
+          <a:lstStyle/>
+          <a:p>
+            <a:pPr algn="ctr" indent="0" marL="0">
+              <a:buNone/>
+            </a:pPr>
+            <a:r>
+              <a:rPr lang="en-US" sz="900" b="1" dirty="0">
+                <a:solidFill>
+                  <a:srgbClr val="9D174D"/>
                 </a:solidFill>
                 <a:latin typeface="Trebuchet MS" pitchFamily="34" charset="0"/>
                 <a:ea typeface="Trebuchet MS" pitchFamily="34" charset="-122"/>
                 <a:cs typeface="Trebuchet MS" pitchFamily="34" charset="-120"/>
               </a:rPr>
-              <a:t>cul</a:t>
-            </a:r>
-            <a:endParaRPr lang="en-US" sz="1400" dirty="0"/>
-          </a:p>
-        </p:txBody>
-      </p:sp>
-      <p:sp>
-        <p:nvSpPr>
-          <p:cNvPr id="36" name="Text 34"/>
-          <p:cNvSpPr/>
-          <p:nvPr/>
-        </p:nvSpPr>
-        <p:spPr>
-          <a:xfrm>
-            <a:off x="5806440" y="3364992"/>
-            <a:ext cx="76200" cy="475488"/>
-          </a:xfrm>
-          <a:prstGeom prst="rect">
-            <a:avLst/>
-          </a:prstGeom>
-          <a:noFill/>
-          <a:ln/>
-        </p:spPr>
-        <p:txBody>
-          <a:bodyPr wrap="square" lIns="0" tIns="0" rIns="0" bIns="0" rtlCol="0" anchor="ctr"/>
-          <a:lstStyle/>
-          <a:p>
-            <a:pPr algn="ctr" indent="0" marL="0">
-              <a:buNone/>
-            </a:pPr>
-            <a:r>
-              <a:rPr lang="en-US" sz="1600" b="1" dirty="0">
-                <a:solidFill>
-                  <a:srgbClr val="0D9488"/>
+              <a:t>i</a:t>
+            </a:r>
+            <a:endParaRPr lang="en-US" sz="900" dirty="0"/>
+          </a:p>
+        </p:txBody>
+      </p:sp>
+      <p:sp>
+        <p:nvSpPr>
+          <p:cNvPr id="52" name="Shape 50"/>
+          <p:cNvSpPr/>
+          <p:nvPr/>
+        </p:nvSpPr>
+        <p:spPr>
+          <a:xfrm>
+            <a:off x="5218730" y="4169664"/>
+            <a:ext cx="603504" cy="475488"/>
+          </a:xfrm>
+          <a:prstGeom prst="rect">
+            <a:avLst>
+              <a:gd name="adj" fmla="val 7692"/>
+            </a:avLst>
+          </a:prstGeom>
+          <a:solidFill>
+            <a:srgbClr val="FFFFFF"/>
+          </a:solidFill>
+          <a:ln w="12700">
+            <a:solidFill>
+              <a:srgbClr val="DB2777"/>
+            </a:solidFill>
+            <a:prstDash val="solid"/>
+          </a:ln>
+        </p:spPr>
+      </p:sp>
+      <p:sp>
+        <p:nvSpPr>
+          <p:cNvPr id="53" name="Text 51"/>
+          <p:cNvSpPr/>
+          <p:nvPr/>
+        </p:nvSpPr>
+        <p:spPr>
+          <a:xfrm>
+            <a:off x="5218730" y="4169664"/>
+            <a:ext cx="603504" cy="475488"/>
+          </a:xfrm>
+          <a:prstGeom prst="rect">
+            <a:avLst/>
+          </a:prstGeom>
+          <a:noFill/>
+          <a:ln/>
+        </p:spPr>
+        <p:txBody>
+          <a:bodyPr wrap="square" lIns="0" tIns="0" rIns="0" bIns="0" rtlCol="0" anchor="ctr"/>
+          <a:lstStyle/>
+          <a:p>
+            <a:pPr algn="ctr" indent="0" marL="0">
+              <a:buNone/>
+            </a:pPr>
+            <a:r>
+              <a:rPr lang="en-US" sz="900" b="1" dirty="0">
+                <a:solidFill>
+                  <a:srgbClr val="9D174D"/>
                 </a:solidFill>
                 <a:latin typeface="Trebuchet MS" pitchFamily="34" charset="0"/>
                 <a:ea typeface="Trebuchet MS" pitchFamily="34" charset="-122"/>
                 <a:cs typeface="Trebuchet MS" pitchFamily="34" charset="-120"/>
               </a:rPr>
-              <a:t>·</a:t>
-            </a:r>
-            <a:endParaRPr lang="en-US" sz="1600" dirty="0"/>
-          </a:p>
-        </p:txBody>
-      </p:sp>
-      <p:sp>
-        <p:nvSpPr>
-          <p:cNvPr id="37" name="Shape 35"/>
-          <p:cNvSpPr/>
-          <p:nvPr/>
-        </p:nvSpPr>
-        <p:spPr>
-          <a:xfrm>
-            <a:off x="5882640" y="3364992"/>
-            <a:ext cx="1225296" cy="475488"/>
+              <a:t>m</a:t>
+            </a:r>
+            <a:endParaRPr lang="en-US" sz="900" dirty="0"/>
+          </a:p>
+        </p:txBody>
+      </p:sp>
+      <p:sp>
+        <p:nvSpPr>
+          <p:cNvPr id="54" name="Shape 52"/>
+          <p:cNvSpPr/>
+          <p:nvPr/>
+        </p:nvSpPr>
+        <p:spPr>
+          <a:xfrm>
+            <a:off x="5872111" y="4169664"/>
+            <a:ext cx="603504" cy="475488"/>
           </a:xfrm>
           <a:prstGeom prst="rect">
             <a:avLst>
-              <a:gd name="adj" fmla="val 9615"/>
+              <a:gd name="adj" fmla="val 7692"/>
             </a:avLst>
           </a:prstGeom>
           <a:solidFill>
@@ -23567,104 +24035,131 @@
           </a:solidFill>
           <a:ln w="12700">
             <a:solidFill>
-              <a:srgbClr val="0D9488"/>
-            </a:solidFill>
-            <a:prstDash val="solid"/>
-          </a:ln>
-        </p:spPr>
-      </p:sp>
-      <p:sp>
-        <p:nvSpPr>
-          <p:cNvPr id="38" name="Text 36"/>
-          <p:cNvSpPr/>
-          <p:nvPr/>
-        </p:nvSpPr>
-        <p:spPr>
-          <a:xfrm>
-            <a:off x="5882640" y="3364992"/>
-            <a:ext cx="1225296" cy="475488"/>
-          </a:xfrm>
-          <a:prstGeom prst="rect">
-            <a:avLst/>
-          </a:prstGeom>
-          <a:noFill/>
-          <a:ln/>
-        </p:spPr>
-        <p:txBody>
-          <a:bodyPr wrap="square" lIns="0" tIns="0" rIns="0" bIns="0" rtlCol="0" anchor="ctr"/>
-          <a:lstStyle/>
-          <a:p>
-            <a:pPr algn="ctr" indent="0" marL="0">
-              <a:buNone/>
-            </a:pPr>
-            <a:r>
-              <a:rPr lang="en-US" sz="1400" b="1" dirty="0">
-                <a:solidFill>
-                  <a:srgbClr val="0D9488"/>
+              <a:srgbClr val="DB2777"/>
+            </a:solidFill>
+            <a:prstDash val="solid"/>
+          </a:ln>
+        </p:spPr>
+      </p:sp>
+      <p:sp>
+        <p:nvSpPr>
+          <p:cNvPr id="55" name="Text 53"/>
+          <p:cNvSpPr/>
+          <p:nvPr/>
+        </p:nvSpPr>
+        <p:spPr>
+          <a:xfrm>
+            <a:off x="5872111" y="4169664"/>
+            <a:ext cx="603504" cy="475488"/>
+          </a:xfrm>
+          <a:prstGeom prst="rect">
+            <a:avLst/>
+          </a:prstGeom>
+          <a:noFill/>
+          <a:ln/>
+        </p:spPr>
+        <p:txBody>
+          <a:bodyPr wrap="square" lIns="0" tIns="0" rIns="0" bIns="0" rtlCol="0" anchor="ctr"/>
+          <a:lstStyle/>
+          <a:p>
+            <a:pPr algn="ctr" indent="0" marL="0">
+              <a:buNone/>
+            </a:pPr>
+            <a:r>
+              <a:rPr lang="en-US" sz="900" b="1" dirty="0">
+                <a:solidFill>
+                  <a:srgbClr val="9D174D"/>
                 </a:solidFill>
                 <a:latin typeface="Trebuchet MS" pitchFamily="34" charset="0"/>
                 <a:ea typeface="Trebuchet MS" pitchFamily="34" charset="-122"/>
                 <a:cs typeface="Trebuchet MS" pitchFamily="34" charset="-120"/>
               </a:rPr>
-              <a:t>tur</a:t>
-            </a:r>
-            <a:endParaRPr lang="en-US" sz="1400" dirty="0"/>
-          </a:p>
-        </p:txBody>
-      </p:sp>
-      <p:sp>
-        <p:nvSpPr>
-          <p:cNvPr id="39" name="Text 37"/>
-          <p:cNvSpPr/>
-          <p:nvPr/>
-        </p:nvSpPr>
-        <p:spPr>
-          <a:xfrm>
-            <a:off x="7107936" y="3364992"/>
-            <a:ext cx="76200" cy="475488"/>
-          </a:xfrm>
-          <a:prstGeom prst="rect">
-            <a:avLst/>
-          </a:prstGeom>
-          <a:noFill/>
-          <a:ln/>
-        </p:spPr>
-        <p:txBody>
-          <a:bodyPr wrap="square" lIns="0" tIns="0" rIns="0" bIns="0" rtlCol="0" anchor="ctr"/>
-          <a:lstStyle/>
-          <a:p>
-            <a:pPr algn="ctr" indent="0" marL="0">
-              <a:buNone/>
-            </a:pPr>
-            <a:r>
-              <a:rPr lang="en-US" sz="1600" b="1" dirty="0">
-                <a:solidFill>
-                  <a:srgbClr val="0D9488"/>
+              <a:t>e</a:t>
+            </a:r>
+            <a:endParaRPr lang="en-US" sz="900" dirty="0"/>
+          </a:p>
+        </p:txBody>
+      </p:sp>
+      <p:sp>
+        <p:nvSpPr>
+          <p:cNvPr id="56" name="Shape 54"/>
+          <p:cNvSpPr/>
+          <p:nvPr/>
+        </p:nvSpPr>
+        <p:spPr>
+          <a:xfrm>
+            <a:off x="6525491" y="4169664"/>
+            <a:ext cx="603504" cy="475488"/>
+          </a:xfrm>
+          <a:prstGeom prst="rect">
+            <a:avLst>
+              <a:gd name="adj" fmla="val 7692"/>
+            </a:avLst>
+          </a:prstGeom>
+          <a:solidFill>
+            <a:srgbClr val="FFFFFF"/>
+          </a:solidFill>
+          <a:ln w="12700">
+            <a:solidFill>
+              <a:srgbClr val="DB2777"/>
+            </a:solidFill>
+            <a:prstDash val="solid"/>
+          </a:ln>
+        </p:spPr>
+      </p:sp>
+      <p:sp>
+        <p:nvSpPr>
+          <p:cNvPr id="57" name="Text 55"/>
+          <p:cNvSpPr/>
+          <p:nvPr/>
+        </p:nvSpPr>
+        <p:spPr>
+          <a:xfrm>
+            <a:off x="6525491" y="4169664"/>
+            <a:ext cx="603504" cy="475488"/>
+          </a:xfrm>
+          <a:prstGeom prst="rect">
+            <a:avLst/>
+          </a:prstGeom>
+          <a:noFill/>
+          <a:ln/>
+        </p:spPr>
+        <p:txBody>
+          <a:bodyPr wrap="square" lIns="0" tIns="0" rIns="0" bIns="0" rtlCol="0" anchor="ctr"/>
+          <a:lstStyle/>
+          <a:p>
+            <a:pPr algn="ctr" indent="0" marL="0">
+              <a:buNone/>
+            </a:pPr>
+            <a:r>
+              <a:rPr lang="en-US" sz="900" b="1" dirty="0">
+                <a:solidFill>
+                  <a:srgbClr val="9D174D"/>
                 </a:solidFill>
                 <a:latin typeface="Trebuchet MS" pitchFamily="34" charset="0"/>
                 <a:ea typeface="Trebuchet MS" pitchFamily="34" charset="-122"/>
                 <a:cs typeface="Trebuchet MS" pitchFamily="34" charset="-120"/>
               </a:rPr>
-              <a:t>·</a:t>
-            </a:r>
-            <a:endParaRPr lang="en-US" sz="1600" dirty="0"/>
-          </a:p>
-        </p:txBody>
-      </p:sp>
-      <p:sp>
-        <p:nvSpPr>
-          <p:cNvPr id="40" name="Shape 38"/>
-          <p:cNvSpPr/>
-          <p:nvPr/>
-        </p:nvSpPr>
-        <p:spPr>
-          <a:xfrm>
-            <a:off x="7184136" y="3364992"/>
-            <a:ext cx="1225296" cy="475488"/>
+              <a:t>d</a:t>
+            </a:r>
+            <a:endParaRPr lang="en-US" sz="900" dirty="0"/>
+          </a:p>
+        </p:txBody>
+      </p:sp>
+      <p:sp>
+        <p:nvSpPr>
+          <p:cNvPr id="58" name="Shape 56"/>
+          <p:cNvSpPr/>
+          <p:nvPr/>
+        </p:nvSpPr>
+        <p:spPr>
+          <a:xfrm>
+            <a:off x="7178871" y="4169664"/>
+            <a:ext cx="603504" cy="475488"/>
           </a:xfrm>
           <a:prstGeom prst="rect">
             <a:avLst>
-              <a:gd name="adj" fmla="val 9615"/>
+              <a:gd name="adj" fmla="val 7692"/>
             </a:avLst>
           </a:prstGeom>
           <a:solidFill>
@@ -23672,865 +24167,112 @@
           </a:solidFill>
           <a:ln w="12700">
             <a:solidFill>
-              <a:srgbClr val="0D9488"/>
-            </a:solidFill>
-            <a:prstDash val="solid"/>
-          </a:ln>
-        </p:spPr>
-      </p:sp>
-      <p:sp>
-        <p:nvSpPr>
-          <p:cNvPr id="41" name="Text 39"/>
-          <p:cNvSpPr/>
-          <p:nvPr/>
-        </p:nvSpPr>
-        <p:spPr>
-          <a:xfrm>
-            <a:off x="7184136" y="3364992"/>
-            <a:ext cx="1225296" cy="475488"/>
-          </a:xfrm>
-          <a:prstGeom prst="rect">
-            <a:avLst/>
-          </a:prstGeom>
-          <a:noFill/>
-          <a:ln/>
-        </p:spPr>
-        <p:txBody>
-          <a:bodyPr wrap="square" lIns="0" tIns="0" rIns="0" bIns="0" rtlCol="0" anchor="ctr"/>
-          <a:lstStyle/>
-          <a:p>
-            <a:pPr algn="ctr" indent="0" marL="0">
-              <a:buNone/>
-            </a:pPr>
-            <a:r>
-              <a:rPr lang="en-US" sz="1400" b="1" dirty="0">
-                <a:solidFill>
-                  <a:srgbClr val="0D9488"/>
+              <a:srgbClr val="DB2777"/>
+            </a:solidFill>
+            <a:prstDash val="solid"/>
+          </a:ln>
+        </p:spPr>
+      </p:sp>
+      <p:sp>
+        <p:nvSpPr>
+          <p:cNvPr id="59" name="Text 57"/>
+          <p:cNvSpPr/>
+          <p:nvPr/>
+        </p:nvSpPr>
+        <p:spPr>
+          <a:xfrm>
+            <a:off x="7178871" y="4169664"/>
+            <a:ext cx="603504" cy="475488"/>
+          </a:xfrm>
+          <a:prstGeom prst="rect">
+            <a:avLst/>
+          </a:prstGeom>
+          <a:noFill/>
+          <a:ln/>
+        </p:spPr>
+        <p:txBody>
+          <a:bodyPr wrap="square" lIns="0" tIns="0" rIns="0" bIns="0" rtlCol="0" anchor="ctr"/>
+          <a:lstStyle/>
+          <a:p>
+            <a:pPr algn="ctr" indent="0" marL="0">
+              <a:buNone/>
+            </a:pPr>
+            <a:r>
+              <a:rPr lang="en-US" sz="900" b="1" dirty="0">
+                <a:solidFill>
+                  <a:srgbClr val="9D174D"/>
                 </a:solidFill>
                 <a:latin typeface="Trebuchet MS" pitchFamily="34" charset="0"/>
                 <a:ea typeface="Trebuchet MS" pitchFamily="34" charset="-122"/>
                 <a:cs typeface="Trebuchet MS" pitchFamily="34" charset="-120"/>
               </a:rPr>
-              <a:t>al</a:t>
-            </a:r>
-            <a:endParaRPr lang="en-US" sz="1400" dirty="0"/>
-          </a:p>
-        </p:txBody>
-      </p:sp>
-      <p:sp>
-        <p:nvSpPr>
-          <p:cNvPr id="42" name="Shape 40"/>
-          <p:cNvSpPr/>
-          <p:nvPr/>
-        </p:nvSpPr>
-        <p:spPr>
-          <a:xfrm>
-            <a:off x="365760" y="4096512"/>
-            <a:ext cx="1371600" cy="804672"/>
+              <a:t>i</a:t>
+            </a:r>
+            <a:endParaRPr lang="en-US" sz="900" dirty="0"/>
+          </a:p>
+        </p:txBody>
+      </p:sp>
+      <p:sp>
+        <p:nvSpPr>
+          <p:cNvPr id="60" name="Shape 58"/>
+          <p:cNvSpPr/>
+          <p:nvPr/>
+        </p:nvSpPr>
+        <p:spPr>
+          <a:xfrm>
+            <a:off x="7832252" y="4169664"/>
+            <a:ext cx="603504" cy="475488"/>
           </a:xfrm>
           <a:prstGeom prst="rect">
             <a:avLst>
-              <a:gd name="adj" fmla="val 6818"/>
+              <a:gd name="adj" fmla="val 7692"/>
             </a:avLst>
           </a:prstGeom>
           <a:solidFill>
-            <a:srgbClr val="E2E8F0"/>
-          </a:solidFill>
-          <a:ln w="12700">
-            <a:solidFill>
-              <a:srgbClr val="E2E8F0"/>
-            </a:solidFill>
-            <a:prstDash val="solid"/>
-          </a:ln>
-        </p:spPr>
-      </p:sp>
-      <p:sp>
-        <p:nvSpPr>
-          <p:cNvPr id="43" name="Text 41"/>
-          <p:cNvSpPr/>
-          <p:nvPr/>
-        </p:nvSpPr>
-        <p:spPr>
-          <a:xfrm>
-            <a:off x="365760" y="4096512"/>
-            <a:ext cx="1371600" cy="804672"/>
-          </a:xfrm>
-          <a:prstGeom prst="rect">
-            <a:avLst/>
-          </a:prstGeom>
-          <a:noFill/>
-          <a:ln/>
-        </p:spPr>
-        <p:txBody>
-          <a:bodyPr wrap="square" lIns="0" tIns="0" rIns="0" bIns="0" rtlCol="0" anchor="ctr"/>
-          <a:lstStyle/>
-          <a:p>
-            <a:pPr algn="ctr" indent="0" marL="0">
-              <a:buNone/>
-            </a:pPr>
-            <a:r>
-              <a:rPr lang="en-US" sz="1100" b="1" dirty="0">
-                <a:solidFill>
-                  <a:srgbClr val="475569"/>
+            <a:srgbClr val="FFFFFF"/>
+          </a:solidFill>
+          <a:ln w="12700">
+            <a:solidFill>
+              <a:srgbClr val="DB2777"/>
+            </a:solidFill>
+            <a:prstDash val="solid"/>
+          </a:ln>
+        </p:spPr>
+      </p:sp>
+      <p:sp>
+        <p:nvSpPr>
+          <p:cNvPr id="61" name="Text 59"/>
+          <p:cNvSpPr/>
+          <p:nvPr/>
+        </p:nvSpPr>
+        <p:spPr>
+          <a:xfrm>
+            <a:off x="7832252" y="4169664"/>
+            <a:ext cx="603504" cy="475488"/>
+          </a:xfrm>
+          <a:prstGeom prst="rect">
+            <a:avLst/>
+          </a:prstGeom>
+          <a:noFill/>
+          <a:ln/>
+        </p:spPr>
+        <p:txBody>
+          <a:bodyPr wrap="square" lIns="0" tIns="0" rIns="0" bIns="0" rtlCol="0" anchor="ctr"/>
+          <a:lstStyle/>
+          <a:p>
+            <a:pPr algn="ctr" indent="0" marL="0">
+              <a:buNone/>
+            </a:pPr>
+            <a:r>
+              <a:rPr lang="en-US" sz="900" b="1" dirty="0">
+                <a:solidFill>
+                  <a:srgbClr val="9D174D"/>
                 </a:solidFill>
                 <a:latin typeface="Trebuchet MS" pitchFamily="34" charset="0"/>
                 <a:ea typeface="Trebuchet MS" pitchFamily="34" charset="-122"/>
                 <a:cs typeface="Trebuchet MS" pitchFamily="34" charset="-120"/>
               </a:rPr>
-              <a:t>Phonemes</a:t>
-            </a:r>
-            <a:endParaRPr lang="en-US" sz="1100" dirty="0"/>
-          </a:p>
-        </p:txBody>
-      </p:sp>
-      <p:sp>
-        <p:nvSpPr>
-          <p:cNvPr id="44" name="Shape 42"/>
-          <p:cNvSpPr/>
-          <p:nvPr/>
-        </p:nvSpPr>
-        <p:spPr>
-          <a:xfrm>
-            <a:off x="1874520" y="4096512"/>
-            <a:ext cx="6903720" cy="658368"/>
-          </a:xfrm>
-          <a:prstGeom prst="rect">
-            <a:avLst>
-              <a:gd name="adj" fmla="val 8333"/>
-            </a:avLst>
-          </a:prstGeom>
-          <a:solidFill>
-            <a:srgbClr val="FCE7F3"/>
-          </a:solidFill>
-          <a:ln w="12700">
-            <a:solidFill>
-              <a:srgbClr val="DB2777"/>
-            </a:solidFill>
-            <a:prstDash val="solid"/>
-          </a:ln>
-        </p:spPr>
-      </p:sp>
-      <p:sp>
-        <p:nvSpPr>
-          <p:cNvPr id="45" name="Shape 43"/>
-          <p:cNvSpPr/>
-          <p:nvPr/>
-        </p:nvSpPr>
-        <p:spPr>
-          <a:xfrm>
-            <a:off x="1952244" y="4169664"/>
-            <a:ext cx="543652" cy="475488"/>
-          </a:xfrm>
-          <a:prstGeom prst="rect">
-            <a:avLst>
-              <a:gd name="adj" fmla="val 7692"/>
-            </a:avLst>
-          </a:prstGeom>
-          <a:solidFill>
-            <a:srgbClr val="FFFFFF"/>
-          </a:solidFill>
-          <a:ln w="12700">
-            <a:solidFill>
-              <a:srgbClr val="DB2777"/>
-            </a:solidFill>
-            <a:prstDash val="solid"/>
-          </a:ln>
-        </p:spPr>
-      </p:sp>
-      <p:sp>
-        <p:nvSpPr>
-          <p:cNvPr id="46" name="Text 44"/>
-          <p:cNvSpPr/>
-          <p:nvPr/>
-        </p:nvSpPr>
-        <p:spPr>
-          <a:xfrm>
-            <a:off x="1952244" y="4169664"/>
-            <a:ext cx="543652" cy="475488"/>
-          </a:xfrm>
-          <a:prstGeom prst="rect">
-            <a:avLst/>
-          </a:prstGeom>
-          <a:noFill/>
-          <a:ln/>
-        </p:spPr>
-        <p:txBody>
-          <a:bodyPr wrap="square" lIns="0" tIns="0" rIns="0" bIns="0" rtlCol="0" anchor="ctr"/>
-          <a:lstStyle/>
-          <a:p>
-            <a:pPr algn="ctr" indent="0" marL="0">
-              <a:buNone/>
-            </a:pPr>
-            <a:r>
-              <a:rPr lang="en-US" sz="900" b="1" dirty="0">
-                <a:solidFill>
-                  <a:srgbClr val="9D174D"/>
-                </a:solidFill>
-                <a:latin typeface="Trebuchet MS" pitchFamily="34" charset="0"/>
-                <a:ea typeface="Trebuchet MS" pitchFamily="34" charset="-122"/>
-                <a:cs typeface="Trebuchet MS" pitchFamily="34" charset="-120"/>
-              </a:rPr>
-              <a:t>m</a:t>
-            </a:r>
-            <a:endParaRPr lang="en-US" sz="900" dirty="0"/>
-          </a:p>
-        </p:txBody>
-      </p:sp>
-      <p:sp>
-        <p:nvSpPr>
-          <p:cNvPr id="47" name="Shape 45"/>
-          <p:cNvSpPr/>
-          <p:nvPr/>
-        </p:nvSpPr>
-        <p:spPr>
-          <a:xfrm>
-            <a:off x="2546188" y="4169664"/>
-            <a:ext cx="543652" cy="475488"/>
-          </a:xfrm>
-          <a:prstGeom prst="rect">
-            <a:avLst>
-              <a:gd name="adj" fmla="val 7692"/>
-            </a:avLst>
-          </a:prstGeom>
-          <a:solidFill>
-            <a:srgbClr val="FFFFFF"/>
-          </a:solidFill>
-          <a:ln w="12700">
-            <a:solidFill>
-              <a:srgbClr val="DB2777"/>
-            </a:solidFill>
-            <a:prstDash val="solid"/>
-          </a:ln>
-        </p:spPr>
-      </p:sp>
-      <p:sp>
-        <p:nvSpPr>
-          <p:cNvPr id="48" name="Text 46"/>
-          <p:cNvSpPr/>
-          <p:nvPr/>
-        </p:nvSpPr>
-        <p:spPr>
-          <a:xfrm>
-            <a:off x="2546188" y="4169664"/>
-            <a:ext cx="543652" cy="475488"/>
-          </a:xfrm>
-          <a:prstGeom prst="rect">
-            <a:avLst/>
-          </a:prstGeom>
-          <a:noFill/>
-          <a:ln/>
-        </p:spPr>
-        <p:txBody>
-          <a:bodyPr wrap="square" lIns="0" tIns="0" rIns="0" bIns="0" rtlCol="0" anchor="ctr"/>
-          <a:lstStyle/>
-          <a:p>
-            <a:pPr algn="ctr" indent="0" marL="0">
-              <a:buNone/>
-            </a:pPr>
-            <a:r>
-              <a:rPr lang="en-US" sz="900" b="1" dirty="0">
-                <a:solidFill>
-                  <a:srgbClr val="9D174D"/>
-                </a:solidFill>
-                <a:latin typeface="Trebuchet MS" pitchFamily="34" charset="0"/>
-                <a:ea typeface="Trebuchet MS" pitchFamily="34" charset="-122"/>
-                <a:cs typeface="Trebuchet MS" pitchFamily="34" charset="-120"/>
-              </a:rPr>
-              <a:t>u</a:t>
-            </a:r>
-            <a:endParaRPr lang="en-US" sz="900" dirty="0"/>
-          </a:p>
-        </p:txBody>
-      </p:sp>
-      <p:sp>
-        <p:nvSpPr>
-          <p:cNvPr id="49" name="Shape 47"/>
-          <p:cNvSpPr/>
-          <p:nvPr/>
-        </p:nvSpPr>
-        <p:spPr>
-          <a:xfrm>
-            <a:off x="3140133" y="4169664"/>
-            <a:ext cx="543652" cy="475488"/>
-          </a:xfrm>
-          <a:prstGeom prst="rect">
-            <a:avLst>
-              <a:gd name="adj" fmla="val 7692"/>
-            </a:avLst>
-          </a:prstGeom>
-          <a:solidFill>
-            <a:srgbClr val="FFFFFF"/>
-          </a:solidFill>
-          <a:ln w="12700">
-            <a:solidFill>
-              <a:srgbClr val="DB2777"/>
-            </a:solidFill>
-            <a:prstDash val="solid"/>
-          </a:ln>
-        </p:spPr>
-      </p:sp>
-      <p:sp>
-        <p:nvSpPr>
-          <p:cNvPr id="50" name="Text 48"/>
-          <p:cNvSpPr/>
-          <p:nvPr/>
-        </p:nvSpPr>
-        <p:spPr>
-          <a:xfrm>
-            <a:off x="3140133" y="4169664"/>
-            <a:ext cx="543652" cy="475488"/>
-          </a:xfrm>
-          <a:prstGeom prst="rect">
-            <a:avLst/>
-          </a:prstGeom>
-          <a:noFill/>
-          <a:ln/>
-        </p:spPr>
-        <p:txBody>
-          <a:bodyPr wrap="square" lIns="0" tIns="0" rIns="0" bIns="0" rtlCol="0" anchor="ctr"/>
-          <a:lstStyle/>
-          <a:p>
-            <a:pPr algn="ctr" indent="0" marL="0">
-              <a:buNone/>
-            </a:pPr>
-            <a:r>
-              <a:rPr lang="en-US" sz="900" b="1" dirty="0">
-                <a:solidFill>
-                  <a:srgbClr val="9D174D"/>
-                </a:solidFill>
-                <a:latin typeface="Trebuchet MS" pitchFamily="34" charset="0"/>
-                <a:ea typeface="Trebuchet MS" pitchFamily="34" charset="-122"/>
-                <a:cs typeface="Trebuchet MS" pitchFamily="34" charset="-120"/>
-              </a:rPr>
-              <a:t>l</a:t>
-            </a:r>
-            <a:endParaRPr lang="en-US" sz="900" dirty="0"/>
-          </a:p>
-        </p:txBody>
-      </p:sp>
-      <p:sp>
-        <p:nvSpPr>
-          <p:cNvPr id="51" name="Shape 49"/>
-          <p:cNvSpPr/>
-          <p:nvPr/>
-        </p:nvSpPr>
-        <p:spPr>
-          <a:xfrm>
-            <a:off x="3734077" y="4169664"/>
-            <a:ext cx="543652" cy="475488"/>
-          </a:xfrm>
-          <a:prstGeom prst="rect">
-            <a:avLst>
-              <a:gd name="adj" fmla="val 7692"/>
-            </a:avLst>
-          </a:prstGeom>
-          <a:solidFill>
-            <a:srgbClr val="FFFFFF"/>
-          </a:solidFill>
-          <a:ln w="12700">
-            <a:solidFill>
-              <a:srgbClr val="DB2777"/>
-            </a:solidFill>
-            <a:prstDash val="solid"/>
-          </a:ln>
-        </p:spPr>
-      </p:sp>
-      <p:sp>
-        <p:nvSpPr>
-          <p:cNvPr id="52" name="Text 50"/>
-          <p:cNvSpPr/>
-          <p:nvPr/>
-        </p:nvSpPr>
-        <p:spPr>
-          <a:xfrm>
-            <a:off x="3734077" y="4169664"/>
-            <a:ext cx="543652" cy="475488"/>
-          </a:xfrm>
-          <a:prstGeom prst="rect">
-            <a:avLst/>
-          </a:prstGeom>
-          <a:noFill/>
-          <a:ln/>
-        </p:spPr>
-        <p:txBody>
-          <a:bodyPr wrap="square" lIns="0" tIns="0" rIns="0" bIns="0" rtlCol="0" anchor="ctr"/>
-          <a:lstStyle/>
-          <a:p>
-            <a:pPr algn="ctr" indent="0" marL="0">
-              <a:buNone/>
-            </a:pPr>
-            <a:r>
-              <a:rPr lang="en-US" sz="900" b="1" dirty="0">
-                <a:solidFill>
-                  <a:srgbClr val="9D174D"/>
-                </a:solidFill>
-                <a:latin typeface="Trebuchet MS" pitchFamily="34" charset="0"/>
-                <a:ea typeface="Trebuchet MS" pitchFamily="34" charset="-122"/>
-                <a:cs typeface="Trebuchet MS" pitchFamily="34" charset="-120"/>
-              </a:rPr>
-              <a:t>t</a:t>
-            </a:r>
-            <a:endParaRPr lang="en-US" sz="900" dirty="0"/>
-          </a:p>
-        </p:txBody>
-      </p:sp>
-      <p:sp>
-        <p:nvSpPr>
-          <p:cNvPr id="53" name="Shape 51"/>
-          <p:cNvSpPr/>
-          <p:nvPr/>
-        </p:nvSpPr>
-        <p:spPr>
-          <a:xfrm>
-            <a:off x="4328021" y="4169664"/>
-            <a:ext cx="543652" cy="475488"/>
-          </a:xfrm>
-          <a:prstGeom prst="rect">
-            <a:avLst>
-              <a:gd name="adj" fmla="val 7692"/>
-            </a:avLst>
-          </a:prstGeom>
-          <a:solidFill>
-            <a:srgbClr val="FFFFFF"/>
-          </a:solidFill>
-          <a:ln w="12700">
-            <a:solidFill>
-              <a:srgbClr val="DB2777"/>
-            </a:solidFill>
-            <a:prstDash val="solid"/>
-          </a:ln>
-        </p:spPr>
-      </p:sp>
-      <p:sp>
-        <p:nvSpPr>
-          <p:cNvPr id="54" name="Text 52"/>
-          <p:cNvSpPr/>
-          <p:nvPr/>
-        </p:nvSpPr>
-        <p:spPr>
-          <a:xfrm>
-            <a:off x="4328021" y="4169664"/>
-            <a:ext cx="543652" cy="475488"/>
-          </a:xfrm>
-          <a:prstGeom prst="rect">
-            <a:avLst/>
-          </a:prstGeom>
-          <a:noFill/>
-          <a:ln/>
-        </p:spPr>
-        <p:txBody>
-          <a:bodyPr wrap="square" lIns="0" tIns="0" rIns="0" bIns="0" rtlCol="0" anchor="ctr"/>
-          <a:lstStyle/>
-          <a:p>
-            <a:pPr algn="ctr" indent="0" marL="0">
-              <a:buNone/>
-            </a:pPr>
-            <a:r>
-              <a:rPr lang="en-US" sz="900" b="1" dirty="0">
-                <a:solidFill>
-                  <a:srgbClr val="9D174D"/>
-                </a:solidFill>
-                <a:latin typeface="Trebuchet MS" pitchFamily="34" charset="0"/>
-                <a:ea typeface="Trebuchet MS" pitchFamily="34" charset="-122"/>
-                <a:cs typeface="Trebuchet MS" pitchFamily="34" charset="-120"/>
-              </a:rPr>
-              <a:t>i</a:t>
-            </a:r>
-            <a:endParaRPr lang="en-US" sz="900" dirty="0"/>
-          </a:p>
-        </p:txBody>
-      </p:sp>
-      <p:sp>
-        <p:nvSpPr>
-          <p:cNvPr id="55" name="Shape 53"/>
-          <p:cNvSpPr/>
-          <p:nvPr/>
-        </p:nvSpPr>
-        <p:spPr>
-          <a:xfrm>
-            <a:off x="4921966" y="4169664"/>
-            <a:ext cx="543652" cy="475488"/>
-          </a:xfrm>
-          <a:prstGeom prst="rect">
-            <a:avLst>
-              <a:gd name="adj" fmla="val 7692"/>
-            </a:avLst>
-          </a:prstGeom>
-          <a:solidFill>
-            <a:srgbClr val="FFFFFF"/>
-          </a:solidFill>
-          <a:ln w="12700">
-            <a:solidFill>
-              <a:srgbClr val="DB2777"/>
-            </a:solidFill>
-            <a:prstDash val="solid"/>
-          </a:ln>
-        </p:spPr>
-      </p:sp>
-      <p:sp>
-        <p:nvSpPr>
-          <p:cNvPr id="56" name="Text 54"/>
-          <p:cNvSpPr/>
-          <p:nvPr/>
-        </p:nvSpPr>
-        <p:spPr>
-          <a:xfrm>
-            <a:off x="4921966" y="4169664"/>
-            <a:ext cx="543652" cy="475488"/>
-          </a:xfrm>
-          <a:prstGeom prst="rect">
-            <a:avLst/>
-          </a:prstGeom>
-          <a:noFill/>
-          <a:ln/>
-        </p:spPr>
-        <p:txBody>
-          <a:bodyPr wrap="square" lIns="0" tIns="0" rIns="0" bIns="0" rtlCol="0" anchor="ctr"/>
-          <a:lstStyle/>
-          <a:p>
-            <a:pPr algn="ctr" indent="0" marL="0">
-              <a:buNone/>
-            </a:pPr>
-            <a:r>
-              <a:rPr lang="en-US" sz="900" b="1" dirty="0">
-                <a:solidFill>
-                  <a:srgbClr val="9D174D"/>
-                </a:solidFill>
-                <a:latin typeface="Trebuchet MS" pitchFamily="34" charset="0"/>
-                <a:ea typeface="Trebuchet MS" pitchFamily="34" charset="-122"/>
-                <a:cs typeface="Trebuchet MS" pitchFamily="34" charset="-120"/>
-              </a:rPr>
-              <a:t>c</a:t>
-            </a:r>
-            <a:endParaRPr lang="en-US" sz="900" dirty="0"/>
-          </a:p>
-        </p:txBody>
-      </p:sp>
-      <p:sp>
-        <p:nvSpPr>
-          <p:cNvPr id="57" name="Shape 55"/>
-          <p:cNvSpPr/>
-          <p:nvPr/>
-        </p:nvSpPr>
-        <p:spPr>
-          <a:xfrm>
-            <a:off x="5515910" y="4169664"/>
-            <a:ext cx="543652" cy="475488"/>
-          </a:xfrm>
-          <a:prstGeom prst="rect">
-            <a:avLst>
-              <a:gd name="adj" fmla="val 7692"/>
-            </a:avLst>
-          </a:prstGeom>
-          <a:solidFill>
-            <a:srgbClr val="FFFFFF"/>
-          </a:solidFill>
-          <a:ln w="12700">
-            <a:solidFill>
-              <a:srgbClr val="DB2777"/>
-            </a:solidFill>
-            <a:prstDash val="solid"/>
-          </a:ln>
-        </p:spPr>
-      </p:sp>
-      <p:sp>
-        <p:nvSpPr>
-          <p:cNvPr id="58" name="Text 56"/>
-          <p:cNvSpPr/>
-          <p:nvPr/>
-        </p:nvSpPr>
-        <p:spPr>
-          <a:xfrm>
-            <a:off x="5515910" y="4169664"/>
-            <a:ext cx="543652" cy="475488"/>
-          </a:xfrm>
-          <a:prstGeom prst="rect">
-            <a:avLst/>
-          </a:prstGeom>
-          <a:noFill/>
-          <a:ln/>
-        </p:spPr>
-        <p:txBody>
-          <a:bodyPr wrap="square" lIns="0" tIns="0" rIns="0" bIns="0" rtlCol="0" anchor="ctr"/>
-          <a:lstStyle/>
-          <a:p>
-            <a:pPr algn="ctr" indent="0" marL="0">
-              <a:buNone/>
-            </a:pPr>
-            <a:r>
-              <a:rPr lang="en-US" sz="900" b="1" dirty="0">
-                <a:solidFill>
-                  <a:srgbClr val="9D174D"/>
-                </a:solidFill>
-                <a:latin typeface="Trebuchet MS" pitchFamily="34" charset="0"/>
-                <a:ea typeface="Trebuchet MS" pitchFamily="34" charset="-122"/>
-                <a:cs typeface="Trebuchet MS" pitchFamily="34" charset="-120"/>
-              </a:rPr>
-              <a:t>u</a:t>
-            </a:r>
-            <a:endParaRPr lang="en-US" sz="900" dirty="0"/>
-          </a:p>
-        </p:txBody>
-      </p:sp>
-      <p:sp>
-        <p:nvSpPr>
-          <p:cNvPr id="59" name="Shape 57"/>
-          <p:cNvSpPr/>
-          <p:nvPr/>
-        </p:nvSpPr>
-        <p:spPr>
-          <a:xfrm>
-            <a:off x="6109855" y="4169664"/>
-            <a:ext cx="543652" cy="475488"/>
-          </a:xfrm>
-          <a:prstGeom prst="rect">
-            <a:avLst>
-              <a:gd name="adj" fmla="val 7692"/>
-            </a:avLst>
-          </a:prstGeom>
-          <a:solidFill>
-            <a:srgbClr val="FFFFFF"/>
-          </a:solidFill>
-          <a:ln w="12700">
-            <a:solidFill>
-              <a:srgbClr val="DB2777"/>
-            </a:solidFill>
-            <a:prstDash val="solid"/>
-          </a:ln>
-        </p:spPr>
-      </p:sp>
-      <p:sp>
-        <p:nvSpPr>
-          <p:cNvPr id="60" name="Text 58"/>
-          <p:cNvSpPr/>
-          <p:nvPr/>
-        </p:nvSpPr>
-        <p:spPr>
-          <a:xfrm>
-            <a:off x="6109855" y="4169664"/>
-            <a:ext cx="543652" cy="475488"/>
-          </a:xfrm>
-          <a:prstGeom prst="rect">
-            <a:avLst/>
-          </a:prstGeom>
-          <a:noFill/>
-          <a:ln/>
-        </p:spPr>
-        <p:txBody>
-          <a:bodyPr wrap="square" lIns="0" tIns="0" rIns="0" bIns="0" rtlCol="0" anchor="ctr"/>
-          <a:lstStyle/>
-          <a:p>
-            <a:pPr algn="ctr" indent="0" marL="0">
-              <a:buNone/>
-            </a:pPr>
-            <a:r>
-              <a:rPr lang="en-US" sz="900" b="1" dirty="0">
-                <a:solidFill>
-                  <a:srgbClr val="9D174D"/>
-                </a:solidFill>
-                <a:latin typeface="Trebuchet MS" pitchFamily="34" charset="0"/>
-                <a:ea typeface="Trebuchet MS" pitchFamily="34" charset="-122"/>
-                <a:cs typeface="Trebuchet MS" pitchFamily="34" charset="-120"/>
-              </a:rPr>
-              <a:t>l</a:t>
-            </a:r>
-            <a:endParaRPr lang="en-US" sz="900" dirty="0"/>
-          </a:p>
-        </p:txBody>
-      </p:sp>
-      <p:sp>
-        <p:nvSpPr>
-          <p:cNvPr id="61" name="Shape 59"/>
-          <p:cNvSpPr/>
-          <p:nvPr/>
-        </p:nvSpPr>
-        <p:spPr>
-          <a:xfrm>
-            <a:off x="6703799" y="4169664"/>
-            <a:ext cx="543652" cy="475488"/>
-          </a:xfrm>
-          <a:prstGeom prst="rect">
-            <a:avLst>
-              <a:gd name="adj" fmla="val 7692"/>
-            </a:avLst>
-          </a:prstGeom>
-          <a:solidFill>
-            <a:srgbClr val="FFFFFF"/>
-          </a:solidFill>
-          <a:ln w="12700">
-            <a:solidFill>
-              <a:srgbClr val="DB2777"/>
-            </a:solidFill>
-            <a:prstDash val="solid"/>
-          </a:ln>
-        </p:spPr>
-      </p:sp>
-      <p:sp>
-        <p:nvSpPr>
-          <p:cNvPr id="62" name="Text 60"/>
-          <p:cNvSpPr/>
-          <p:nvPr/>
-        </p:nvSpPr>
-        <p:spPr>
-          <a:xfrm>
-            <a:off x="6703799" y="4169664"/>
-            <a:ext cx="543652" cy="475488"/>
-          </a:xfrm>
-          <a:prstGeom prst="rect">
-            <a:avLst/>
-          </a:prstGeom>
-          <a:noFill/>
-          <a:ln/>
-        </p:spPr>
-        <p:txBody>
-          <a:bodyPr wrap="square" lIns="0" tIns="0" rIns="0" bIns="0" rtlCol="0" anchor="ctr"/>
-          <a:lstStyle/>
-          <a:p>
-            <a:pPr algn="ctr" indent="0" marL="0">
-              <a:buNone/>
-            </a:pPr>
-            <a:r>
-              <a:rPr lang="en-US" sz="900" b="1" dirty="0">
-                <a:solidFill>
-                  <a:srgbClr val="9D174D"/>
-                </a:solidFill>
-                <a:latin typeface="Trebuchet MS" pitchFamily="34" charset="0"/>
-                <a:ea typeface="Trebuchet MS" pitchFamily="34" charset="-122"/>
-                <a:cs typeface="Trebuchet MS" pitchFamily="34" charset="-120"/>
-              </a:rPr>
-              <a:t>t</a:t>
-            </a:r>
-            <a:endParaRPr lang="en-US" sz="900" dirty="0"/>
-          </a:p>
-        </p:txBody>
-      </p:sp>
-      <p:sp>
-        <p:nvSpPr>
-          <p:cNvPr id="63" name="Shape 61"/>
-          <p:cNvSpPr/>
-          <p:nvPr/>
-        </p:nvSpPr>
-        <p:spPr>
-          <a:xfrm>
-            <a:off x="7297743" y="4169664"/>
-            <a:ext cx="543652" cy="475488"/>
-          </a:xfrm>
-          <a:prstGeom prst="rect">
-            <a:avLst>
-              <a:gd name="adj" fmla="val 7692"/>
-            </a:avLst>
-          </a:prstGeom>
-          <a:solidFill>
-            <a:srgbClr val="FFFFFF"/>
-          </a:solidFill>
-          <a:ln w="12700">
-            <a:solidFill>
-              <a:srgbClr val="DB2777"/>
-            </a:solidFill>
-            <a:prstDash val="solid"/>
-          </a:ln>
-        </p:spPr>
-      </p:sp>
-      <p:sp>
-        <p:nvSpPr>
-          <p:cNvPr id="64" name="Text 62"/>
-          <p:cNvSpPr/>
-          <p:nvPr/>
-        </p:nvSpPr>
-        <p:spPr>
-          <a:xfrm>
-            <a:off x="7297743" y="4169664"/>
-            <a:ext cx="543652" cy="475488"/>
-          </a:xfrm>
-          <a:prstGeom prst="rect">
-            <a:avLst/>
-          </a:prstGeom>
-          <a:noFill/>
-          <a:ln/>
-        </p:spPr>
-        <p:txBody>
-          <a:bodyPr wrap="square" lIns="0" tIns="0" rIns="0" bIns="0" rtlCol="0" anchor="ctr"/>
-          <a:lstStyle/>
-          <a:p>
-            <a:pPr algn="ctr" indent="0" marL="0">
-              <a:buNone/>
-            </a:pPr>
-            <a:r>
-              <a:rPr lang="en-US" sz="900" b="1" dirty="0">
-                <a:solidFill>
-                  <a:srgbClr val="9D174D"/>
-                </a:solidFill>
-                <a:latin typeface="Trebuchet MS" pitchFamily="34" charset="0"/>
-                <a:ea typeface="Trebuchet MS" pitchFamily="34" charset="-122"/>
-                <a:cs typeface="Trebuchet MS" pitchFamily="34" charset="-120"/>
-              </a:rPr>
-              <a:t>ur</a:t>
-            </a:r>
-            <a:endParaRPr lang="en-US" sz="900" dirty="0"/>
-          </a:p>
-        </p:txBody>
-      </p:sp>
-      <p:sp>
-        <p:nvSpPr>
-          <p:cNvPr id="65" name="Shape 63"/>
-          <p:cNvSpPr/>
-          <p:nvPr/>
-        </p:nvSpPr>
-        <p:spPr>
-          <a:xfrm>
-            <a:off x="7891688" y="4169664"/>
-            <a:ext cx="543652" cy="475488"/>
-          </a:xfrm>
-          <a:prstGeom prst="rect">
-            <a:avLst>
-              <a:gd name="adj" fmla="val 7692"/>
-            </a:avLst>
-          </a:prstGeom>
-          <a:solidFill>
-            <a:srgbClr val="FFFFFF"/>
-          </a:solidFill>
-          <a:ln w="12700">
-            <a:solidFill>
-              <a:srgbClr val="DB2777"/>
-            </a:solidFill>
-            <a:prstDash val="solid"/>
-          </a:ln>
-        </p:spPr>
-      </p:sp>
-      <p:sp>
-        <p:nvSpPr>
-          <p:cNvPr id="66" name="Text 64"/>
-          <p:cNvSpPr/>
-          <p:nvPr/>
-        </p:nvSpPr>
-        <p:spPr>
-          <a:xfrm>
-            <a:off x="7891688" y="4169664"/>
-            <a:ext cx="543652" cy="475488"/>
-          </a:xfrm>
-          <a:prstGeom prst="rect">
-            <a:avLst/>
-          </a:prstGeom>
-          <a:noFill/>
-          <a:ln/>
-        </p:spPr>
-        <p:txBody>
-          <a:bodyPr wrap="square" lIns="0" tIns="0" rIns="0" bIns="0" rtlCol="0" anchor="ctr"/>
-          <a:lstStyle/>
-          <a:p>
-            <a:pPr algn="ctr" indent="0" marL="0">
-              <a:buNone/>
-            </a:pPr>
-            <a:r>
-              <a:rPr lang="en-US" sz="900" b="1" dirty="0">
-                <a:solidFill>
-                  <a:srgbClr val="9D174D"/>
-                </a:solidFill>
-                <a:latin typeface="Trebuchet MS" pitchFamily="34" charset="0"/>
-                <a:ea typeface="Trebuchet MS" pitchFamily="34" charset="-122"/>
-                <a:cs typeface="Trebuchet MS" pitchFamily="34" charset="-120"/>
-              </a:rPr>
-              <a:t>al</a:t>
+              <a:t>a</a:t>
             </a:r>
             <a:endParaRPr lang="en-US" sz="900" dirty="0"/>
           </a:p>
@@ -24961,7 +24703,7 @@
                 <a:ea typeface="Trebuchet MS" pitchFamily="34" charset="-122"/>
                 <a:cs typeface="Trebuchet MS" pitchFamily="34" charset="-120"/>
               </a:rPr>
-              <a:t>multimedia</a:t>
+              <a:t>multicoloured</a:t>
             </a:r>
             <a:endParaRPr lang="en-US" sz="2800" dirty="0"/>
           </a:p>
@@ -25788,7 +25530,7 @@
                 <a:ea typeface="Trebuchet MS" pitchFamily="34" charset="-122"/>
                 <a:cs typeface="Trebuchet MS" pitchFamily="34" charset="-120"/>
               </a:rPr>
-              <a:t>multimedia</a:t>
+              <a:t>multicoloured</a:t>
             </a:r>
             <a:endParaRPr lang="en-US" sz="2800" dirty="0"/>
           </a:p>
@@ -25868,7 +25610,7 @@
         </p:nvSpPr>
         <p:spPr>
           <a:xfrm>
-            <a:off x="2938272" y="2258568"/>
+            <a:off x="2221992" y="2258568"/>
             <a:ext cx="1828800" cy="292608"/>
           </a:xfrm>
           <a:prstGeom prst="rect">
@@ -25902,7 +25644,7 @@
         </p:nvSpPr>
         <p:spPr>
           <a:xfrm>
-            <a:off x="2938272" y="2258568"/>
+            <a:off x="2221992" y="2258568"/>
             <a:ext cx="1828800" cy="292608"/>
           </a:xfrm>
           <a:prstGeom prst="rect">
@@ -25941,7 +25683,7 @@
         </p:nvSpPr>
         <p:spPr>
           <a:xfrm>
-            <a:off x="2938272" y="2569464"/>
+            <a:off x="2221992" y="2569464"/>
             <a:ext cx="1828800" cy="201168"/>
           </a:xfrm>
           <a:prstGeom prst="rect">
@@ -25980,7 +25722,7 @@
         </p:nvSpPr>
         <p:spPr>
           <a:xfrm>
-            <a:off x="5803392" y="2258568"/>
+            <a:off x="4370832" y="2258568"/>
             <a:ext cx="1828800" cy="292608"/>
           </a:xfrm>
           <a:prstGeom prst="rect">
@@ -26014,7 +25756,7 @@
         </p:nvSpPr>
         <p:spPr>
           <a:xfrm>
-            <a:off x="5803392" y="2258568"/>
+            <a:off x="4370832" y="2258568"/>
             <a:ext cx="1828800" cy="292608"/>
           </a:xfrm>
           <a:prstGeom prst="rect">
@@ -26039,7 +25781,7 @@
                 <a:ea typeface="Trebuchet MS" pitchFamily="34" charset="-122"/>
                 <a:cs typeface="Trebuchet MS" pitchFamily="34" charset="-120"/>
               </a:rPr>
-              <a:t>media</a:t>
+              <a:t>colour</a:t>
             </a:r>
             <a:endParaRPr lang="en-US" sz="1300" dirty="0"/>
           </a:p>
@@ -26053,7 +25795,7 @@
         </p:nvSpPr>
         <p:spPr>
           <a:xfrm>
-            <a:off x="5803392" y="2569464"/>
+            <a:off x="4370832" y="2569464"/>
             <a:ext cx="1828800" cy="201168"/>
           </a:xfrm>
           <a:prstGeom prst="rect">
@@ -26078,7 +25820,7 @@
                 <a:ea typeface="Calibri" pitchFamily="34" charset="-122"/>
                 <a:cs typeface="Calibri" pitchFamily="34" charset="-120"/>
               </a:rPr>
-              <a:t>means of communication</a:t>
+              <a:t>hue, shade</a:t>
             </a:r>
             <a:endParaRPr lang="en-US" sz="850" dirty="0"/>
           </a:p>
@@ -26087,6 +25829,118 @@
       <p:sp>
         <p:nvSpPr>
           <p:cNvPr id="22" name="Shape 20"/>
+          <p:cNvSpPr/>
+          <p:nvPr/>
+        </p:nvSpPr>
+        <p:spPr>
+          <a:xfrm>
+            <a:off x="6519672" y="2258568"/>
+            <a:ext cx="1828800" cy="292608"/>
+          </a:xfrm>
+          <a:prstGeom prst="rect">
+            <a:avLst>
+              <a:gd name="adj" fmla="val 25000"/>
+            </a:avLst>
+          </a:prstGeom>
+          <a:solidFill>
+            <a:srgbClr val="FCE7F3"/>
+          </a:solidFill>
+          <a:ln w="19050">
+            <a:solidFill>
+              <a:srgbClr val="DB2777"/>
+            </a:solidFill>
+            <a:prstDash val="solid"/>
+          </a:ln>
+          <a:effectLst>
+            <a:outerShdw sx="100000" sy="100000" kx="0" ky="0" algn="bl" rotWithShape="0" blurRad="101600" dist="38100" dir="8100000">
+              <a:srgbClr val="000000">
+                <a:alpha val="12000"/>
+              </a:srgbClr>
+            </a:outerShdw>
+          </a:effectLst>
+        </p:spPr>
+      </p:sp>
+      <p:sp>
+        <p:nvSpPr>
+          <p:cNvPr id="23" name="Text 21"/>
+          <p:cNvSpPr/>
+          <p:nvPr/>
+        </p:nvSpPr>
+        <p:spPr>
+          <a:xfrm>
+            <a:off x="6519672" y="2258568"/>
+            <a:ext cx="1828800" cy="292608"/>
+          </a:xfrm>
+          <a:prstGeom prst="rect">
+            <a:avLst/>
+          </a:prstGeom>
+          <a:noFill/>
+          <a:ln/>
+        </p:spPr>
+        <p:txBody>
+          <a:bodyPr wrap="square" lIns="0" tIns="0" rIns="0" bIns="0" rtlCol="0" anchor="ctr"/>
+          <a:lstStyle/>
+          <a:p>
+            <a:pPr algn="ctr" indent="0" marL="0">
+              <a:buNone/>
+            </a:pPr>
+            <a:r>
+              <a:rPr lang="en-US" sz="1300" b="1" dirty="0">
+                <a:solidFill>
+                  <a:srgbClr val="9D174D"/>
+                </a:solidFill>
+                <a:latin typeface="Trebuchet MS" pitchFamily="34" charset="0"/>
+                <a:ea typeface="Trebuchet MS" pitchFamily="34" charset="-122"/>
+                <a:cs typeface="Trebuchet MS" pitchFamily="34" charset="-120"/>
+              </a:rPr>
+              <a:t>ed</a:t>
+            </a:r>
+            <a:endParaRPr lang="en-US" sz="1300" dirty="0"/>
+          </a:p>
+        </p:txBody>
+      </p:sp>
+      <p:sp>
+        <p:nvSpPr>
+          <p:cNvPr id="24" name="Text 22"/>
+          <p:cNvSpPr/>
+          <p:nvPr/>
+        </p:nvSpPr>
+        <p:spPr>
+          <a:xfrm>
+            <a:off x="6519672" y="2569464"/>
+            <a:ext cx="1828800" cy="201168"/>
+          </a:xfrm>
+          <a:prstGeom prst="rect">
+            <a:avLst/>
+          </a:prstGeom>
+          <a:noFill/>
+          <a:ln/>
+        </p:spPr>
+        <p:txBody>
+          <a:bodyPr wrap="square" lIns="0" tIns="0" rIns="0" bIns="0" rtlCol="0" anchor="t"/>
+          <a:lstStyle/>
+          <a:p>
+            <a:pPr algn="ctr" indent="0" marL="0">
+              <a:buNone/>
+            </a:pPr>
+            <a:r>
+              <a:rPr lang="en-US" sz="850" dirty="0">
+                <a:solidFill>
+                  <a:srgbClr val="475569"/>
+                </a:solidFill>
+                <a:latin typeface="Calibri" pitchFamily="34" charset="0"/>
+                <a:ea typeface="Calibri" pitchFamily="34" charset="-122"/>
+                <a:cs typeface="Calibri" pitchFamily="34" charset="-120"/>
+              </a:rPr>
+              <a:t>having a quality</a:t>
+            </a:r>
+            <a:endParaRPr lang="en-US" sz="850" dirty="0"/>
+          </a:p>
+        </p:txBody>
+      </p:sp>
+      <p:sp>
+        <p:nvSpPr>
+          <p:cNvPr id="25" name="Shape 23"/>
           <p:cNvSpPr/>
           <p:nvPr/>
         </p:nvSpPr>
@@ -26113,7 +25967,7 @@
       </p:sp>
       <p:sp>
         <p:nvSpPr>
-          <p:cNvPr id="23" name="Text 21"/>
+          <p:cNvPr id="26" name="Text 24"/>
           <p:cNvSpPr/>
           <p:nvPr/>
         </p:nvSpPr>
@@ -26152,7 +26006,7 @@
       </p:sp>
       <p:sp>
         <p:nvSpPr>
-          <p:cNvPr id="24" name="Shape 22"/>
+          <p:cNvPr id="27" name="Shape 25"/>
           <p:cNvSpPr/>
           <p:nvPr/>
         </p:nvSpPr>
@@ -26179,7 +26033,7 @@
       </p:sp>
       <p:sp>
         <p:nvSpPr>
-          <p:cNvPr id="25" name="Text 23"/>
+          <p:cNvPr id="28" name="Text 26"/>
           <p:cNvSpPr/>
           <p:nvPr/>
         </p:nvSpPr>
@@ -26218,7 +26072,7 @@
       </p:sp>
       <p:sp>
         <p:nvSpPr>
-          <p:cNvPr id="26" name="Shape 24"/>
+          <p:cNvPr id="29" name="Shape 27"/>
           <p:cNvSpPr/>
           <p:nvPr/>
         </p:nvSpPr>
@@ -26245,7 +26099,7 @@
       </p:sp>
       <p:sp>
         <p:nvSpPr>
-          <p:cNvPr id="27" name="Text 25"/>
+          <p:cNvPr id="30" name="Text 28"/>
           <p:cNvSpPr/>
           <p:nvPr/>
         </p:nvSpPr>
@@ -26284,7 +26138,7 @@
       </p:sp>
       <p:sp>
         <p:nvSpPr>
-          <p:cNvPr id="28" name="Shape 26"/>
+          <p:cNvPr id="31" name="Shape 29"/>
           <p:cNvSpPr/>
           <p:nvPr/>
         </p:nvSpPr>
@@ -26311,7 +26165,7 @@
       </p:sp>
       <p:sp>
         <p:nvSpPr>
-          <p:cNvPr id="29" name="Text 27"/>
+          <p:cNvPr id="32" name="Text 30"/>
           <p:cNvSpPr/>
           <p:nvPr/>
         </p:nvSpPr>
@@ -27492,7 +27346,7 @@
                 <a:ea typeface="Trebuchet MS" pitchFamily="34" charset="-122"/>
                 <a:cs typeface="Trebuchet MS" pitchFamily="34" charset="-120"/>
               </a:rPr>
-              <a:t>multimedia</a:t>
+              <a:t>multicoloured</a:t>
             </a:r>
             <a:endParaRPr lang="en-US" sz="2800" dirty="0"/>
           </a:p>
@@ -27572,7 +27426,7 @@
         </p:nvSpPr>
         <p:spPr>
           <a:xfrm>
-            <a:off x="2938272" y="2258568"/>
+            <a:off x="2221992" y="2258568"/>
             <a:ext cx="1828800" cy="292608"/>
           </a:xfrm>
           <a:prstGeom prst="rect">
@@ -27606,7 +27460,7 @@
         </p:nvSpPr>
         <p:spPr>
           <a:xfrm>
-            <a:off x="2938272" y="2258568"/>
+            <a:off x="2221992" y="2258568"/>
             <a:ext cx="1828800" cy="292608"/>
           </a:xfrm>
           <a:prstGeom prst="rect">
@@ -27645,7 +27499,7 @@
         </p:nvSpPr>
         <p:spPr>
           <a:xfrm>
-            <a:off x="2938272" y="2569464"/>
+            <a:off x="2221992" y="2569464"/>
             <a:ext cx="1828800" cy="201168"/>
           </a:xfrm>
           <a:prstGeom prst="rect">
@@ -27684,7 +27538,7 @@
         </p:nvSpPr>
         <p:spPr>
           <a:xfrm>
-            <a:off x="5803392" y="2258568"/>
+            <a:off x="4370832" y="2258568"/>
             <a:ext cx="1828800" cy="292608"/>
           </a:xfrm>
           <a:prstGeom prst="rect">
@@ -27718,7 +27572,7 @@
         </p:nvSpPr>
         <p:spPr>
           <a:xfrm>
-            <a:off x="5803392" y="2258568"/>
+            <a:off x="4370832" y="2258568"/>
             <a:ext cx="1828800" cy="292608"/>
           </a:xfrm>
           <a:prstGeom prst="rect">
@@ -27743,7 +27597,7 @@
                 <a:ea typeface="Trebuchet MS" pitchFamily="34" charset="-122"/>
                 <a:cs typeface="Trebuchet MS" pitchFamily="34" charset="-120"/>
               </a:rPr>
-              <a:t>media</a:t>
+              <a:t>colour</a:t>
             </a:r>
             <a:endParaRPr lang="en-US" sz="1300" dirty="0"/>
           </a:p>
@@ -27757,7 +27611,7 @@
         </p:nvSpPr>
         <p:spPr>
           <a:xfrm>
-            <a:off x="5803392" y="2569464"/>
+            <a:off x="4370832" y="2569464"/>
             <a:ext cx="1828800" cy="201168"/>
           </a:xfrm>
           <a:prstGeom prst="rect">
@@ -27782,7 +27636,7 @@
                 <a:ea typeface="Calibri" pitchFamily="34" charset="-122"/>
                 <a:cs typeface="Calibri" pitchFamily="34" charset="-120"/>
               </a:rPr>
-              <a:t>means of communication</a:t>
+              <a:t>hue, shade</a:t>
             </a:r>
             <a:endParaRPr lang="en-US" sz="850" dirty="0"/>
           </a:p>
@@ -27791,6 +27645,118 @@
       <p:sp>
         <p:nvSpPr>
           <p:cNvPr id="22" name="Shape 20"/>
+          <p:cNvSpPr/>
+          <p:nvPr/>
+        </p:nvSpPr>
+        <p:spPr>
+          <a:xfrm>
+            <a:off x="6519672" y="2258568"/>
+            <a:ext cx="1828800" cy="292608"/>
+          </a:xfrm>
+          <a:prstGeom prst="rect">
+            <a:avLst>
+              <a:gd name="adj" fmla="val 25000"/>
+            </a:avLst>
+          </a:prstGeom>
+          <a:solidFill>
+            <a:srgbClr val="FCE7F3"/>
+          </a:solidFill>
+          <a:ln w="19050">
+            <a:solidFill>
+              <a:srgbClr val="DB2777"/>
+            </a:solidFill>
+            <a:prstDash val="solid"/>
+          </a:ln>
+          <a:effectLst>
+            <a:outerShdw sx="100000" sy="100000" kx="0" ky="0" algn="bl" rotWithShape="0" blurRad="101600" dist="38100" dir="8100000">
+              <a:srgbClr val="000000">
+                <a:alpha val="12000"/>
+              </a:srgbClr>
+            </a:outerShdw>
+          </a:effectLst>
+        </p:spPr>
+      </p:sp>
+      <p:sp>
+        <p:nvSpPr>
+          <p:cNvPr id="23" name="Text 21"/>
+          <p:cNvSpPr/>
+          <p:nvPr/>
+        </p:nvSpPr>
+        <p:spPr>
+          <a:xfrm>
+            <a:off x="6519672" y="2258568"/>
+            <a:ext cx="1828800" cy="292608"/>
+          </a:xfrm>
+          <a:prstGeom prst="rect">
+            <a:avLst/>
+          </a:prstGeom>
+          <a:noFill/>
+          <a:ln/>
+        </p:spPr>
+        <p:txBody>
+          <a:bodyPr wrap="square" lIns="0" tIns="0" rIns="0" bIns="0" rtlCol="0" anchor="ctr"/>
+          <a:lstStyle/>
+          <a:p>
+            <a:pPr algn="ctr" indent="0" marL="0">
+              <a:buNone/>
+            </a:pPr>
+            <a:r>
+              <a:rPr lang="en-US" sz="1300" b="1" dirty="0">
+                <a:solidFill>
+                  <a:srgbClr val="9D174D"/>
+                </a:solidFill>
+                <a:latin typeface="Trebuchet MS" pitchFamily="34" charset="0"/>
+                <a:ea typeface="Trebuchet MS" pitchFamily="34" charset="-122"/>
+                <a:cs typeface="Trebuchet MS" pitchFamily="34" charset="-120"/>
+              </a:rPr>
+              <a:t>ed</a:t>
+            </a:r>
+            <a:endParaRPr lang="en-US" sz="1300" dirty="0"/>
+          </a:p>
+        </p:txBody>
+      </p:sp>
+      <p:sp>
+        <p:nvSpPr>
+          <p:cNvPr id="24" name="Text 22"/>
+          <p:cNvSpPr/>
+          <p:nvPr/>
+        </p:nvSpPr>
+        <p:spPr>
+          <a:xfrm>
+            <a:off x="6519672" y="2569464"/>
+            <a:ext cx="1828800" cy="201168"/>
+          </a:xfrm>
+          <a:prstGeom prst="rect">
+            <a:avLst/>
+          </a:prstGeom>
+          <a:noFill/>
+          <a:ln/>
+        </p:spPr>
+        <p:txBody>
+          <a:bodyPr wrap="square" lIns="0" tIns="0" rIns="0" bIns="0" rtlCol="0" anchor="t"/>
+          <a:lstStyle/>
+          <a:p>
+            <a:pPr algn="ctr" indent="0" marL="0">
+              <a:buNone/>
+            </a:pPr>
+            <a:r>
+              <a:rPr lang="en-US" sz="850" dirty="0">
+                <a:solidFill>
+                  <a:srgbClr val="475569"/>
+                </a:solidFill>
+                <a:latin typeface="Calibri" pitchFamily="34" charset="0"/>
+                <a:ea typeface="Calibri" pitchFamily="34" charset="-122"/>
+                <a:cs typeface="Calibri" pitchFamily="34" charset="-120"/>
+              </a:rPr>
+              <a:t>having a quality</a:t>
+            </a:r>
+            <a:endParaRPr lang="en-US" sz="850" dirty="0"/>
+          </a:p>
+        </p:txBody>
+      </p:sp>
+      <p:sp>
+        <p:nvSpPr>
+          <p:cNvPr id="25" name="Shape 23"/>
           <p:cNvSpPr/>
           <p:nvPr/>
         </p:nvSpPr>
@@ -27817,7 +27783,7 @@
       </p:sp>
       <p:sp>
         <p:nvSpPr>
-          <p:cNvPr id="23" name="Text 21"/>
+          <p:cNvPr id="26" name="Text 24"/>
           <p:cNvSpPr/>
           <p:nvPr/>
         </p:nvSpPr>
@@ -27856,7 +27822,7 @@
       </p:sp>
       <p:sp>
         <p:nvSpPr>
-          <p:cNvPr id="24" name="Shape 22"/>
+          <p:cNvPr id="27" name="Shape 25"/>
           <p:cNvSpPr/>
           <p:nvPr/>
         </p:nvSpPr>
@@ -27883,14 +27849,14 @@
       </p:sp>
       <p:sp>
         <p:nvSpPr>
-          <p:cNvPr id="25" name="Shape 23"/>
-          <p:cNvSpPr/>
-          <p:nvPr/>
-        </p:nvSpPr>
-        <p:spPr>
-          <a:xfrm>
-            <a:off x="1978152" y="3364992"/>
-            <a:ext cx="1225296" cy="475488"/>
+          <p:cNvPr id="28" name="Shape 26"/>
+          <p:cNvSpPr/>
+          <p:nvPr/>
+        </p:nvSpPr>
+        <p:spPr>
+          <a:xfrm>
+            <a:off x="1975104" y="3364992"/>
+            <a:ext cx="1554480" cy="475488"/>
           </a:xfrm>
           <a:prstGeom prst="rect">
             <a:avLst>
@@ -27910,14 +27876,14 @@
       </p:sp>
       <p:sp>
         <p:nvSpPr>
-          <p:cNvPr id="26" name="Text 24"/>
-          <p:cNvSpPr/>
-          <p:nvPr/>
-        </p:nvSpPr>
-        <p:spPr>
-          <a:xfrm>
-            <a:off x="1978152" y="3364992"/>
-            <a:ext cx="1225296" cy="475488"/>
+          <p:cNvPr id="29" name="Text 27"/>
+          <p:cNvSpPr/>
+          <p:nvPr/>
+        </p:nvSpPr>
+        <p:spPr>
+          <a:xfrm>
+            <a:off x="1975104" y="3364992"/>
+            <a:ext cx="1554480" cy="475488"/>
           </a:xfrm>
           <a:prstGeom prst="rect">
             <a:avLst/>
@@ -27949,14 +27915,14 @@
       </p:sp>
       <p:sp>
         <p:nvSpPr>
-          <p:cNvPr id="27" name="Text 25"/>
-          <p:cNvSpPr/>
-          <p:nvPr/>
-        </p:nvSpPr>
-        <p:spPr>
-          <a:xfrm>
-            <a:off x="3203448" y="3364992"/>
-            <a:ext cx="76200" cy="475488"/>
+          <p:cNvPr id="30" name="Text 28"/>
+          <p:cNvSpPr/>
+          <p:nvPr/>
+        </p:nvSpPr>
+        <p:spPr>
+          <a:xfrm>
+            <a:off x="3529584" y="3364992"/>
+            <a:ext cx="73152" cy="475488"/>
           </a:xfrm>
           <a:prstGeom prst="rect">
             <a:avLst/>
@@ -27988,14 +27954,14 @@
       </p:sp>
       <p:sp>
         <p:nvSpPr>
-          <p:cNvPr id="28" name="Shape 26"/>
-          <p:cNvSpPr/>
-          <p:nvPr/>
-        </p:nvSpPr>
-        <p:spPr>
-          <a:xfrm>
-            <a:off x="3279648" y="3364992"/>
-            <a:ext cx="1225296" cy="475488"/>
+          <p:cNvPr id="31" name="Shape 29"/>
+          <p:cNvSpPr/>
+          <p:nvPr/>
+        </p:nvSpPr>
+        <p:spPr>
+          <a:xfrm>
+            <a:off x="3602736" y="3364992"/>
+            <a:ext cx="1554480" cy="475488"/>
           </a:xfrm>
           <a:prstGeom prst="rect">
             <a:avLst>
@@ -28015,14 +27981,14 @@
       </p:sp>
       <p:sp>
         <p:nvSpPr>
-          <p:cNvPr id="29" name="Text 27"/>
-          <p:cNvSpPr/>
-          <p:nvPr/>
-        </p:nvSpPr>
-        <p:spPr>
-          <a:xfrm>
-            <a:off x="3279648" y="3364992"/>
-            <a:ext cx="1225296" cy="475488"/>
+          <p:cNvPr id="32" name="Text 30"/>
+          <p:cNvSpPr/>
+          <p:nvPr/>
+        </p:nvSpPr>
+        <p:spPr>
+          <a:xfrm>
+            <a:off x="3602736" y="3364992"/>
+            <a:ext cx="1554480" cy="475488"/>
           </a:xfrm>
           <a:prstGeom prst="rect">
             <a:avLst/>
@@ -28054,14 +28020,14 @@
       </p:sp>
       <p:sp>
         <p:nvSpPr>
-          <p:cNvPr id="30" name="Text 28"/>
-          <p:cNvSpPr/>
-          <p:nvPr/>
-        </p:nvSpPr>
-        <p:spPr>
-          <a:xfrm>
-            <a:off x="4504944" y="3364992"/>
-            <a:ext cx="76200" cy="475488"/>
+          <p:cNvPr id="33" name="Text 31"/>
+          <p:cNvSpPr/>
+          <p:nvPr/>
+        </p:nvSpPr>
+        <p:spPr>
+          <a:xfrm>
+            <a:off x="5157216" y="3364992"/>
+            <a:ext cx="73152" cy="475488"/>
           </a:xfrm>
           <a:prstGeom prst="rect">
             <a:avLst/>
@@ -28093,14 +28059,14 @@
       </p:sp>
       <p:sp>
         <p:nvSpPr>
-          <p:cNvPr id="31" name="Shape 29"/>
-          <p:cNvSpPr/>
-          <p:nvPr/>
-        </p:nvSpPr>
-        <p:spPr>
-          <a:xfrm>
-            <a:off x="4581144" y="3364992"/>
-            <a:ext cx="1225296" cy="475488"/>
+          <p:cNvPr id="34" name="Shape 32"/>
+          <p:cNvSpPr/>
+          <p:nvPr/>
+        </p:nvSpPr>
+        <p:spPr>
+          <a:xfrm>
+            <a:off x="5230368" y="3364992"/>
+            <a:ext cx="1554480" cy="475488"/>
           </a:xfrm>
           <a:prstGeom prst="rect">
             <a:avLst>
@@ -28120,14 +28086,14 @@
       </p:sp>
       <p:sp>
         <p:nvSpPr>
-          <p:cNvPr id="32" name="Text 30"/>
-          <p:cNvSpPr/>
-          <p:nvPr/>
-        </p:nvSpPr>
-        <p:spPr>
-          <a:xfrm>
-            <a:off x="4581144" y="3364992"/>
-            <a:ext cx="1225296" cy="475488"/>
+          <p:cNvPr id="35" name="Text 33"/>
+          <p:cNvSpPr/>
+          <p:nvPr/>
+        </p:nvSpPr>
+        <p:spPr>
+          <a:xfrm>
+            <a:off x="5230368" y="3364992"/>
+            <a:ext cx="1554480" cy="475488"/>
           </a:xfrm>
           <a:prstGeom prst="rect">
             <a:avLst/>
@@ -28151,7 +28117,7 @@
                 <a:ea typeface="Trebuchet MS" pitchFamily="34" charset="-122"/>
                 <a:cs typeface="Trebuchet MS" pitchFamily="34" charset="-120"/>
               </a:rPr>
-              <a:t>me</a:t>
+              <a:t>col</a:t>
             </a:r>
             <a:endParaRPr lang="en-US" sz="1400" dirty="0"/>
           </a:p>
@@ -28159,14 +28125,14 @@
       </p:sp>
       <p:sp>
         <p:nvSpPr>
-          <p:cNvPr id="33" name="Text 31"/>
-          <p:cNvSpPr/>
-          <p:nvPr/>
-        </p:nvSpPr>
-        <p:spPr>
-          <a:xfrm>
-            <a:off x="5806440" y="3364992"/>
-            <a:ext cx="76200" cy="475488"/>
+          <p:cNvPr id="36" name="Text 34"/>
+          <p:cNvSpPr/>
+          <p:nvPr/>
+        </p:nvSpPr>
+        <p:spPr>
+          <a:xfrm>
+            <a:off x="6784848" y="3364992"/>
+            <a:ext cx="73152" cy="475488"/>
           </a:xfrm>
           <a:prstGeom prst="rect">
             <a:avLst/>
@@ -28198,14 +28164,14 @@
       </p:sp>
       <p:sp>
         <p:nvSpPr>
-          <p:cNvPr id="34" name="Shape 32"/>
-          <p:cNvSpPr/>
-          <p:nvPr/>
-        </p:nvSpPr>
-        <p:spPr>
-          <a:xfrm>
-            <a:off x="5882640" y="3364992"/>
-            <a:ext cx="1225296" cy="475488"/>
+          <p:cNvPr id="37" name="Shape 35"/>
+          <p:cNvSpPr/>
+          <p:nvPr/>
+        </p:nvSpPr>
+        <p:spPr>
+          <a:xfrm>
+            <a:off x="6858000" y="3364992"/>
+            <a:ext cx="1554480" cy="475488"/>
           </a:xfrm>
           <a:prstGeom prst="rect">
             <a:avLst>
@@ -28225,14 +28191,14 @@
       </p:sp>
       <p:sp>
         <p:nvSpPr>
-          <p:cNvPr id="35" name="Text 33"/>
-          <p:cNvSpPr/>
-          <p:nvPr/>
-        </p:nvSpPr>
-        <p:spPr>
-          <a:xfrm>
-            <a:off x="5882640" y="3364992"/>
-            <a:ext cx="1225296" cy="475488"/>
+          <p:cNvPr id="38" name="Text 36"/>
+          <p:cNvSpPr/>
+          <p:nvPr/>
+        </p:nvSpPr>
+        <p:spPr>
+          <a:xfrm>
+            <a:off x="6858000" y="3364992"/>
+            <a:ext cx="1554480" cy="475488"/>
           </a:xfrm>
           <a:prstGeom prst="rect">
             <a:avLst/>
@@ -28256,112 +28222,7 @@
                 <a:ea typeface="Trebuchet MS" pitchFamily="34" charset="-122"/>
                 <a:cs typeface="Trebuchet MS" pitchFamily="34" charset="-120"/>
               </a:rPr>
-              <a:t>di</a:t>
-            </a:r>
-            <a:endParaRPr lang="en-US" sz="1400" dirty="0"/>
-          </a:p>
-        </p:txBody>
-      </p:sp>
-      <p:sp>
-        <p:nvSpPr>
-          <p:cNvPr id="36" name="Text 34"/>
-          <p:cNvSpPr/>
-          <p:nvPr/>
-        </p:nvSpPr>
-        <p:spPr>
-          <a:xfrm>
-            <a:off x="7107936" y="3364992"/>
-            <a:ext cx="76200" cy="475488"/>
-          </a:xfrm>
-          <a:prstGeom prst="rect">
-            <a:avLst/>
-          </a:prstGeom>
-          <a:noFill/>
-          <a:ln/>
-        </p:spPr>
-        <p:txBody>
-          <a:bodyPr wrap="square" lIns="0" tIns="0" rIns="0" bIns="0" rtlCol="0" anchor="ctr"/>
-          <a:lstStyle/>
-          <a:p>
-            <a:pPr algn="ctr" indent="0" marL="0">
-              <a:buNone/>
-            </a:pPr>
-            <a:r>
-              <a:rPr lang="en-US" sz="1600" b="1" dirty="0">
-                <a:solidFill>
-                  <a:srgbClr val="0D9488"/>
-                </a:solidFill>
-                <a:latin typeface="Trebuchet MS" pitchFamily="34" charset="0"/>
-                <a:ea typeface="Trebuchet MS" pitchFamily="34" charset="-122"/>
-                <a:cs typeface="Trebuchet MS" pitchFamily="34" charset="-120"/>
-              </a:rPr>
-              <a:t>·</a:t>
-            </a:r>
-            <a:endParaRPr lang="en-US" sz="1600" dirty="0"/>
-          </a:p>
-        </p:txBody>
-      </p:sp>
-      <p:sp>
-        <p:nvSpPr>
-          <p:cNvPr id="37" name="Shape 35"/>
-          <p:cNvSpPr/>
-          <p:nvPr/>
-        </p:nvSpPr>
-        <p:spPr>
-          <a:xfrm>
-            <a:off x="7184136" y="3364992"/>
-            <a:ext cx="1225296" cy="475488"/>
-          </a:xfrm>
-          <a:prstGeom prst="rect">
-            <a:avLst>
-              <a:gd name="adj" fmla="val 9615"/>
-            </a:avLst>
-          </a:prstGeom>
-          <a:solidFill>
-            <a:srgbClr val="FFFFFF"/>
-          </a:solidFill>
-          <a:ln w="12700">
-            <a:solidFill>
-              <a:srgbClr val="0D9488"/>
-            </a:solidFill>
-            <a:prstDash val="solid"/>
-          </a:ln>
-        </p:spPr>
-      </p:sp>
-      <p:sp>
-        <p:nvSpPr>
-          <p:cNvPr id="38" name="Text 36"/>
-          <p:cNvSpPr/>
-          <p:nvPr/>
-        </p:nvSpPr>
-        <p:spPr>
-          <a:xfrm>
-            <a:off x="7184136" y="3364992"/>
-            <a:ext cx="1225296" cy="475488"/>
-          </a:xfrm>
-          <a:prstGeom prst="rect">
-            <a:avLst/>
-          </a:prstGeom>
-          <a:noFill/>
-          <a:ln/>
-        </p:spPr>
-        <p:txBody>
-          <a:bodyPr wrap="square" lIns="0" tIns="0" rIns="0" bIns="0" rtlCol="0" anchor="ctr"/>
-          <a:lstStyle/>
-          <a:p>
-            <a:pPr algn="ctr" indent="0" marL="0">
-              <a:buNone/>
-            </a:pPr>
-            <a:r>
-              <a:rPr lang="en-US" sz="1400" b="1" dirty="0">
-                <a:solidFill>
-                  <a:srgbClr val="0D9488"/>
-                </a:solidFill>
-                <a:latin typeface="Trebuchet MS" pitchFamily="34" charset="0"/>
-                <a:ea typeface="Trebuchet MS" pitchFamily="34" charset="-122"/>
-                <a:cs typeface="Trebuchet MS" pitchFamily="34" charset="-120"/>
-              </a:rPr>
-              <a:t>a</a:t>
+              <a:t>oured</a:t>
             </a:r>
             <a:endParaRPr lang="en-US" sz="1400" dirty="0"/>
           </a:p>
@@ -28924,7 +28785,7 @@
                 <a:ea typeface="Trebuchet MS" pitchFamily="34" charset="-122"/>
                 <a:cs typeface="Trebuchet MS" pitchFamily="34" charset="-120"/>
               </a:rPr>
-              <a:t>multimedia</a:t>
+              <a:t>multicoloured</a:t>
             </a:r>
             <a:endParaRPr lang="en-US" sz="2800" dirty="0"/>
           </a:p>
@@ -29004,7 +28865,7 @@
         </p:nvSpPr>
         <p:spPr>
           <a:xfrm>
-            <a:off x="2938272" y="2258568"/>
+            <a:off x="2221992" y="2258568"/>
             <a:ext cx="1828800" cy="292608"/>
           </a:xfrm>
           <a:prstGeom prst="rect">
@@ -29038,7 +28899,7 @@
         </p:nvSpPr>
         <p:spPr>
           <a:xfrm>
-            <a:off x="2938272" y="2258568"/>
+            <a:off x="2221992" y="2258568"/>
             <a:ext cx="1828800" cy="292608"/>
           </a:xfrm>
           <a:prstGeom prst="rect">
@@ -29077,7 +28938,7 @@
         </p:nvSpPr>
         <p:spPr>
           <a:xfrm>
-            <a:off x="2938272" y="2569464"/>
+            <a:off x="2221992" y="2569464"/>
             <a:ext cx="1828800" cy="201168"/>
           </a:xfrm>
           <a:prstGeom prst="rect">
@@ -29116,7 +28977,7 @@
         </p:nvSpPr>
         <p:spPr>
           <a:xfrm>
-            <a:off x="5803392" y="2258568"/>
+            <a:off x="4370832" y="2258568"/>
             <a:ext cx="1828800" cy="292608"/>
           </a:xfrm>
           <a:prstGeom prst="rect">
@@ -29150,7 +29011,7 @@
         </p:nvSpPr>
         <p:spPr>
           <a:xfrm>
-            <a:off x="5803392" y="2258568"/>
+            <a:off x="4370832" y="2258568"/>
             <a:ext cx="1828800" cy="292608"/>
           </a:xfrm>
           <a:prstGeom prst="rect">
@@ -29175,7 +29036,7 @@
                 <a:ea typeface="Trebuchet MS" pitchFamily="34" charset="-122"/>
                 <a:cs typeface="Trebuchet MS" pitchFamily="34" charset="-120"/>
               </a:rPr>
-              <a:t>media</a:t>
+              <a:t>colour</a:t>
             </a:r>
             <a:endParaRPr lang="en-US" sz="1300" dirty="0"/>
           </a:p>
@@ -29189,7 +29050,7 @@
         </p:nvSpPr>
         <p:spPr>
           <a:xfrm>
-            <a:off x="5803392" y="2569464"/>
+            <a:off x="4370832" y="2569464"/>
             <a:ext cx="1828800" cy="201168"/>
           </a:xfrm>
           <a:prstGeom prst="rect">
@@ -29214,7 +29075,7 @@
                 <a:ea typeface="Calibri" pitchFamily="34" charset="-122"/>
                 <a:cs typeface="Calibri" pitchFamily="34" charset="-120"/>
               </a:rPr>
-              <a:t>means of communication</a:t>
+              <a:t>hue, shade</a:t>
             </a:r>
             <a:endParaRPr lang="en-US" sz="850" dirty="0"/>
           </a:p>
@@ -29223,6 +29084,118 @@
       <p:sp>
         <p:nvSpPr>
           <p:cNvPr id="22" name="Shape 20"/>
+          <p:cNvSpPr/>
+          <p:nvPr/>
+        </p:nvSpPr>
+        <p:spPr>
+          <a:xfrm>
+            <a:off x="6519672" y="2258568"/>
+            <a:ext cx="1828800" cy="292608"/>
+          </a:xfrm>
+          <a:prstGeom prst="rect">
+            <a:avLst>
+              <a:gd name="adj" fmla="val 25000"/>
+            </a:avLst>
+          </a:prstGeom>
+          <a:solidFill>
+            <a:srgbClr val="FCE7F3"/>
+          </a:solidFill>
+          <a:ln w="19050">
+            <a:solidFill>
+              <a:srgbClr val="DB2777"/>
+            </a:solidFill>
+            <a:prstDash val="solid"/>
+          </a:ln>
+          <a:effectLst>
+            <a:outerShdw sx="100000" sy="100000" kx="0" ky="0" algn="bl" rotWithShape="0" blurRad="101600" dist="38100" dir="8100000">
+              <a:srgbClr val="000000">
+                <a:alpha val="12000"/>
+              </a:srgbClr>
+            </a:outerShdw>
+          </a:effectLst>
+        </p:spPr>
+      </p:sp>
+      <p:sp>
+        <p:nvSpPr>
+          <p:cNvPr id="23" name="Text 21"/>
+          <p:cNvSpPr/>
+          <p:nvPr/>
+        </p:nvSpPr>
+        <p:spPr>
+          <a:xfrm>
+            <a:off x="6519672" y="2258568"/>
+            <a:ext cx="1828800" cy="292608"/>
+          </a:xfrm>
+          <a:prstGeom prst="rect">
+            <a:avLst/>
+          </a:prstGeom>
+          <a:noFill/>
+          <a:ln/>
+        </p:spPr>
+        <p:txBody>
+          <a:bodyPr wrap="square" lIns="0" tIns="0" rIns="0" bIns="0" rtlCol="0" anchor="ctr"/>
+          <a:lstStyle/>
+          <a:p>
+            <a:pPr algn="ctr" indent="0" marL="0">
+              <a:buNone/>
+            </a:pPr>
+            <a:r>
+              <a:rPr lang="en-US" sz="1300" b="1" dirty="0">
+                <a:solidFill>
+                  <a:srgbClr val="9D174D"/>
+                </a:solidFill>
+                <a:latin typeface="Trebuchet MS" pitchFamily="34" charset="0"/>
+                <a:ea typeface="Trebuchet MS" pitchFamily="34" charset="-122"/>
+                <a:cs typeface="Trebuchet MS" pitchFamily="34" charset="-120"/>
+              </a:rPr>
+              <a:t>ed</a:t>
+            </a:r>
+            <a:endParaRPr lang="en-US" sz="1300" dirty="0"/>
+          </a:p>
+        </p:txBody>
+      </p:sp>
+      <p:sp>
+        <p:nvSpPr>
+          <p:cNvPr id="24" name="Text 22"/>
+          <p:cNvSpPr/>
+          <p:nvPr/>
+        </p:nvSpPr>
+        <p:spPr>
+          <a:xfrm>
+            <a:off x="6519672" y="2569464"/>
+            <a:ext cx="1828800" cy="201168"/>
+          </a:xfrm>
+          <a:prstGeom prst="rect">
+            <a:avLst/>
+          </a:prstGeom>
+          <a:noFill/>
+          <a:ln/>
+        </p:spPr>
+        <p:txBody>
+          <a:bodyPr wrap="square" lIns="0" tIns="0" rIns="0" bIns="0" rtlCol="0" anchor="t"/>
+          <a:lstStyle/>
+          <a:p>
+            <a:pPr algn="ctr" indent="0" marL="0">
+              <a:buNone/>
+            </a:pPr>
+            <a:r>
+              <a:rPr lang="en-US" sz="850" dirty="0">
+                <a:solidFill>
+                  <a:srgbClr val="475569"/>
+                </a:solidFill>
+                <a:latin typeface="Calibri" pitchFamily="34" charset="0"/>
+                <a:ea typeface="Calibri" pitchFamily="34" charset="-122"/>
+                <a:cs typeface="Calibri" pitchFamily="34" charset="-120"/>
+              </a:rPr>
+              <a:t>having a quality</a:t>
+            </a:r>
+            <a:endParaRPr lang="en-US" sz="850" dirty="0"/>
+          </a:p>
+        </p:txBody>
+      </p:sp>
+      <p:sp>
+        <p:nvSpPr>
+          <p:cNvPr id="25" name="Shape 23"/>
           <p:cNvSpPr/>
           <p:nvPr/>
         </p:nvSpPr>
@@ -29249,7 +29222,7 @@
       </p:sp>
       <p:sp>
         <p:nvSpPr>
-          <p:cNvPr id="23" name="Text 21"/>
+          <p:cNvPr id="26" name="Text 24"/>
           <p:cNvSpPr/>
           <p:nvPr/>
         </p:nvSpPr>
@@ -29288,7 +29261,7 @@
       </p:sp>
       <p:sp>
         <p:nvSpPr>
-          <p:cNvPr id="24" name="Shape 22"/>
+          <p:cNvPr id="27" name="Shape 25"/>
           <p:cNvSpPr/>
           <p:nvPr/>
         </p:nvSpPr>
@@ -29315,14 +29288,14 @@
       </p:sp>
       <p:sp>
         <p:nvSpPr>
-          <p:cNvPr id="25" name="Shape 23"/>
-          <p:cNvSpPr/>
-          <p:nvPr/>
-        </p:nvSpPr>
-        <p:spPr>
-          <a:xfrm>
-            <a:off x="1978152" y="3364992"/>
-            <a:ext cx="1225296" cy="475488"/>
+          <p:cNvPr id="28" name="Shape 26"/>
+          <p:cNvSpPr/>
+          <p:nvPr/>
+        </p:nvSpPr>
+        <p:spPr>
+          <a:xfrm>
+            <a:off x="1975104" y="3364992"/>
+            <a:ext cx="1554480" cy="475488"/>
           </a:xfrm>
           <a:prstGeom prst="rect">
             <a:avLst>
@@ -29342,14 +29315,14 @@
       </p:sp>
       <p:sp>
         <p:nvSpPr>
-          <p:cNvPr id="26" name="Text 24"/>
-          <p:cNvSpPr/>
-          <p:nvPr/>
-        </p:nvSpPr>
-        <p:spPr>
-          <a:xfrm>
-            <a:off x="1978152" y="3364992"/>
-            <a:ext cx="1225296" cy="475488"/>
+          <p:cNvPr id="29" name="Text 27"/>
+          <p:cNvSpPr/>
+          <p:nvPr/>
+        </p:nvSpPr>
+        <p:spPr>
+          <a:xfrm>
+            <a:off x="1975104" y="3364992"/>
+            <a:ext cx="1554480" cy="475488"/>
           </a:xfrm>
           <a:prstGeom prst="rect">
             <a:avLst/>
@@ -29381,14 +29354,14 @@
       </p:sp>
       <p:sp>
         <p:nvSpPr>
-          <p:cNvPr id="27" name="Text 25"/>
-          <p:cNvSpPr/>
-          <p:nvPr/>
-        </p:nvSpPr>
-        <p:spPr>
-          <a:xfrm>
-            <a:off x="3203448" y="3364992"/>
-            <a:ext cx="76200" cy="475488"/>
+          <p:cNvPr id="30" name="Text 28"/>
+          <p:cNvSpPr/>
+          <p:nvPr/>
+        </p:nvSpPr>
+        <p:spPr>
+          <a:xfrm>
+            <a:off x="3529584" y="3364992"/>
+            <a:ext cx="73152" cy="475488"/>
           </a:xfrm>
           <a:prstGeom prst="rect">
             <a:avLst/>
@@ -29420,14 +29393,14 @@
       </p:sp>
       <p:sp>
         <p:nvSpPr>
-          <p:cNvPr id="28" name="Shape 26"/>
-          <p:cNvSpPr/>
-          <p:nvPr/>
-        </p:nvSpPr>
-        <p:spPr>
-          <a:xfrm>
-            <a:off x="3279648" y="3364992"/>
-            <a:ext cx="1225296" cy="475488"/>
+          <p:cNvPr id="31" name="Shape 29"/>
+          <p:cNvSpPr/>
+          <p:nvPr/>
+        </p:nvSpPr>
+        <p:spPr>
+          <a:xfrm>
+            <a:off x="3602736" y="3364992"/>
+            <a:ext cx="1554480" cy="475488"/>
           </a:xfrm>
           <a:prstGeom prst="rect">
             <a:avLst>
@@ -29447,14 +29420,14 @@
       </p:sp>
       <p:sp>
         <p:nvSpPr>
-          <p:cNvPr id="29" name="Text 27"/>
-          <p:cNvSpPr/>
-          <p:nvPr/>
-        </p:nvSpPr>
-        <p:spPr>
-          <a:xfrm>
-            <a:off x="3279648" y="3364992"/>
-            <a:ext cx="1225296" cy="475488"/>
+          <p:cNvPr id="32" name="Text 30"/>
+          <p:cNvSpPr/>
+          <p:nvPr/>
+        </p:nvSpPr>
+        <p:spPr>
+          <a:xfrm>
+            <a:off x="3602736" y="3364992"/>
+            <a:ext cx="1554480" cy="475488"/>
           </a:xfrm>
           <a:prstGeom prst="rect">
             <a:avLst/>
@@ -29486,14 +29459,14 @@
       </p:sp>
       <p:sp>
         <p:nvSpPr>
-          <p:cNvPr id="30" name="Text 28"/>
-          <p:cNvSpPr/>
-          <p:nvPr/>
-        </p:nvSpPr>
-        <p:spPr>
-          <a:xfrm>
-            <a:off x="4504944" y="3364992"/>
-            <a:ext cx="76200" cy="475488"/>
+          <p:cNvPr id="33" name="Text 31"/>
+          <p:cNvSpPr/>
+          <p:nvPr/>
+        </p:nvSpPr>
+        <p:spPr>
+          <a:xfrm>
+            <a:off x="5157216" y="3364992"/>
+            <a:ext cx="73152" cy="475488"/>
           </a:xfrm>
           <a:prstGeom prst="rect">
             <a:avLst/>
@@ -29525,14 +29498,14 @@
       </p:sp>
       <p:sp>
         <p:nvSpPr>
-          <p:cNvPr id="31" name="Shape 29"/>
-          <p:cNvSpPr/>
-          <p:nvPr/>
-        </p:nvSpPr>
-        <p:spPr>
-          <a:xfrm>
-            <a:off x="4581144" y="3364992"/>
-            <a:ext cx="1225296" cy="475488"/>
+          <p:cNvPr id="34" name="Shape 32"/>
+          <p:cNvSpPr/>
+          <p:nvPr/>
+        </p:nvSpPr>
+        <p:spPr>
+          <a:xfrm>
+            <a:off x="5230368" y="3364992"/>
+            <a:ext cx="1554480" cy="475488"/>
           </a:xfrm>
           <a:prstGeom prst="rect">
             <a:avLst>
@@ -29552,14 +29525,14 @@
       </p:sp>
       <p:sp>
         <p:nvSpPr>
-          <p:cNvPr id="32" name="Text 30"/>
-          <p:cNvSpPr/>
-          <p:nvPr/>
-        </p:nvSpPr>
-        <p:spPr>
-          <a:xfrm>
-            <a:off x="4581144" y="3364992"/>
-            <a:ext cx="1225296" cy="475488"/>
+          <p:cNvPr id="35" name="Text 33"/>
+          <p:cNvSpPr/>
+          <p:nvPr/>
+        </p:nvSpPr>
+        <p:spPr>
+          <a:xfrm>
+            <a:off x="5230368" y="3364992"/>
+            <a:ext cx="1554480" cy="475488"/>
           </a:xfrm>
           <a:prstGeom prst="rect">
             <a:avLst/>
@@ -29583,7 +29556,7 @@
                 <a:ea typeface="Trebuchet MS" pitchFamily="34" charset="-122"/>
                 <a:cs typeface="Trebuchet MS" pitchFamily="34" charset="-120"/>
               </a:rPr>
-              <a:t>me</a:t>
+              <a:t>col</a:t>
             </a:r>
             <a:endParaRPr lang="en-US" sz="1400" dirty="0"/>
           </a:p>
@@ -29591,14 +29564,14 @@
       </p:sp>
       <p:sp>
         <p:nvSpPr>
-          <p:cNvPr id="33" name="Text 31"/>
-          <p:cNvSpPr/>
-          <p:nvPr/>
-        </p:nvSpPr>
-        <p:spPr>
-          <a:xfrm>
-            <a:off x="5806440" y="3364992"/>
-            <a:ext cx="76200" cy="475488"/>
+          <p:cNvPr id="36" name="Text 34"/>
+          <p:cNvSpPr/>
+          <p:nvPr/>
+        </p:nvSpPr>
+        <p:spPr>
+          <a:xfrm>
+            <a:off x="6784848" y="3364992"/>
+            <a:ext cx="73152" cy="475488"/>
           </a:xfrm>
           <a:prstGeom prst="rect">
             <a:avLst/>
@@ -29630,14 +29603,14 @@
       </p:sp>
       <p:sp>
         <p:nvSpPr>
-          <p:cNvPr id="34" name="Shape 32"/>
-          <p:cNvSpPr/>
-          <p:nvPr/>
-        </p:nvSpPr>
-        <p:spPr>
-          <a:xfrm>
-            <a:off x="5882640" y="3364992"/>
-            <a:ext cx="1225296" cy="475488"/>
+          <p:cNvPr id="37" name="Shape 35"/>
+          <p:cNvSpPr/>
+          <p:nvPr/>
+        </p:nvSpPr>
+        <p:spPr>
+          <a:xfrm>
+            <a:off x="6858000" y="3364992"/>
+            <a:ext cx="1554480" cy="475488"/>
           </a:xfrm>
           <a:prstGeom prst="rect">
             <a:avLst>
@@ -29657,14 +29630,14 @@
       </p:sp>
       <p:sp>
         <p:nvSpPr>
-          <p:cNvPr id="35" name="Text 33"/>
-          <p:cNvSpPr/>
-          <p:nvPr/>
-        </p:nvSpPr>
-        <p:spPr>
-          <a:xfrm>
-            <a:off x="5882640" y="3364992"/>
-            <a:ext cx="1225296" cy="475488"/>
+          <p:cNvPr id="38" name="Text 36"/>
+          <p:cNvSpPr/>
+          <p:nvPr/>
+        </p:nvSpPr>
+        <p:spPr>
+          <a:xfrm>
+            <a:off x="6858000" y="3364992"/>
+            <a:ext cx="1554480" cy="475488"/>
           </a:xfrm>
           <a:prstGeom prst="rect">
             <a:avLst/>
@@ -29688,7 +29661,7 @@
                 <a:ea typeface="Trebuchet MS" pitchFamily="34" charset="-122"/>
                 <a:cs typeface="Trebuchet MS" pitchFamily="34" charset="-120"/>
               </a:rPr>
-              <a:t>di</a:t>
+              <a:t>oured</a:t>
             </a:r>
             <a:endParaRPr lang="en-US" sz="1400" dirty="0"/>
           </a:p>
@@ -29696,193 +29669,247 @@
       </p:sp>
       <p:sp>
         <p:nvSpPr>
-          <p:cNvPr id="36" name="Text 34"/>
-          <p:cNvSpPr/>
-          <p:nvPr/>
-        </p:nvSpPr>
-        <p:spPr>
-          <a:xfrm>
-            <a:off x="7107936" y="3364992"/>
-            <a:ext cx="76200" cy="475488"/>
-          </a:xfrm>
-          <a:prstGeom prst="rect">
-            <a:avLst/>
-          </a:prstGeom>
-          <a:noFill/>
-          <a:ln/>
-        </p:spPr>
-        <p:txBody>
-          <a:bodyPr wrap="square" lIns="0" tIns="0" rIns="0" bIns="0" rtlCol="0" anchor="ctr"/>
-          <a:lstStyle/>
-          <a:p>
-            <a:pPr algn="ctr" indent="0" marL="0">
-              <a:buNone/>
-            </a:pPr>
-            <a:r>
-              <a:rPr lang="en-US" sz="1600" b="1" dirty="0">
-                <a:solidFill>
-                  <a:srgbClr val="0D9488"/>
+          <p:cNvPr id="39" name="Shape 37"/>
+          <p:cNvSpPr/>
+          <p:nvPr/>
+        </p:nvSpPr>
+        <p:spPr>
+          <a:xfrm>
+            <a:off x="365760" y="4096512"/>
+            <a:ext cx="1371600" cy="804672"/>
+          </a:xfrm>
+          <a:prstGeom prst="rect">
+            <a:avLst>
+              <a:gd name="adj" fmla="val 6818"/>
+            </a:avLst>
+          </a:prstGeom>
+          <a:solidFill>
+            <a:srgbClr val="E2E8F0"/>
+          </a:solidFill>
+          <a:ln w="12700">
+            <a:solidFill>
+              <a:srgbClr val="E2E8F0"/>
+            </a:solidFill>
+            <a:prstDash val="solid"/>
+          </a:ln>
+        </p:spPr>
+      </p:sp>
+      <p:sp>
+        <p:nvSpPr>
+          <p:cNvPr id="40" name="Text 38"/>
+          <p:cNvSpPr/>
+          <p:nvPr/>
+        </p:nvSpPr>
+        <p:spPr>
+          <a:xfrm>
+            <a:off x="365760" y="4096512"/>
+            <a:ext cx="1371600" cy="804672"/>
+          </a:xfrm>
+          <a:prstGeom prst="rect">
+            <a:avLst/>
+          </a:prstGeom>
+          <a:noFill/>
+          <a:ln/>
+        </p:spPr>
+        <p:txBody>
+          <a:bodyPr wrap="square" lIns="0" tIns="0" rIns="0" bIns="0" rtlCol="0" anchor="ctr"/>
+          <a:lstStyle/>
+          <a:p>
+            <a:pPr algn="ctr" indent="0" marL="0">
+              <a:buNone/>
+            </a:pPr>
+            <a:r>
+              <a:rPr lang="en-US" sz="1100" b="1" dirty="0">
+                <a:solidFill>
+                  <a:srgbClr val="475569"/>
                 </a:solidFill>
                 <a:latin typeface="Trebuchet MS" pitchFamily="34" charset="0"/>
                 <a:ea typeface="Trebuchet MS" pitchFamily="34" charset="-122"/>
                 <a:cs typeface="Trebuchet MS" pitchFamily="34" charset="-120"/>
               </a:rPr>
-              <a:t>·</a:t>
-            </a:r>
-            <a:endParaRPr lang="en-US" sz="1600" dirty="0"/>
-          </a:p>
-        </p:txBody>
-      </p:sp>
-      <p:sp>
-        <p:nvSpPr>
-          <p:cNvPr id="37" name="Shape 35"/>
-          <p:cNvSpPr/>
-          <p:nvPr/>
-        </p:nvSpPr>
-        <p:spPr>
-          <a:xfrm>
-            <a:off x="7184136" y="3364992"/>
-            <a:ext cx="1225296" cy="475488"/>
+              <a:t>Phonemes</a:t>
+            </a:r>
+            <a:endParaRPr lang="en-US" sz="1100" dirty="0"/>
+          </a:p>
+        </p:txBody>
+      </p:sp>
+      <p:sp>
+        <p:nvSpPr>
+          <p:cNvPr id="41" name="Shape 39"/>
+          <p:cNvSpPr/>
+          <p:nvPr/>
+        </p:nvSpPr>
+        <p:spPr>
+          <a:xfrm>
+            <a:off x="1874520" y="4096512"/>
+            <a:ext cx="6903720" cy="804672"/>
           </a:xfrm>
           <a:prstGeom prst="rect">
             <a:avLst>
-              <a:gd name="adj" fmla="val 9615"/>
+              <a:gd name="adj" fmla="val 6818"/>
             </a:avLst>
           </a:prstGeom>
           <a:solidFill>
+            <a:srgbClr val="FCE7F3"/>
+          </a:solidFill>
+          <a:ln w="12700">
+            <a:solidFill>
+              <a:srgbClr val="DB2777"/>
+            </a:solidFill>
+            <a:prstDash val="solid"/>
+          </a:ln>
+        </p:spPr>
+      </p:sp>
+      <p:sp>
+        <p:nvSpPr>
+          <p:cNvPr id="42" name="Shape 40"/>
+          <p:cNvSpPr/>
+          <p:nvPr/>
+        </p:nvSpPr>
+        <p:spPr>
+          <a:xfrm>
+            <a:off x="1951828" y="4169664"/>
+            <a:ext cx="603504" cy="384048"/>
+          </a:xfrm>
+          <a:prstGeom prst="rect">
+            <a:avLst>
+              <a:gd name="adj" fmla="val 9524"/>
+            </a:avLst>
+          </a:prstGeom>
+          <a:solidFill>
             <a:srgbClr val="FFFFFF"/>
           </a:solidFill>
           <a:ln w="12700">
             <a:solidFill>
-              <a:srgbClr val="0D9488"/>
-            </a:solidFill>
-            <a:prstDash val="solid"/>
-          </a:ln>
-        </p:spPr>
-      </p:sp>
-      <p:sp>
-        <p:nvSpPr>
-          <p:cNvPr id="38" name="Text 36"/>
-          <p:cNvSpPr/>
-          <p:nvPr/>
-        </p:nvSpPr>
-        <p:spPr>
-          <a:xfrm>
-            <a:off x="7184136" y="3364992"/>
-            <a:ext cx="1225296" cy="475488"/>
-          </a:xfrm>
-          <a:prstGeom prst="rect">
-            <a:avLst/>
-          </a:prstGeom>
-          <a:noFill/>
-          <a:ln/>
-        </p:spPr>
-        <p:txBody>
-          <a:bodyPr wrap="square" lIns="0" tIns="0" rIns="0" bIns="0" rtlCol="0" anchor="ctr"/>
-          <a:lstStyle/>
-          <a:p>
-            <a:pPr algn="ctr" indent="0" marL="0">
-              <a:buNone/>
-            </a:pPr>
-            <a:r>
-              <a:rPr lang="en-US" sz="1400" b="1" dirty="0">
-                <a:solidFill>
-                  <a:srgbClr val="0D9488"/>
+              <a:srgbClr val="DB2777"/>
+            </a:solidFill>
+            <a:prstDash val="solid"/>
+          </a:ln>
+        </p:spPr>
+      </p:sp>
+      <p:sp>
+        <p:nvSpPr>
+          <p:cNvPr id="43" name="Text 41"/>
+          <p:cNvSpPr/>
+          <p:nvPr/>
+        </p:nvSpPr>
+        <p:spPr>
+          <a:xfrm>
+            <a:off x="1951828" y="4169664"/>
+            <a:ext cx="603504" cy="384048"/>
+          </a:xfrm>
+          <a:prstGeom prst="rect">
+            <a:avLst/>
+          </a:prstGeom>
+          <a:noFill/>
+          <a:ln/>
+        </p:spPr>
+        <p:txBody>
+          <a:bodyPr wrap="square" lIns="0" tIns="0" rIns="0" bIns="0" rtlCol="0" anchor="ctr"/>
+          <a:lstStyle/>
+          <a:p>
+            <a:pPr algn="ctr" indent="0" marL="0">
+              <a:buNone/>
+            </a:pPr>
+            <a:r>
+              <a:rPr lang="en-US" sz="900" b="1" dirty="0">
+                <a:solidFill>
+                  <a:srgbClr val="9D174D"/>
                 </a:solidFill>
                 <a:latin typeface="Trebuchet MS" pitchFamily="34" charset="0"/>
                 <a:ea typeface="Trebuchet MS" pitchFamily="34" charset="-122"/>
                 <a:cs typeface="Trebuchet MS" pitchFamily="34" charset="-120"/>
               </a:rPr>
-              <a:t>a</a:t>
-            </a:r>
-            <a:endParaRPr lang="en-US" sz="1400" dirty="0"/>
-          </a:p>
-        </p:txBody>
-      </p:sp>
-      <p:sp>
-        <p:nvSpPr>
-          <p:cNvPr id="39" name="Shape 37"/>
-          <p:cNvSpPr/>
-          <p:nvPr/>
-        </p:nvSpPr>
-        <p:spPr>
-          <a:xfrm>
-            <a:off x="365760" y="4096512"/>
-            <a:ext cx="1371600" cy="804672"/>
+              <a:t>m</a:t>
+            </a:r>
+            <a:endParaRPr lang="en-US" sz="900" dirty="0"/>
+          </a:p>
+        </p:txBody>
+      </p:sp>
+      <p:sp>
+        <p:nvSpPr>
+          <p:cNvPr id="44" name="Shape 42"/>
+          <p:cNvSpPr/>
+          <p:nvPr/>
+        </p:nvSpPr>
+        <p:spPr>
+          <a:xfrm>
+            <a:off x="2605209" y="4169664"/>
+            <a:ext cx="603504" cy="384048"/>
           </a:xfrm>
           <a:prstGeom prst="rect">
             <a:avLst>
-              <a:gd name="adj" fmla="val 6818"/>
+              <a:gd name="adj" fmla="val 9524"/>
             </a:avLst>
           </a:prstGeom>
           <a:solidFill>
-            <a:srgbClr val="E2E8F0"/>
-          </a:solidFill>
-          <a:ln w="12700">
-            <a:solidFill>
-              <a:srgbClr val="E2E8F0"/>
-            </a:solidFill>
-            <a:prstDash val="solid"/>
-          </a:ln>
-        </p:spPr>
-      </p:sp>
-      <p:sp>
-        <p:nvSpPr>
-          <p:cNvPr id="40" name="Text 38"/>
-          <p:cNvSpPr/>
-          <p:nvPr/>
-        </p:nvSpPr>
-        <p:spPr>
-          <a:xfrm>
-            <a:off x="365760" y="4096512"/>
-            <a:ext cx="1371600" cy="804672"/>
-          </a:xfrm>
-          <a:prstGeom prst="rect">
-            <a:avLst/>
-          </a:prstGeom>
-          <a:noFill/>
-          <a:ln/>
-        </p:spPr>
-        <p:txBody>
-          <a:bodyPr wrap="square" lIns="0" tIns="0" rIns="0" bIns="0" rtlCol="0" anchor="ctr"/>
-          <a:lstStyle/>
-          <a:p>
-            <a:pPr algn="ctr" indent="0" marL="0">
-              <a:buNone/>
-            </a:pPr>
-            <a:r>
-              <a:rPr lang="en-US" sz="1100" b="1" dirty="0">
-                <a:solidFill>
-                  <a:srgbClr val="475569"/>
+            <a:srgbClr val="FFFFFF"/>
+          </a:solidFill>
+          <a:ln w="12700">
+            <a:solidFill>
+              <a:srgbClr val="DB2777"/>
+            </a:solidFill>
+            <a:prstDash val="solid"/>
+          </a:ln>
+        </p:spPr>
+      </p:sp>
+      <p:sp>
+        <p:nvSpPr>
+          <p:cNvPr id="45" name="Text 43"/>
+          <p:cNvSpPr/>
+          <p:nvPr/>
+        </p:nvSpPr>
+        <p:spPr>
+          <a:xfrm>
+            <a:off x="2605209" y="4169664"/>
+            <a:ext cx="603504" cy="384048"/>
+          </a:xfrm>
+          <a:prstGeom prst="rect">
+            <a:avLst/>
+          </a:prstGeom>
+          <a:noFill/>
+          <a:ln/>
+        </p:spPr>
+        <p:txBody>
+          <a:bodyPr wrap="square" lIns="0" tIns="0" rIns="0" bIns="0" rtlCol="0" anchor="ctr"/>
+          <a:lstStyle/>
+          <a:p>
+            <a:pPr algn="ctr" indent="0" marL="0">
+              <a:buNone/>
+            </a:pPr>
+            <a:r>
+              <a:rPr lang="en-US" sz="900" b="1" dirty="0">
+                <a:solidFill>
+                  <a:srgbClr val="9D174D"/>
                 </a:solidFill>
                 <a:latin typeface="Trebuchet MS" pitchFamily="34" charset="0"/>
                 <a:ea typeface="Trebuchet MS" pitchFamily="34" charset="-122"/>
                 <a:cs typeface="Trebuchet MS" pitchFamily="34" charset="-120"/>
               </a:rPr>
-              <a:t>Phonemes</a:t>
-            </a:r>
-            <a:endParaRPr lang="en-US" sz="1100" dirty="0"/>
-          </a:p>
-        </p:txBody>
-      </p:sp>
-      <p:sp>
-        <p:nvSpPr>
-          <p:cNvPr id="41" name="Shape 39"/>
-          <p:cNvSpPr/>
-          <p:nvPr/>
-        </p:nvSpPr>
-        <p:spPr>
-          <a:xfrm>
-            <a:off x="1874520" y="4096512"/>
-            <a:ext cx="6903720" cy="658368"/>
+              <a:t>u</a:t>
+            </a:r>
+            <a:endParaRPr lang="en-US" sz="900" dirty="0"/>
+          </a:p>
+        </p:txBody>
+      </p:sp>
+      <p:sp>
+        <p:nvSpPr>
+          <p:cNvPr id="46" name="Shape 44"/>
+          <p:cNvSpPr/>
+          <p:nvPr/>
+        </p:nvSpPr>
+        <p:spPr>
+          <a:xfrm>
+            <a:off x="3258589" y="4169664"/>
+            <a:ext cx="603504" cy="384048"/>
           </a:xfrm>
           <a:prstGeom prst="rect">
             <a:avLst>
-              <a:gd name="adj" fmla="val 8333"/>
+              <a:gd name="adj" fmla="val 9524"/>
             </a:avLst>
           </a:prstGeom>
           <a:solidFill>
-            <a:srgbClr val="FCE7F3"/>
+            <a:srgbClr val="FFFFFF"/>
           </a:solidFill>
           <a:ln w="12700">
             <a:solidFill>
@@ -29894,41 +29921,14 @@
       </p:sp>
       <p:sp>
         <p:nvSpPr>
-          <p:cNvPr id="42" name="Shape 40"/>
-          <p:cNvSpPr/>
-          <p:nvPr/>
-        </p:nvSpPr>
-        <p:spPr>
-          <a:xfrm>
-            <a:off x="1951828" y="4169664"/>
-            <a:ext cx="603504" cy="475488"/>
-          </a:xfrm>
-          <a:prstGeom prst="rect">
-            <a:avLst>
-              <a:gd name="adj" fmla="val 7692"/>
-            </a:avLst>
-          </a:prstGeom>
-          <a:solidFill>
-            <a:srgbClr val="FFFFFF"/>
-          </a:solidFill>
-          <a:ln w="12700">
-            <a:solidFill>
-              <a:srgbClr val="DB2777"/>
-            </a:solidFill>
-            <a:prstDash val="solid"/>
-          </a:ln>
-        </p:spPr>
-      </p:sp>
-      <p:sp>
-        <p:nvSpPr>
-          <p:cNvPr id="43" name="Text 41"/>
-          <p:cNvSpPr/>
-          <p:nvPr/>
-        </p:nvSpPr>
-        <p:spPr>
-          <a:xfrm>
-            <a:off x="1951828" y="4169664"/>
-            <a:ext cx="603504" cy="475488"/>
+          <p:cNvPr id="47" name="Text 45"/>
+          <p:cNvSpPr/>
+          <p:nvPr/>
+        </p:nvSpPr>
+        <p:spPr>
+          <a:xfrm>
+            <a:off x="3258589" y="4169664"/>
+            <a:ext cx="603504" cy="384048"/>
           </a:xfrm>
           <a:prstGeom prst="rect">
             <a:avLst/>
@@ -29952,7 +29952,7 @@
                 <a:ea typeface="Trebuchet MS" pitchFamily="34" charset="-122"/>
                 <a:cs typeface="Trebuchet MS" pitchFamily="34" charset="-120"/>
               </a:rPr>
-              <a:t>m</a:t>
+              <a:t>l</a:t>
             </a:r>
             <a:endParaRPr lang="en-US" sz="900" dirty="0"/>
           </a:p>
@@ -29960,18 +29960,18 @@
       </p:sp>
       <p:sp>
         <p:nvSpPr>
-          <p:cNvPr id="44" name="Shape 42"/>
-          <p:cNvSpPr/>
-          <p:nvPr/>
-        </p:nvSpPr>
-        <p:spPr>
-          <a:xfrm>
-            <a:off x="2605209" y="4169664"/>
-            <a:ext cx="603504" cy="475488"/>
+          <p:cNvPr id="48" name="Shape 46"/>
+          <p:cNvSpPr/>
+          <p:nvPr/>
+        </p:nvSpPr>
+        <p:spPr>
+          <a:xfrm>
+            <a:off x="3911969" y="4169664"/>
+            <a:ext cx="603504" cy="384048"/>
           </a:xfrm>
           <a:prstGeom prst="rect">
             <a:avLst>
-              <a:gd name="adj" fmla="val 7692"/>
+              <a:gd name="adj" fmla="val 9524"/>
             </a:avLst>
           </a:prstGeom>
           <a:solidFill>
@@ -29987,14 +29987,14 @@
       </p:sp>
       <p:sp>
         <p:nvSpPr>
-          <p:cNvPr id="45" name="Text 43"/>
-          <p:cNvSpPr/>
-          <p:nvPr/>
-        </p:nvSpPr>
-        <p:spPr>
-          <a:xfrm>
-            <a:off x="2605209" y="4169664"/>
-            <a:ext cx="603504" cy="475488"/>
+          <p:cNvPr id="49" name="Text 47"/>
+          <p:cNvSpPr/>
+          <p:nvPr/>
+        </p:nvSpPr>
+        <p:spPr>
+          <a:xfrm>
+            <a:off x="3911969" y="4169664"/>
+            <a:ext cx="603504" cy="384048"/>
           </a:xfrm>
           <a:prstGeom prst="rect">
             <a:avLst/>
@@ -30018,7 +30018,7 @@
                 <a:ea typeface="Trebuchet MS" pitchFamily="34" charset="-122"/>
                 <a:cs typeface="Trebuchet MS" pitchFamily="34" charset="-120"/>
               </a:rPr>
-              <a:t>u</a:t>
+              <a:t>t</a:t>
             </a:r>
             <a:endParaRPr lang="en-US" sz="900" dirty="0"/>
           </a:p>
@@ -30026,18 +30026,18 @@
       </p:sp>
       <p:sp>
         <p:nvSpPr>
-          <p:cNvPr id="46" name="Shape 44"/>
-          <p:cNvSpPr/>
-          <p:nvPr/>
-        </p:nvSpPr>
-        <p:spPr>
-          <a:xfrm>
-            <a:off x="3258589" y="4169664"/>
-            <a:ext cx="603504" cy="475488"/>
+          <p:cNvPr id="50" name="Shape 48"/>
+          <p:cNvSpPr/>
+          <p:nvPr/>
+        </p:nvSpPr>
+        <p:spPr>
+          <a:xfrm>
+            <a:off x="4565350" y="4169664"/>
+            <a:ext cx="603504" cy="384048"/>
           </a:xfrm>
           <a:prstGeom prst="rect">
             <a:avLst>
-              <a:gd name="adj" fmla="val 7692"/>
+              <a:gd name="adj" fmla="val 9524"/>
             </a:avLst>
           </a:prstGeom>
           <a:solidFill>
@@ -30053,14 +30053,14 @@
       </p:sp>
       <p:sp>
         <p:nvSpPr>
-          <p:cNvPr id="47" name="Text 45"/>
-          <p:cNvSpPr/>
-          <p:nvPr/>
-        </p:nvSpPr>
-        <p:spPr>
-          <a:xfrm>
-            <a:off x="3258589" y="4169664"/>
-            <a:ext cx="603504" cy="475488"/>
+          <p:cNvPr id="51" name="Text 49"/>
+          <p:cNvSpPr/>
+          <p:nvPr/>
+        </p:nvSpPr>
+        <p:spPr>
+          <a:xfrm>
+            <a:off x="4565350" y="4169664"/>
+            <a:ext cx="603504" cy="384048"/>
           </a:xfrm>
           <a:prstGeom prst="rect">
             <a:avLst/>
@@ -30084,7 +30084,7 @@
                 <a:ea typeface="Trebuchet MS" pitchFamily="34" charset="-122"/>
                 <a:cs typeface="Trebuchet MS" pitchFamily="34" charset="-120"/>
               </a:rPr>
-              <a:t>l</a:t>
+              <a:t>i</a:t>
             </a:r>
             <a:endParaRPr lang="en-US" sz="900" dirty="0"/>
           </a:p>
@@ -30092,18 +30092,18 @@
       </p:sp>
       <p:sp>
         <p:nvSpPr>
-          <p:cNvPr id="48" name="Shape 46"/>
-          <p:cNvSpPr/>
-          <p:nvPr/>
-        </p:nvSpPr>
-        <p:spPr>
-          <a:xfrm>
-            <a:off x="3911969" y="4169664"/>
-            <a:ext cx="603504" cy="475488"/>
+          <p:cNvPr id="52" name="Shape 50"/>
+          <p:cNvSpPr/>
+          <p:nvPr/>
+        </p:nvSpPr>
+        <p:spPr>
+          <a:xfrm>
+            <a:off x="5218730" y="4169664"/>
+            <a:ext cx="603504" cy="384048"/>
           </a:xfrm>
           <a:prstGeom prst="rect">
             <a:avLst>
-              <a:gd name="adj" fmla="val 7692"/>
+              <a:gd name="adj" fmla="val 9524"/>
             </a:avLst>
           </a:prstGeom>
           <a:solidFill>
@@ -30119,14 +30119,14 @@
       </p:sp>
       <p:sp>
         <p:nvSpPr>
-          <p:cNvPr id="49" name="Text 47"/>
-          <p:cNvSpPr/>
-          <p:nvPr/>
-        </p:nvSpPr>
-        <p:spPr>
-          <a:xfrm>
-            <a:off x="3911969" y="4169664"/>
-            <a:ext cx="603504" cy="475488"/>
+          <p:cNvPr id="53" name="Text 51"/>
+          <p:cNvSpPr/>
+          <p:nvPr/>
+        </p:nvSpPr>
+        <p:spPr>
+          <a:xfrm>
+            <a:off x="5218730" y="4169664"/>
+            <a:ext cx="603504" cy="384048"/>
           </a:xfrm>
           <a:prstGeom prst="rect">
             <a:avLst/>
@@ -30150,7 +30150,7 @@
                 <a:ea typeface="Trebuchet MS" pitchFamily="34" charset="-122"/>
                 <a:cs typeface="Trebuchet MS" pitchFamily="34" charset="-120"/>
               </a:rPr>
-              <a:t>t</a:t>
+              <a:t>c</a:t>
             </a:r>
             <a:endParaRPr lang="en-US" sz="900" dirty="0"/>
           </a:p>
@@ -30158,18 +30158,57 @@
       </p:sp>
       <p:sp>
         <p:nvSpPr>
-          <p:cNvPr id="50" name="Shape 48"/>
-          <p:cNvSpPr/>
-          <p:nvPr/>
-        </p:nvSpPr>
-        <p:spPr>
-          <a:xfrm>
-            <a:off x="4565350" y="4169664"/>
-            <a:ext cx="603504" cy="475488"/>
+          <p:cNvPr id="54" name="Text 52"/>
+          <p:cNvSpPr/>
+          <p:nvPr/>
+        </p:nvSpPr>
+        <p:spPr>
+          <a:xfrm>
+            <a:off x="5218730" y="4572000"/>
+            <a:ext cx="603504" cy="219456"/>
+          </a:xfrm>
+          <a:prstGeom prst="rect">
+            <a:avLst/>
+          </a:prstGeom>
+          <a:noFill/>
+          <a:ln/>
+        </p:spPr>
+        <p:txBody>
+          <a:bodyPr wrap="square" lIns="0" tIns="0" rIns="0" bIns="0" rtlCol="0" anchor="t"/>
+          <a:lstStyle/>
+          <a:p>
+            <a:pPr algn="ctr" indent="0" marL="0">
+              <a:buNone/>
+            </a:pPr>
+            <a:r>
+              <a:rPr lang="en-US" sz="750" i="1" dirty="0">
+                <a:solidFill>
+                  <a:srgbClr val="94A3B8"/>
+                </a:solidFill>
+                <a:latin typeface="Calibri" pitchFamily="34" charset="0"/>
+                <a:ea typeface="Calibri" pitchFamily="34" charset="-122"/>
+                <a:cs typeface="Calibri" pitchFamily="34" charset="-120"/>
+              </a:rPr>
+              <a:t>/k/</a:t>
+            </a:r>
+            <a:endParaRPr lang="en-US" sz="750" dirty="0"/>
+          </a:p>
+        </p:txBody>
+      </p:sp>
+      <p:sp>
+        <p:nvSpPr>
+          <p:cNvPr id="55" name="Shape 53"/>
+          <p:cNvSpPr/>
+          <p:nvPr/>
+        </p:nvSpPr>
+        <p:spPr>
+          <a:xfrm>
+            <a:off x="5872111" y="4169664"/>
+            <a:ext cx="603504" cy="384048"/>
           </a:xfrm>
           <a:prstGeom prst="rect">
             <a:avLst>
-              <a:gd name="adj" fmla="val 7692"/>
+              <a:gd name="adj" fmla="val 9524"/>
             </a:avLst>
           </a:prstGeom>
           <a:solidFill>
@@ -30185,14 +30224,14 @@
       </p:sp>
       <p:sp>
         <p:nvSpPr>
-          <p:cNvPr id="51" name="Text 49"/>
-          <p:cNvSpPr/>
-          <p:nvPr/>
-        </p:nvSpPr>
-        <p:spPr>
-          <a:xfrm>
-            <a:off x="4565350" y="4169664"/>
-            <a:ext cx="603504" cy="475488"/>
+          <p:cNvPr id="56" name="Text 54"/>
+          <p:cNvSpPr/>
+          <p:nvPr/>
+        </p:nvSpPr>
+        <p:spPr>
+          <a:xfrm>
+            <a:off x="5872111" y="4169664"/>
+            <a:ext cx="603504" cy="384048"/>
           </a:xfrm>
           <a:prstGeom prst="rect">
             <a:avLst/>
@@ -30216,7 +30255,7 @@
                 <a:ea typeface="Trebuchet MS" pitchFamily="34" charset="-122"/>
                 <a:cs typeface="Trebuchet MS" pitchFamily="34" charset="-120"/>
               </a:rPr>
-              <a:t>i</a:t>
+              <a:t>o</a:t>
             </a:r>
             <a:endParaRPr lang="en-US" sz="900" dirty="0"/>
           </a:p>
@@ -30224,18 +30263,18 @@
       </p:sp>
       <p:sp>
         <p:nvSpPr>
-          <p:cNvPr id="52" name="Shape 50"/>
-          <p:cNvSpPr/>
-          <p:nvPr/>
-        </p:nvSpPr>
-        <p:spPr>
-          <a:xfrm>
-            <a:off x="5218730" y="4169664"/>
-            <a:ext cx="603504" cy="475488"/>
+          <p:cNvPr id="57" name="Shape 55"/>
+          <p:cNvSpPr/>
+          <p:nvPr/>
+        </p:nvSpPr>
+        <p:spPr>
+          <a:xfrm>
+            <a:off x="6525491" y="4169664"/>
+            <a:ext cx="603504" cy="384048"/>
           </a:xfrm>
           <a:prstGeom prst="rect">
             <a:avLst>
-              <a:gd name="adj" fmla="val 7692"/>
+              <a:gd name="adj" fmla="val 9524"/>
             </a:avLst>
           </a:prstGeom>
           <a:solidFill>
@@ -30251,14 +30290,14 @@
       </p:sp>
       <p:sp>
         <p:nvSpPr>
-          <p:cNvPr id="53" name="Text 51"/>
-          <p:cNvSpPr/>
-          <p:nvPr/>
-        </p:nvSpPr>
-        <p:spPr>
-          <a:xfrm>
-            <a:off x="5218730" y="4169664"/>
-            <a:ext cx="603504" cy="475488"/>
+          <p:cNvPr id="58" name="Text 56"/>
+          <p:cNvSpPr/>
+          <p:nvPr/>
+        </p:nvSpPr>
+        <p:spPr>
+          <a:xfrm>
+            <a:off x="6525491" y="4169664"/>
+            <a:ext cx="603504" cy="384048"/>
           </a:xfrm>
           <a:prstGeom prst="rect">
             <a:avLst/>
@@ -30282,7 +30321,7 @@
                 <a:ea typeface="Trebuchet MS" pitchFamily="34" charset="-122"/>
                 <a:cs typeface="Trebuchet MS" pitchFamily="34" charset="-120"/>
               </a:rPr>
-              <a:t>m</a:t>
+              <a:t>l</a:t>
             </a:r>
             <a:endParaRPr lang="en-US" sz="900" dirty="0"/>
           </a:p>
@@ -30290,18 +30329,18 @@
       </p:sp>
       <p:sp>
         <p:nvSpPr>
-          <p:cNvPr id="54" name="Shape 52"/>
-          <p:cNvSpPr/>
-          <p:nvPr/>
-        </p:nvSpPr>
-        <p:spPr>
-          <a:xfrm>
-            <a:off x="5872111" y="4169664"/>
-            <a:ext cx="603504" cy="475488"/>
+          <p:cNvPr id="59" name="Shape 57"/>
+          <p:cNvSpPr/>
+          <p:nvPr/>
+        </p:nvSpPr>
+        <p:spPr>
+          <a:xfrm>
+            <a:off x="7178871" y="4169664"/>
+            <a:ext cx="603504" cy="384048"/>
           </a:xfrm>
           <a:prstGeom prst="rect">
             <a:avLst>
-              <a:gd name="adj" fmla="val 7692"/>
+              <a:gd name="adj" fmla="val 9524"/>
             </a:avLst>
           </a:prstGeom>
           <a:solidFill>
@@ -30317,14 +30356,14 @@
       </p:sp>
       <p:sp>
         <p:nvSpPr>
-          <p:cNvPr id="55" name="Text 53"/>
-          <p:cNvSpPr/>
-          <p:nvPr/>
-        </p:nvSpPr>
-        <p:spPr>
-          <a:xfrm>
-            <a:off x="5872111" y="4169664"/>
-            <a:ext cx="603504" cy="475488"/>
+          <p:cNvPr id="60" name="Text 58"/>
+          <p:cNvSpPr/>
+          <p:nvPr/>
+        </p:nvSpPr>
+        <p:spPr>
+          <a:xfrm>
+            <a:off x="7178871" y="4169664"/>
+            <a:ext cx="603504" cy="384048"/>
           </a:xfrm>
           <a:prstGeom prst="rect">
             <a:avLst/>
@@ -30348,7 +30387,7 @@
                 <a:ea typeface="Trebuchet MS" pitchFamily="34" charset="-122"/>
                 <a:cs typeface="Trebuchet MS" pitchFamily="34" charset="-120"/>
               </a:rPr>
-              <a:t>e</a:t>
+              <a:t>our</a:t>
             </a:r>
             <a:endParaRPr lang="en-US" sz="900" dirty="0"/>
           </a:p>
@@ -30356,18 +30395,18 @@
       </p:sp>
       <p:sp>
         <p:nvSpPr>
-          <p:cNvPr id="56" name="Shape 54"/>
-          <p:cNvSpPr/>
-          <p:nvPr/>
-        </p:nvSpPr>
-        <p:spPr>
-          <a:xfrm>
-            <a:off x="6525491" y="4169664"/>
-            <a:ext cx="603504" cy="475488"/>
+          <p:cNvPr id="61" name="Shape 59"/>
+          <p:cNvSpPr/>
+          <p:nvPr/>
+        </p:nvSpPr>
+        <p:spPr>
+          <a:xfrm>
+            <a:off x="7832252" y="4169664"/>
+            <a:ext cx="603504" cy="384048"/>
           </a:xfrm>
           <a:prstGeom prst="rect">
             <a:avLst>
-              <a:gd name="adj" fmla="val 7692"/>
+              <a:gd name="adj" fmla="val 9524"/>
             </a:avLst>
           </a:prstGeom>
           <a:solidFill>
@@ -30383,14 +30422,14 @@
       </p:sp>
       <p:sp>
         <p:nvSpPr>
-          <p:cNvPr id="57" name="Text 55"/>
-          <p:cNvSpPr/>
-          <p:nvPr/>
-        </p:nvSpPr>
-        <p:spPr>
-          <a:xfrm>
-            <a:off x="6525491" y="4169664"/>
-            <a:ext cx="603504" cy="475488"/>
+          <p:cNvPr id="62" name="Text 60"/>
+          <p:cNvSpPr/>
+          <p:nvPr/>
+        </p:nvSpPr>
+        <p:spPr>
+          <a:xfrm>
+            <a:off x="7832252" y="4169664"/>
+            <a:ext cx="603504" cy="384048"/>
           </a:xfrm>
           <a:prstGeom prst="rect">
             <a:avLst/>
@@ -30414,139 +30453,7 @@
                 <a:ea typeface="Trebuchet MS" pitchFamily="34" charset="-122"/>
                 <a:cs typeface="Trebuchet MS" pitchFamily="34" charset="-120"/>
               </a:rPr>
-              <a:t>d</a:t>
-            </a:r>
-            <a:endParaRPr lang="en-US" sz="900" dirty="0"/>
-          </a:p>
-        </p:txBody>
-      </p:sp>
-      <p:sp>
-        <p:nvSpPr>
-          <p:cNvPr id="58" name="Shape 56"/>
-          <p:cNvSpPr/>
-          <p:nvPr/>
-        </p:nvSpPr>
-        <p:spPr>
-          <a:xfrm>
-            <a:off x="7178871" y="4169664"/>
-            <a:ext cx="603504" cy="475488"/>
-          </a:xfrm>
-          <a:prstGeom prst="rect">
-            <a:avLst>
-              <a:gd name="adj" fmla="val 7692"/>
-            </a:avLst>
-          </a:prstGeom>
-          <a:solidFill>
-            <a:srgbClr val="FFFFFF"/>
-          </a:solidFill>
-          <a:ln w="12700">
-            <a:solidFill>
-              <a:srgbClr val="DB2777"/>
-            </a:solidFill>
-            <a:prstDash val="solid"/>
-          </a:ln>
-        </p:spPr>
-      </p:sp>
-      <p:sp>
-        <p:nvSpPr>
-          <p:cNvPr id="59" name="Text 57"/>
-          <p:cNvSpPr/>
-          <p:nvPr/>
-        </p:nvSpPr>
-        <p:spPr>
-          <a:xfrm>
-            <a:off x="7178871" y="4169664"/>
-            <a:ext cx="603504" cy="475488"/>
-          </a:xfrm>
-          <a:prstGeom prst="rect">
-            <a:avLst/>
-          </a:prstGeom>
-          <a:noFill/>
-          <a:ln/>
-        </p:spPr>
-        <p:txBody>
-          <a:bodyPr wrap="square" lIns="0" tIns="0" rIns="0" bIns="0" rtlCol="0" anchor="ctr"/>
-          <a:lstStyle/>
-          <a:p>
-            <a:pPr algn="ctr" indent="0" marL="0">
-              <a:buNone/>
-            </a:pPr>
-            <a:r>
-              <a:rPr lang="en-US" sz="900" b="1" dirty="0">
-                <a:solidFill>
-                  <a:srgbClr val="9D174D"/>
-                </a:solidFill>
-                <a:latin typeface="Trebuchet MS" pitchFamily="34" charset="0"/>
-                <a:ea typeface="Trebuchet MS" pitchFamily="34" charset="-122"/>
-                <a:cs typeface="Trebuchet MS" pitchFamily="34" charset="-120"/>
-              </a:rPr>
-              <a:t>i</a:t>
-            </a:r>
-            <a:endParaRPr lang="en-US" sz="900" dirty="0"/>
-          </a:p>
-        </p:txBody>
-      </p:sp>
-      <p:sp>
-        <p:nvSpPr>
-          <p:cNvPr id="60" name="Shape 58"/>
-          <p:cNvSpPr/>
-          <p:nvPr/>
-        </p:nvSpPr>
-        <p:spPr>
-          <a:xfrm>
-            <a:off x="7832252" y="4169664"/>
-            <a:ext cx="603504" cy="475488"/>
-          </a:xfrm>
-          <a:prstGeom prst="rect">
-            <a:avLst>
-              <a:gd name="adj" fmla="val 7692"/>
-            </a:avLst>
-          </a:prstGeom>
-          <a:solidFill>
-            <a:srgbClr val="FFFFFF"/>
-          </a:solidFill>
-          <a:ln w="12700">
-            <a:solidFill>
-              <a:srgbClr val="DB2777"/>
-            </a:solidFill>
-            <a:prstDash val="solid"/>
-          </a:ln>
-        </p:spPr>
-      </p:sp>
-      <p:sp>
-        <p:nvSpPr>
-          <p:cNvPr id="61" name="Text 59"/>
-          <p:cNvSpPr/>
-          <p:nvPr/>
-        </p:nvSpPr>
-        <p:spPr>
-          <a:xfrm>
-            <a:off x="7832252" y="4169664"/>
-            <a:ext cx="603504" cy="475488"/>
-          </a:xfrm>
-          <a:prstGeom prst="rect">
-            <a:avLst/>
-          </a:prstGeom>
-          <a:noFill/>
-          <a:ln/>
-        </p:spPr>
-        <p:txBody>
-          <a:bodyPr wrap="square" lIns="0" tIns="0" rIns="0" bIns="0" rtlCol="0" anchor="ctr"/>
-          <a:lstStyle/>
-          <a:p>
-            <a:pPr algn="ctr" indent="0" marL="0">
-              <a:buNone/>
-            </a:pPr>
-            <a:r>
-              <a:rPr lang="en-US" sz="900" b="1" dirty="0">
-                <a:solidFill>
-                  <a:srgbClr val="9D174D"/>
-                </a:solidFill>
-                <a:latin typeface="Trebuchet MS" pitchFamily="34" charset="0"/>
-                <a:ea typeface="Trebuchet MS" pitchFamily="34" charset="-122"/>
-                <a:cs typeface="Trebuchet MS" pitchFamily="34" charset="-120"/>
-              </a:rPr>
-              <a:t>a</a:t>
+              <a:t>ed</a:t>
             </a:r>
             <a:endParaRPr lang="en-US" sz="900" dirty="0"/>
           </a:p>
@@ -32094,7 +32001,7 @@
                 <a:ea typeface="Calibri" pitchFamily="34" charset="-122"/>
                 <a:cs typeface="Calibri" pitchFamily="34" charset="-120"/>
               </a:rPr>
-              <a:t>a job to do</a:t>
+              <a:t>a job or activity</a:t>
             </a:r>
             <a:endParaRPr lang="en-US" sz="850" dirty="0"/>
           </a:p>
@@ -33079,7 +32986,7 @@
                 <a:ea typeface="Calibri" pitchFamily="34" charset="-122"/>
                 <a:cs typeface="Calibri" pitchFamily="34" charset="-120"/>
               </a:rPr>
-              <a:t>a job to do</a:t>
+              <a:t>a job or activity</a:t>
             </a:r>
             <a:endParaRPr lang="en-US" sz="850" dirty="0"/>
           </a:p>
@@ -34301,7 +34208,7 @@
                 <a:ea typeface="Calibri" pitchFamily="34" charset="-122"/>
                 <a:cs typeface="Calibri" pitchFamily="34" charset="-120"/>
               </a:rPr>
-              <a:t>a job to do</a:t>
+              <a:t>a job or activity</a:t>
             </a:r>
             <a:endParaRPr lang="en-US" sz="850" dirty="0"/>
           </a:p>
@@ -37336,7 +37243,7 @@
                 <a:ea typeface="Trebuchet MS" pitchFamily="34" charset="-122"/>
                 <a:cs typeface="Trebuchet MS" pitchFamily="34" charset="-120"/>
               </a:rPr>
-              <a:t>colour</a:t>
+              <a:t>color</a:t>
             </a:r>
             <a:endParaRPr lang="en-US" sz="1300" dirty="0"/>
           </a:p>
@@ -37553,7 +37460,7 @@
                 <a:ea typeface="Trebuchet MS" pitchFamily="34" charset="-122"/>
                 <a:cs typeface="Trebuchet MS" pitchFamily="34" charset="-120"/>
               </a:rPr>
-              <a:t>-al</a:t>
+              <a:t>-tion</a:t>
             </a:r>
             <a:endParaRPr lang="en-US" sz="1300" dirty="0"/>
           </a:p>
@@ -37706,7 +37613,7 @@
                 <a:ea typeface="Trebuchet MS" pitchFamily="34" charset="-122"/>
                 <a:cs typeface="Trebuchet MS" pitchFamily="34" charset="-120"/>
               </a:rPr>
-              <a:t>-ly</a:t>
+              <a:t>-al</a:t>
             </a:r>
             <a:endParaRPr lang="en-US" sz="1300" dirty="0"/>
           </a:p>
@@ -37795,7 +37702,7 @@
                 <a:ea typeface="Trebuchet MS" pitchFamily="34" charset="-122"/>
                 <a:cs typeface="Trebuchet MS" pitchFamily="34" charset="-120"/>
               </a:rPr>
-              <a:t>cultural</a:t>
+              <a:t>level</a:t>
             </a:r>
             <a:endParaRPr lang="en-US" sz="1300" dirty="0"/>
           </a:p>
@@ -37859,7 +37766,7 @@
                 <a:ea typeface="Trebuchet MS" pitchFamily="34" charset="-122"/>
                 <a:cs typeface="Trebuchet MS" pitchFamily="34" charset="-120"/>
               </a:rPr>
-              <a:t>-tion</a:t>
+              <a:t>-er</a:t>
             </a:r>
             <a:endParaRPr lang="en-US" sz="1300" dirty="0"/>
           </a:p>
@@ -38228,7 +38135,7 @@
                 <a:ea typeface="Trebuchet MS" pitchFamily="34" charset="-122"/>
                 <a:cs typeface="Trebuchet MS" pitchFamily="34" charset="-120"/>
               </a:rPr>
-              <a:t>multitask</a:t>
+              <a:t>multilingual</a:t>
             </a:r>
             <a:endParaRPr lang="en-US" sz="1200" dirty="0"/>
           </a:p>
@@ -38294,7 +38201,7 @@
                 <a:ea typeface="Trebuchet MS" pitchFamily="34" charset="-122"/>
                 <a:cs typeface="Trebuchet MS" pitchFamily="34" charset="-120"/>
               </a:rPr>
-              <a:t>multilingual</a:t>
+              <a:t>multitask</a:t>
             </a:r>
             <a:endParaRPr lang="en-US" sz="1200" dirty="0"/>
           </a:p>
@@ -38360,7 +38267,7 @@
                 <a:ea typeface="Trebuchet MS" pitchFamily="34" charset="-122"/>
                 <a:cs typeface="Trebuchet MS" pitchFamily="34" charset="-120"/>
               </a:rPr>
-              <a:t>multipurpose</a:t>
+              <a:t>multiple</a:t>
             </a:r>
             <a:endParaRPr lang="en-US" sz="1200" dirty="0"/>
           </a:p>
@@ -39614,7 +39521,7 @@
                 <a:ea typeface="Calibri" pitchFamily="34" charset="-122"/>
                 <a:cs typeface="Calibri" pitchFamily="34" charset="-120"/>
               </a:rPr>
-              <a:t>1.  The prefix 'multi-' means many or more than one.</a:t>
+              <a:t>1.  A multilingual person can speak many languages.</a:t>
             </a:r>
             <a:endParaRPr lang="en-US" sz="1300" dirty="0"/>
           </a:p>
@@ -39753,7 +39660,7 @@
                 <a:ea typeface="Calibri" pitchFamily="34" charset="-122"/>
                 <a:cs typeface="Calibri" pitchFamily="34" charset="-120"/>
               </a:rPr>
-              <a:t>2.  The prefix 'multi-' means small or tiny.</a:t>
+              <a:t>2.  The prefix 'multi-' means only two of something.</a:t>
             </a:r>
             <a:endParaRPr lang="en-US" sz="1300" dirty="0"/>
           </a:p>
@@ -39892,7 +39799,7 @@
                 <a:ea typeface="Calibri" pitchFamily="34" charset="-122"/>
                 <a:cs typeface="Calibri" pitchFamily="34" charset="-120"/>
               </a:rPr>
-              <a:t>3.  A multilingual person can speak many languages.</a:t>
+              <a:t>3.  The prefix 'multi-' means one or single.</a:t>
             </a:r>
             <a:endParaRPr lang="en-US" sz="1300" dirty="0"/>
           </a:p>
@@ -39915,11 +39822,11 @@
             </a:avLst>
           </a:prstGeom>
           <a:solidFill>
-            <a:srgbClr val="DCFCE7"/>
-          </a:solidFill>
-          <a:ln w="12700">
-            <a:solidFill>
-              <a:srgbClr val="16A34A"/>
+            <a:srgbClr val="FEE2E2"/>
+          </a:solidFill>
+          <a:ln w="12700">
+            <a:solidFill>
+              <a:srgbClr val="DC2626"/>
             </a:solidFill>
             <a:prstDash val="solid"/>
           </a:ln>
@@ -39952,13 +39859,13 @@
             <a:r>
               <a:rPr lang="en-US" sz="1100" b="1" dirty="0">
                 <a:solidFill>
-                  <a:srgbClr val="16A34A"/>
+                  <a:srgbClr val="DC2626"/>
                 </a:solidFill>
                 <a:latin typeface="Trebuchet MS" pitchFamily="34" charset="0"/>
                 <a:ea typeface="Trebuchet MS" pitchFamily="34" charset="-122"/>
                 <a:cs typeface="Trebuchet MS" pitchFamily="34" charset="-120"/>
               </a:rPr>
-              <a:t>TRUE</a:t>
+              <a:t>FALSE</a:t>
             </a:r>
             <a:endParaRPr lang="en-US" sz="1100" dirty="0"/>
           </a:p>
@@ -40031,7 +39938,7 @@
                 <a:ea typeface="Calibri" pitchFamily="34" charset="-122"/>
                 <a:cs typeface="Calibri" pitchFamily="34" charset="-120"/>
               </a:rPr>
-              <a:t>4.  A multistorey building has many floors.</a:t>
+              <a:t>4.  'Multi-' comes from a Latin word meaning many.</a:t>
             </a:r>
             <a:endParaRPr lang="en-US" sz="1300" dirty="0"/>
           </a:p>
@@ -40170,7 +40077,7 @@
                 <a:ea typeface="Calibri" pitchFamily="34" charset="-122"/>
                 <a:cs typeface="Calibri" pitchFamily="34" charset="-120"/>
               </a:rPr>
-              <a:t>5.  The prefix 'multi-' comes from a Greek word.</a:t>
+              <a:t>5.  The word 'multicultural' contains the prefix 'multi-'.</a:t>
             </a:r>
             <a:endParaRPr lang="en-US" sz="1300" dirty="0"/>
           </a:p>
@@ -40193,11 +40100,11 @@
             </a:avLst>
           </a:prstGeom>
           <a:solidFill>
-            <a:srgbClr val="FEE2E2"/>
-          </a:solidFill>
-          <a:ln w="12700">
-            <a:solidFill>
-              <a:srgbClr val="DC2626"/>
+            <a:srgbClr val="DCFCE7"/>
+          </a:solidFill>
+          <a:ln w="12700">
+            <a:solidFill>
+              <a:srgbClr val="16A34A"/>
             </a:solidFill>
             <a:prstDash val="solid"/>
           </a:ln>
@@ -40230,13 +40137,13 @@
             <a:r>
               <a:rPr lang="en-US" sz="1100" b="1" dirty="0">
                 <a:solidFill>
-                  <a:srgbClr val="DC2626"/>
+                  <a:srgbClr val="16A34A"/>
                 </a:solidFill>
                 <a:latin typeface="Trebuchet MS" pitchFamily="34" charset="0"/>
                 <a:ea typeface="Trebuchet MS" pitchFamily="34" charset="-122"/>
                 <a:cs typeface="Trebuchet MS" pitchFamily="34" charset="-120"/>
               </a:rPr>
-              <a:t>FALSE</a:t>
+              <a:t>TRUE</a:t>
             </a:r>
             <a:endParaRPr lang="en-US" sz="1100" dirty="0"/>
           </a:p>
@@ -41073,7 +40980,7 @@
                 <a:ea typeface="Trebuchet MS" pitchFamily="34" charset="-122"/>
                 <a:cs typeface="Trebuchet MS" pitchFamily="34" charset="-120"/>
               </a:rPr>
-              <a:t>multitask</a:t>
+              <a:t>multilingual</a:t>
             </a:r>
             <a:endParaRPr lang="en-US" sz="1300" dirty="0"/>
           </a:p>
@@ -41139,7 +41046,7 @@
                 <a:ea typeface="Trebuchet MS" pitchFamily="34" charset="-122"/>
                 <a:cs typeface="Trebuchet MS" pitchFamily="34" charset="-120"/>
               </a:rPr>
-              <a:t>multilingual</a:t>
+              <a:t>multitask</a:t>
             </a:r>
             <a:endParaRPr lang="en-US" sz="1300" dirty="0"/>
           </a:p>
@@ -41205,7 +41112,7 @@
                 <a:ea typeface="Trebuchet MS" pitchFamily="34" charset="-122"/>
                 <a:cs typeface="Trebuchet MS" pitchFamily="34" charset="-120"/>
               </a:rPr>
-              <a:t>multipurpose</a:t>
+              <a:t>multiple</a:t>
             </a:r>
             <a:endParaRPr lang="en-US" sz="1300" dirty="0"/>
           </a:p>
@@ -42015,7 +41922,7 @@
                 <a:ea typeface="Trebuchet MS" pitchFamily="34" charset="-122"/>
                 <a:cs typeface="Trebuchet MS" pitchFamily="34" charset="-120"/>
               </a:rPr>
-              <a:t>colour</a:t>
+              <a:t>color</a:t>
             </a:r>
             <a:endParaRPr lang="en-US" sz="1300" dirty="0"/>
           </a:p>
@@ -42232,7 +42139,7 @@
                 <a:ea typeface="Trebuchet MS" pitchFamily="34" charset="-122"/>
                 <a:cs typeface="Trebuchet MS" pitchFamily="34" charset="-120"/>
               </a:rPr>
-              <a:t>-al</a:t>
+              <a:t>-tion</a:t>
             </a:r>
             <a:endParaRPr lang="en-US" sz="1300" dirty="0"/>
           </a:p>
@@ -42385,7 +42292,7 @@
                 <a:ea typeface="Trebuchet MS" pitchFamily="34" charset="-122"/>
                 <a:cs typeface="Trebuchet MS" pitchFamily="34" charset="-120"/>
               </a:rPr>
-              <a:t>-ly</a:t>
+              <a:t>-al</a:t>
             </a:r>
             <a:endParaRPr lang="en-US" sz="1300" dirty="0"/>
           </a:p>
@@ -42474,7 +42381,7 @@
                 <a:ea typeface="Trebuchet MS" pitchFamily="34" charset="-122"/>
                 <a:cs typeface="Trebuchet MS" pitchFamily="34" charset="-120"/>
               </a:rPr>
-              <a:t>cultural</a:t>
+              <a:t>level</a:t>
             </a:r>
             <a:endParaRPr lang="en-US" sz="1300" dirty="0"/>
           </a:p>
@@ -42538,7 +42445,7 @@
                 <a:ea typeface="Trebuchet MS" pitchFamily="34" charset="-122"/>
                 <a:cs typeface="Trebuchet MS" pitchFamily="34" charset="-120"/>
               </a:rPr>
-              <a:t>-tion</a:t>
+              <a:t>-er</a:t>
             </a:r>
             <a:endParaRPr lang="en-US" sz="1300" dirty="0"/>
           </a:p>
@@ -43449,7 +43356,7 @@
                 <a:ea typeface="Calibri" pitchFamily="34" charset="-122"/>
                 <a:cs typeface="Calibri" pitchFamily="34" charset="-120"/>
               </a:rPr>
-              <a:t>Able to be used for many different things.</a:t>
+              <a:t>Having or involving many parts or more than one thing.</a:t>
             </a:r>
             <a:endParaRPr lang="en-US" sz="1200" dirty="0"/>
           </a:p>
@@ -43588,7 +43495,7 @@
                 <a:ea typeface="Calibri" pitchFamily="34" charset="-122"/>
                 <a:cs typeface="Calibri" pitchFamily="34" charset="-120"/>
               </a:rPr>
-              <a:t>Using many different ways to share information, such as sound, pictures, and video together.</a:t>
+              <a:t>Using many different ways to share information, like video, sound, and pictures together.</a:t>
             </a:r>
             <a:endParaRPr lang="en-US" sz="1200" dirty="0"/>
           </a:p>
@@ -43727,7 +43634,7 @@
                 <a:ea typeface="Calibri" pitchFamily="34" charset="-122"/>
                 <a:cs typeface="Calibri" pitchFamily="34" charset="-120"/>
               </a:rPr>
-              <a:t>To do many different jobs or activities at the same time.</a:t>
+              <a:t>Able to speak or use many different languages.</a:t>
             </a:r>
             <a:endParaRPr lang="en-US" sz="1200" dirty="0"/>
           </a:p>
@@ -43866,7 +43773,7 @@
                 <a:ea typeface="Calibri" pitchFamily="34" charset="-122"/>
                 <a:cs typeface="Calibri" pitchFamily="34" charset="-120"/>
               </a:rPr>
-              <a:t>Made up of people from many different cultures and backgrounds.</a:t>
+              <a:t>Including people or ideas from many different cultures and backgrounds.</a:t>
             </a:r>
             <a:endParaRPr lang="en-US" sz="1200" dirty="0"/>
           </a:p>
@@ -43939,7 +43846,7 @@
                 <a:ea typeface="Trebuchet MS" pitchFamily="34" charset="-122"/>
                 <a:cs typeface="Trebuchet MS" pitchFamily="34" charset="-120"/>
               </a:rPr>
-              <a:t>multitask</a:t>
+              <a:t>multilingual</a:t>
             </a:r>
             <a:endParaRPr lang="en-US" sz="1200" dirty="0"/>
           </a:p>
@@ -44005,7 +43912,7 @@
                 <a:ea typeface="Calibri" pitchFamily="34" charset="-122"/>
                 <a:cs typeface="Calibri" pitchFamily="34" charset="-120"/>
               </a:rPr>
-              <a:t>Able to speak many different languages.</a:t>
+              <a:t>To do many different jobs or activities at the same time.</a:t>
             </a:r>
             <a:endParaRPr lang="en-US" sz="1200" dirty="0"/>
           </a:p>
@@ -44078,7 +43985,7 @@
                 <a:ea typeface="Trebuchet MS" pitchFamily="34" charset="-122"/>
                 <a:cs typeface="Trebuchet MS" pitchFamily="34" charset="-120"/>
               </a:rPr>
-              <a:t>multilingual</a:t>
+              <a:t>multitask</a:t>
             </a:r>
             <a:endParaRPr lang="en-US" sz="1200" dirty="0"/>
           </a:p>
@@ -44144,7 +44051,7 @@
                 <a:ea typeface="Calibri" pitchFamily="34" charset="-122"/>
                 <a:cs typeface="Calibri" pitchFamily="34" charset="-120"/>
               </a:rPr>
-              <a:t>To increase a number many times over, or to find the total of groups of equal size.</a:t>
+              <a:t>To increase a number many times over, or to grow in large amounts.</a:t>
             </a:r>
             <a:endParaRPr lang="en-US" sz="1200" dirty="0"/>
           </a:p>
@@ -44217,7 +44124,7 @@
                 <a:ea typeface="Trebuchet MS" pitchFamily="34" charset="-122"/>
                 <a:cs typeface="Trebuchet MS" pitchFamily="34" charset="-120"/>
               </a:rPr>
-              <a:t>multipurpose</a:t>
+              <a:t>multiple</a:t>
             </a:r>
             <a:endParaRPr lang="en-US" sz="1200" dirty="0"/>
           </a:p>
@@ -44283,7 +44190,7 @@
                 <a:ea typeface="Calibri" pitchFamily="34" charset="-122"/>
                 <a:cs typeface="Calibri" pitchFamily="34" charset="-120"/>
               </a:rPr>
-              <a:t>Having many different colours.</a:t>
+              <a:t>Having many different colours at the same time.</a:t>
             </a:r>
             <a:endParaRPr lang="en-US" sz="1200" dirty="0"/>
           </a:p>
@@ -44778,7 +44685,7 @@
                 <a:ea typeface="Calibri" pitchFamily="34" charset="-122"/>
                 <a:cs typeface="Calibri" pitchFamily="34" charset="-120"/>
               </a:rPr>
-              <a:t>Our school is proudly multicultural, with students from many different countries.</a:t>
+              <a:t>Our class made a multicoloured banner to hang in the school hall.</a:t>
             </a:r>
             <a:endParaRPr lang="en-US" sz="1500" dirty="0"/>
           </a:p>
@@ -44942,7 +44849,7 @@
                 <a:ea typeface="Calibri" pitchFamily="34" charset="-122"/>
                 <a:cs typeface="Calibri" pitchFamily="34" charset="-120"/>
               </a:rPr>
-              <a:t>The art teacher asked us to create a multimedia project using photos, music, and video.</a:t>
+              <a:t>She could multitask by reading her book and listening to music at the same time.</a:t>
             </a:r>
             <a:endParaRPr lang="en-US" sz="1500" dirty="0"/>
           </a:p>
@@ -45106,7 +45013,7 @@
                 <a:ea typeface="Calibri" pitchFamily="34" charset="-122"/>
                 <a:cs typeface="Calibri" pitchFamily="34" charset="-120"/>
               </a:rPr>
-              <a:t>Mum can multitask really well — she was cooking dinner while helping me with my homework.</a:t>
+              <a:t>The new shopping centre is a multistorey building with six floors.</a:t>
             </a:r>
             <a:endParaRPr lang="en-US" sz="1500" dirty="0"/>
           </a:p>
